--- a/hw3/HW 3 Presentation Alex Litchfield.pptx
+++ b/hw3/HW 3 Presentation Alex Litchfield.pptx
@@ -18,44 +18,45 @@
     <p:sldId id="263" r:id="rId14"/>
     <p:sldId id="264" r:id="rId15"/>
     <p:sldId id="265" r:id="rId16"/>
+    <p:sldId id="266" r:id="rId17"/>
   </p:sldIdLst>
   <p:sldSz cy="5143500" cx="9144000"/>
   <p:notesSz cx="6858000" cy="9144000"/>
   <p:embeddedFontLst>
     <p:embeddedFont>
       <p:font typeface="IBM Plex Serif"/>
-      <p:regular r:id="rId17"/>
-      <p:bold r:id="rId18"/>
-      <p:italic r:id="rId19"/>
-      <p:boldItalic r:id="rId20"/>
+      <p:regular r:id="rId18"/>
+      <p:bold r:id="rId19"/>
+      <p:italic r:id="rId20"/>
+      <p:boldItalic r:id="rId21"/>
     </p:embeddedFont>
     <p:embeddedFont>
       <p:font typeface="Archivo Medium"/>
-      <p:regular r:id="rId21"/>
-      <p:bold r:id="rId22"/>
-      <p:italic r:id="rId23"/>
-      <p:boldItalic r:id="rId24"/>
+      <p:regular r:id="rId22"/>
+      <p:bold r:id="rId23"/>
+      <p:italic r:id="rId24"/>
+      <p:boldItalic r:id="rId25"/>
     </p:embeddedFont>
     <p:embeddedFont>
       <p:font typeface="IBM Plex Serif Medium"/>
-      <p:regular r:id="rId25"/>
-      <p:bold r:id="rId26"/>
-      <p:italic r:id="rId27"/>
-      <p:boldItalic r:id="rId28"/>
+      <p:regular r:id="rId26"/>
+      <p:bold r:id="rId27"/>
+      <p:italic r:id="rId28"/>
+      <p:boldItalic r:id="rId29"/>
     </p:embeddedFont>
     <p:embeddedFont>
       <p:font typeface="Archivo"/>
-      <p:regular r:id="rId29"/>
-      <p:bold r:id="rId30"/>
-      <p:italic r:id="rId31"/>
-      <p:boldItalic r:id="rId32"/>
+      <p:regular r:id="rId30"/>
+      <p:bold r:id="rId31"/>
+      <p:italic r:id="rId32"/>
+      <p:boldItalic r:id="rId33"/>
     </p:embeddedFont>
     <p:embeddedFont>
       <p:font typeface="Archivo SemiBold"/>
-      <p:regular r:id="rId33"/>
-      <p:bold r:id="rId34"/>
-      <p:italic r:id="rId35"/>
-      <p:boldItalic r:id="rId36"/>
+      <p:regular r:id="rId34"/>
+      <p:bold r:id="rId35"/>
+      <p:italic r:id="rId36"/>
+      <p:boldItalic r:id="rId37"/>
     </p:embeddedFont>
   </p:embeddedFontLst>
   <p:defaultTextStyle>
@@ -836,7 +837,7 @@
   <p:cSld>
     <p:spTree>
       <p:nvGrpSpPr>
-        <p:cNvPr id="371" name="Shape 371"/>
+        <p:cNvPr id="372" name="Shape 372"/>
         <p:cNvGrpSpPr/>
         <p:nvPr/>
       </p:nvGrpSpPr>
@@ -850,7 +851,7 @@
       </p:grpSpPr>
       <p:sp>
         <p:nvSpPr>
-          <p:cNvPr id="372" name="Google Shape;372;g34d0de78c56_0_487:notes"/>
+          <p:cNvPr id="373" name="Google Shape;373;g34d0de78c56_0_473:notes"/>
           <p:cNvSpPr/>
           <p:nvPr>
             <p:ph idx="2" type="sldImg"/>
@@ -885,7 +886,237 @@
       </p:sp>
       <p:sp>
         <p:nvSpPr>
-          <p:cNvPr id="373" name="Google Shape;373;g34d0de78c56_0_487:notes"/>
+          <p:cNvPr id="374" name="Google Shape;374;g34d0de78c56_0_473:notes"/>
+          <p:cNvSpPr txBox="1"/>
+          <p:nvPr>
+            <p:ph idx="1" type="body"/>
+          </p:nvPr>
+        </p:nvSpPr>
+        <p:spPr>
+          <a:xfrm>
+            <a:off x="685800" y="4343400"/>
+            <a:ext cx="5486400" cy="4114800"/>
+          </a:xfrm>
+          <a:prstGeom prst="rect">
+            <a:avLst/>
+          </a:prstGeom>
+        </p:spPr>
+        <p:txBody>
+          <a:bodyPr anchorCtr="0" anchor="t" bIns="91425" lIns="91425" spcFirstLastPara="1" rIns="91425" wrap="square" tIns="91425">
+            <a:noAutofit/>
+          </a:bodyPr>
+          <a:lstStyle/>
+          <a:p>
+            <a:pPr indent="0" lvl="0" marL="0" rtl="0" algn="l">
+              <a:spcBef>
+                <a:spcPts val="0"/>
+              </a:spcBef>
+              <a:spcAft>
+                <a:spcPts val="0"/>
+              </a:spcAft>
+              <a:buNone/>
+            </a:pPr>
+            <a:r>
+              <a:rPr lang="en"/>
+              <a:t>Accuracy: Tells us how many of the model’s predictions were correct overall across all classes</a:t>
+            </a:r>
+            <a:endParaRPr/>
+          </a:p>
+          <a:p>
+            <a:pPr indent="0" lvl="0" marL="0" rtl="0" algn="l">
+              <a:spcBef>
+                <a:spcPts val="0"/>
+              </a:spcBef>
+              <a:spcAft>
+                <a:spcPts val="0"/>
+              </a:spcAft>
+              <a:buNone/>
+            </a:pPr>
+            <a:r>
+              <a:rPr lang="en"/>
+              <a:t>Precision: Tells us how often the model is correct when it predicts a class (how trustworthy is the prediction for the given class?).</a:t>
+            </a:r>
+            <a:endParaRPr/>
+          </a:p>
+          <a:p>
+            <a:pPr indent="0" lvl="0" marL="0" rtl="0" algn="l">
+              <a:spcBef>
+                <a:spcPts val="0"/>
+              </a:spcBef>
+              <a:spcAft>
+                <a:spcPts val="0"/>
+              </a:spcAft>
+              <a:buNone/>
+            </a:pPr>
+            <a:r>
+              <a:rPr lang="en"/>
+              <a:t>Recall: The number of True Positives (TP) over the number of True Positives (TP) and False Negatives (FN) -&gt; TP / (TP + FN). A true positive is an instance </a:t>
+            </a:r>
+            <a:r>
+              <a:rPr lang="en"/>
+              <a:t>where</a:t>
+            </a:r>
+            <a:r>
+              <a:rPr lang="en"/>
+              <a:t> the class was correctly classified by the model. A false negative is an instance where a class should have been guessed but the model ruled that class out as an option (aka picked another)</a:t>
+            </a:r>
+            <a:endParaRPr/>
+          </a:p>
+          <a:p>
+            <a:pPr indent="0" lvl="0" marL="0" rtl="0" algn="l">
+              <a:spcBef>
+                <a:spcPts val="0"/>
+              </a:spcBef>
+              <a:spcAft>
+                <a:spcPts val="0"/>
+              </a:spcAft>
+              <a:buNone/>
+            </a:pPr>
+            <a:r>
+              <a:rPr lang="en"/>
+              <a:t>F1 Score: The harmonic mean between precision and recall. A score that shows the balance between the 2 other scores.</a:t>
+            </a:r>
+            <a:endParaRPr/>
+          </a:p>
+          <a:p>
+            <a:pPr indent="0" lvl="0" marL="0" rtl="0" algn="l">
+              <a:spcBef>
+                <a:spcPts val="0"/>
+              </a:spcBef>
+              <a:spcAft>
+                <a:spcPts val="0"/>
+              </a:spcAft>
+              <a:buNone/>
+            </a:pPr>
+            <a:r>
+              <a:t/>
+            </a:r>
+            <a:endParaRPr/>
+          </a:p>
+          <a:p>
+            <a:pPr indent="0" lvl="0" marL="0" rtl="0" algn="l">
+              <a:spcBef>
+                <a:spcPts val="0"/>
+              </a:spcBef>
+              <a:spcAft>
+                <a:spcPts val="0"/>
+              </a:spcAft>
+              <a:buNone/>
+            </a:pPr>
+            <a:r>
+              <a:rPr lang="en"/>
+              <a:t>All scores improved when over sampling was performed except for precision, which took a slight hit. However, given that </a:t>
+            </a:r>
+            <a:r>
+              <a:rPr lang="en"/>
+              <a:t>3/4</a:t>
+            </a:r>
+            <a:r>
+              <a:rPr lang="en"/>
+              <a:t> metrics improved INCLUDING F1 score, this outcome overall made the model perform better. F1 Score is an extremely important metric because it not only reflects both precision and recall, but the balance between the 2 as well.</a:t>
+            </a:r>
+            <a:endParaRPr/>
+          </a:p>
+          <a:p>
+            <a:pPr indent="0" lvl="0" marL="0" rtl="0" algn="l">
+              <a:spcBef>
+                <a:spcPts val="0"/>
+              </a:spcBef>
+              <a:spcAft>
+                <a:spcPts val="0"/>
+              </a:spcAft>
+              <a:buNone/>
+            </a:pPr>
+            <a:r>
+              <a:t/>
+            </a:r>
+            <a:endParaRPr/>
+          </a:p>
+          <a:p>
+            <a:pPr indent="0" lvl="0" marL="0" rtl="0" algn="l">
+              <a:spcBef>
+                <a:spcPts val="0"/>
+              </a:spcBef>
+              <a:spcAft>
+                <a:spcPts val="0"/>
+              </a:spcAft>
+              <a:buNone/>
+            </a:pPr>
+            <a:r>
+              <a:rPr lang="en"/>
+              <a:t>Overall, the model performed well. It could be improved through a variety of ways, such as introducing other ways of feature extraction or manually setting aside a test/train split (this is NOT what k-fold cross validation does, so it would be a different method </a:t>
+            </a:r>
+            <a:r>
+              <a:rPr lang="en"/>
+              <a:t>altogether). The hypothesis of whether or not we could predict the primary emotion conveyed in a tweet was proven to be true!</a:t>
+            </a:r>
+            <a:endParaRPr/>
+          </a:p>
+        </p:txBody>
+      </p:sp>
+    </p:spTree>
+  </p:cSld>
+  <p:clrMapOvr>
+    <a:masterClrMapping/>
+  </p:clrMapOvr>
+</p:notes>
+</file>
+
+<file path=ppt/notesSlides/notesSlide11.xml><?xml version="1.0" encoding="utf-8"?>
+<p:notes xmlns:a="http://schemas.openxmlformats.org/drawingml/2006/main" xmlns:r="http://schemas.openxmlformats.org/officeDocument/2006/relationships" xmlns:mc="http://schemas.openxmlformats.org/markup-compatibility/2006" xmlns:mv="urn:schemas-microsoft-com:mac:vml" xmlns:p="http://schemas.openxmlformats.org/presentationml/2006/main" xmlns:c="http://schemas.openxmlformats.org/drawingml/2006/chart" xmlns:dgm="http://schemas.openxmlformats.org/drawingml/2006/diagram" xmlns:o="urn:schemas-microsoft-com:office:office" xmlns:v="urn:schemas-microsoft-com:vml" xmlns:pvml="urn:schemas-microsoft-com:office:powerpoint" xmlns:com="http://schemas.openxmlformats.org/drawingml/2006/compatibility" xmlns:p14="http://schemas.microsoft.com/office/powerpoint/2010/main" xmlns:p15="http://schemas.microsoft.com/office/powerpoint/2012/main" xmlns:ahyp="http://schemas.microsoft.com/office/drawing/2018/hyperlinkcolor" showMasterPhAnim="0" showMasterSp="0">
+  <p:cSld>
+    <p:spTree>
+      <p:nvGrpSpPr>
+        <p:cNvPr id="378" name="Shape 378"/>
+        <p:cNvGrpSpPr/>
+        <p:nvPr/>
+      </p:nvGrpSpPr>
+      <p:grpSpPr>
+        <a:xfrm>
+          <a:off x="0" y="0"/>
+          <a:ext cx="0" cy="0"/>
+          <a:chOff x="0" y="0"/>
+          <a:chExt cx="0" cy="0"/>
+        </a:xfrm>
+      </p:grpSpPr>
+      <p:sp>
+        <p:nvSpPr>
+          <p:cNvPr id="379" name="Google Shape;379;g34d0de78c56_0_487:notes"/>
+          <p:cNvSpPr/>
+          <p:nvPr>
+            <p:ph idx="2" type="sldImg"/>
+          </p:nvPr>
+        </p:nvSpPr>
+        <p:spPr>
+          <a:xfrm>
+            <a:off x="381300" y="685800"/>
+            <a:ext cx="6096000" cy="3429000"/>
+          </a:xfrm>
+          <a:custGeom>
+            <a:rect b="b" l="l" r="r" t="t"/>
+            <a:pathLst>
+              <a:path extrusionOk="0" h="120000" w="120000">
+                <a:moveTo>
+                  <a:pt x="0" y="0"/>
+                </a:moveTo>
+                <a:lnTo>
+                  <a:pt x="120000" y="0"/>
+                </a:lnTo>
+                <a:lnTo>
+                  <a:pt x="120000" y="120000"/>
+                </a:lnTo>
+                <a:lnTo>
+                  <a:pt x="0" y="120000"/>
+                </a:lnTo>
+                <a:close/>
+              </a:path>
+            </a:pathLst>
+          </a:custGeom>
+        </p:spPr>
+      </p:sp>
+      <p:sp>
+        <p:nvSpPr>
+          <p:cNvPr id="380" name="Google Shape;380;g34d0de78c56_0_487:notes"/>
           <p:cNvSpPr txBox="1"/>
           <p:nvPr>
             <p:ph idx="1" type="body"/>
@@ -1184,7 +1415,7 @@
       </p:grpSpPr>
       <p:sp>
         <p:nvSpPr>
-          <p:cNvPr id="323" name="Google Shape;323;g34d0de78c56_0_382:notes"/>
+          <p:cNvPr id="323" name="Google Shape;323;g34d0de78c56_0_502:notes"/>
           <p:cNvSpPr/>
           <p:nvPr>
             <p:ph idx="2" type="sldImg"/>
@@ -1219,7 +1450,7 @@
       </p:sp>
       <p:sp>
         <p:nvSpPr>
-          <p:cNvPr id="324" name="Google Shape;324;g34d0de78c56_0_382:notes"/>
+          <p:cNvPr id="324" name="Google Shape;324;g34d0de78c56_0_502:notes"/>
           <p:cNvSpPr txBox="1"/>
           <p:nvPr>
             <p:ph idx="1" type="body"/>
@@ -1250,34 +1481,10 @@
               <a:buNone/>
             </a:pPr>
             <a:r>
-              <a:rPr b="1" lang="en"/>
-              <a:t>Data Preprocessing: </a:t>
-            </a:r>
-            <a:r>
               <a:rPr lang="en"/>
-              <a:t>The dataset only had 2 columns, so little no preprocessing was needed</a:t>
+              <a:t>The top table shows some actual entries in the dataset. The bottom table shows what emotion each label correlates to.</a:t>
             </a:r>
             <a:endParaRPr/>
-          </a:p>
-          <a:p>
-            <a:pPr indent="0" lvl="0" marL="0" rtl="0" algn="l">
-              <a:spcBef>
-                <a:spcPts val="0"/>
-              </a:spcBef>
-              <a:spcAft>
-                <a:spcPts val="0"/>
-              </a:spcAft>
-              <a:buNone/>
-            </a:pPr>
-            <a:r>
-              <a:rPr b="1" lang="en"/>
-              <a:t>Oversampling: </a:t>
-            </a:r>
-            <a:r>
-              <a:rPr lang="en"/>
-              <a:t>Oversampling was performed to try and even out the number of labels in the data</a:t>
-            </a:r>
-            <a:endParaRPr b="1"/>
           </a:p>
         </p:txBody>
       </p:sp>
@@ -1294,7 +1501,7 @@
   <p:cSld>
     <p:spTree>
       <p:nvGrpSpPr>
-        <p:cNvPr id="335" name="Shape 335"/>
+        <p:cNvPr id="329" name="Shape 329"/>
         <p:cNvGrpSpPr/>
         <p:nvPr/>
       </p:nvGrpSpPr>
@@ -1308,7 +1515,7 @@
       </p:grpSpPr>
       <p:sp>
         <p:nvSpPr>
-          <p:cNvPr id="336" name="Google Shape;336;g34d0de78c56_0_413:notes"/>
+          <p:cNvPr id="330" name="Google Shape;330;g34d0de78c56_0_382:notes"/>
           <p:cNvSpPr/>
           <p:nvPr>
             <p:ph idx="2" type="sldImg"/>
@@ -1343,7 +1550,7 @@
       </p:sp>
       <p:sp>
         <p:nvSpPr>
-          <p:cNvPr id="337" name="Google Shape;337;g34d0de78c56_0_413:notes"/>
+          <p:cNvPr id="331" name="Google Shape;331;g34d0de78c56_0_382:notes"/>
           <p:cNvSpPr txBox="1"/>
           <p:nvPr>
             <p:ph idx="1" type="body"/>
@@ -1374,13 +1581,12 @@
               <a:buNone/>
             </a:pPr>
             <a:r>
-              <a:rPr lang="en" u="sng">
-                <a:solidFill>
-                  <a:schemeClr val="hlink"/>
-                </a:solidFill>
-                <a:hlinkClick r:id="rId2"/>
-              </a:rPr>
-              <a:t>https://scikit-learn.org/stable/_images/grid_search_cross_validation.png</a:t>
+              <a:rPr b="1" lang="en"/>
+              <a:t>Data Preprocessing: </a:t>
+            </a:r>
+            <a:r>
+              <a:rPr lang="en"/>
+              <a:t>The dataset only had 2 columns, so little no preprocessing was needed</a:t>
             </a:r>
             <a:endParaRPr/>
           </a:p>
@@ -1395,25 +1601,14 @@
               <a:buNone/>
             </a:pPr>
             <a:r>
-              <a:t/>
+              <a:rPr b="1" lang="en"/>
+              <a:t>Oversampling: </a:t>
             </a:r>
-            <a:endParaRPr/>
-          </a:p>
-          <a:p>
-            <a:pPr indent="0" lvl="0" marL="0" rtl="0" algn="l">
-              <a:spcBef>
-                <a:spcPts val="0"/>
-              </a:spcBef>
-              <a:spcAft>
-                <a:spcPts val="0"/>
-              </a:spcAft>
-              <a:buNone/>
-            </a:pPr>
             <a:r>
               <a:rPr lang="en"/>
-              <a:t>Grey boxes are what fold we are currently on in the loop, the blue boxes are the fold being used as test data in the current iteration, and the green boxes are the training data for the current iteration. Finds different data combinations as you create more folds. Tradeoff for better results is complexity in the model and time it takes to run.</a:t>
+              <a:t>Oversampling was performed to try and even out the number of labels in the data</a:t>
             </a:r>
-            <a:endParaRPr/>
+            <a:endParaRPr b="1"/>
           </a:p>
         </p:txBody>
       </p:sp>
@@ -1430,7 +1625,7 @@
   <p:cSld>
     <p:spTree>
       <p:nvGrpSpPr>
-        <p:cNvPr id="340" name="Shape 340"/>
+        <p:cNvPr id="342" name="Shape 342"/>
         <p:cNvGrpSpPr/>
         <p:nvPr/>
       </p:nvGrpSpPr>
@@ -1444,7 +1639,7 @@
       </p:grpSpPr>
       <p:sp>
         <p:nvSpPr>
-          <p:cNvPr id="341" name="Google Shape;341;g34d0de78c56_0_461:notes"/>
+          <p:cNvPr id="343" name="Google Shape;343;g34d0de78c56_0_413:notes"/>
           <p:cNvSpPr/>
           <p:nvPr>
             <p:ph idx="2" type="sldImg"/>
@@ -1479,7 +1674,7 @@
       </p:sp>
       <p:sp>
         <p:nvSpPr>
-          <p:cNvPr id="342" name="Google Shape;342;g34d0de78c56_0_461:notes"/>
+          <p:cNvPr id="344" name="Google Shape;344;g34d0de78c56_0_413:notes"/>
           <p:cNvSpPr txBox="1"/>
           <p:nvPr>
             <p:ph idx="1" type="body"/>
@@ -1500,19 +1695,23 @@
           </a:bodyPr>
           <a:lstStyle/>
           <a:p>
-            <a:pPr indent="-298450" lvl="0" marL="457200" rtl="0" algn="l">
-              <a:spcBef>
-                <a:spcPts val="0"/>
-              </a:spcBef>
-              <a:spcAft>
-                <a:spcPts val="0"/>
-              </a:spcAft>
-              <a:buSzPts val="1100"/>
-              <a:buAutoNum type="arabicPeriod"/>
+            <a:pPr indent="0" lvl="0" marL="0" rtl="0" algn="l">
+              <a:spcBef>
+                <a:spcPts val="0"/>
+              </a:spcBef>
+              <a:spcAft>
+                <a:spcPts val="0"/>
+              </a:spcAft>
+              <a:buNone/>
             </a:pPr>
             <a:r>
-              <a:rPr lang="en"/>
-              <a:t>Loop through K folds (K = 5)</a:t>
+              <a:rPr lang="en" u="sng">
+                <a:solidFill>
+                  <a:schemeClr val="hlink"/>
+                </a:solidFill>
+                <a:hlinkClick r:id="rId2"/>
+              </a:rPr>
+              <a:t>https://scikit-learn.org/stable/_images/grid_search_cross_validation.png</a:t>
             </a:r>
             <a:endParaRPr/>
           </a:p>
@@ -1527,134 +1726,23 @@
               <a:buNone/>
             </a:pPr>
             <a:r>
-              <a:rPr lang="en"/>
-              <a:t>(Note: Each step after is </a:t>
-            </a:r>
-            <a:r>
-              <a:rPr lang="en"/>
-              <a:t>performed</a:t>
-            </a:r>
-            <a:r>
-              <a:rPr lang="en"/>
-              <a:t> in the loop for the given k fold)</a:t>
+              <a:t/>
             </a:r>
             <a:endParaRPr/>
           </a:p>
           <a:p>
-            <a:pPr indent="-298450" lvl="0" marL="457200" rtl="0" algn="l">
-              <a:spcBef>
-                <a:spcPts val="0"/>
-              </a:spcBef>
-              <a:spcAft>
-                <a:spcPts val="0"/>
-              </a:spcAft>
-              <a:buSzPts val="1100"/>
-              <a:buAutoNum type="arabicPeriod"/>
+            <a:pPr indent="0" lvl="0" marL="0" rtl="0" algn="l">
+              <a:spcBef>
+                <a:spcPts val="0"/>
+              </a:spcBef>
+              <a:spcAft>
+                <a:spcPts val="0"/>
+              </a:spcAft>
+              <a:buNone/>
             </a:pPr>
             <a:r>
               <a:rPr lang="en"/>
-              <a:t>Split the data into training/testing sets as previously shown. To ensure duplicate combos didn’t occur, the test data would be the data from the current fold, and all other data would be the test data</a:t>
-            </a:r>
-            <a:endParaRPr/>
-          </a:p>
-          <a:p>
-            <a:pPr indent="-298450" lvl="0" marL="457200" rtl="0" algn="l">
-              <a:spcBef>
-                <a:spcPts val="0"/>
-              </a:spcBef>
-              <a:spcAft>
-                <a:spcPts val="0"/>
-              </a:spcAft>
-              <a:buSzPts val="1100"/>
-              <a:buAutoNum type="arabicPeriod"/>
-            </a:pPr>
-            <a:r>
-              <a:rPr lang="en"/>
-              <a:t>Stopword removal is the removal of common words that don’t help the model and are just clutter. Examples are the words “is”, “and” or “the”.</a:t>
-            </a:r>
-            <a:endParaRPr/>
-          </a:p>
-          <a:p>
-            <a:pPr indent="-298450" lvl="0" marL="457200" rtl="0" algn="l">
-              <a:spcBef>
-                <a:spcPts val="0"/>
-              </a:spcBef>
-              <a:spcAft>
-                <a:spcPts val="0"/>
-              </a:spcAft>
-              <a:buSzPts val="1100"/>
-              <a:buAutoNum type="arabicPeriod"/>
-            </a:pPr>
-            <a:r>
-              <a:rPr lang="en"/>
-              <a:t>Tokenization breaks down the text into tokens, where TF-IDF uses this to store how important/frequent the word is in the corpus. Tokens are created based on unigrams and bigrams, and the max vocabulary size for the model is 5000. Under 5000 results in lower metrics, </a:t>
-            </a:r>
-            <a:r>
-              <a:rPr lang="en"/>
-              <a:t>meaning</a:t>
-            </a:r>
-            <a:r>
-              <a:rPr lang="en"/>
-              <a:t> the model needs more info to work with, and over 5000 results in slightly lowered metrics and an increased overhead time, likely due to irrelevant words being tracked that otherwise wouldn’t be.</a:t>
-            </a:r>
-            <a:endParaRPr/>
-          </a:p>
-          <a:p>
-            <a:pPr indent="-298450" lvl="0" marL="457200" rtl="0" algn="l">
-              <a:spcBef>
-                <a:spcPts val="0"/>
-              </a:spcBef>
-              <a:spcAft>
-                <a:spcPts val="0"/>
-              </a:spcAft>
-              <a:buSzPts val="1100"/>
-              <a:buAutoNum type="arabicPeriod"/>
-            </a:pPr>
-            <a:r>
-              <a:rPr lang="en"/>
-              <a:t>Over Sampling addresses the </a:t>
-            </a:r>
-            <a:r>
-              <a:rPr lang="en"/>
-              <a:t>imbalance</a:t>
-            </a:r>
-            <a:r>
-              <a:rPr lang="en"/>
-              <a:t> in the emotion labels and balances the distribution better. Two versions of the model exist, one with and one without oversampling to show its impact on the matter</a:t>
-            </a:r>
-            <a:endParaRPr/>
-          </a:p>
-          <a:p>
-            <a:pPr indent="-298450" lvl="0" marL="457200" rtl="0" algn="l">
-              <a:spcBef>
-                <a:spcPts val="0"/>
-              </a:spcBef>
-              <a:spcAft>
-                <a:spcPts val="0"/>
-              </a:spcAft>
-              <a:buSzPts val="1100"/>
-              <a:buAutoNum type="arabicPeriod"/>
-            </a:pPr>
-            <a:r>
-              <a:rPr lang="en"/>
-              <a:t>The data is fit to the classifier so that it can perform a prediction on the given k-fold</a:t>
-            </a:r>
-            <a:endParaRPr/>
-          </a:p>
-          <a:p>
-            <a:pPr indent="-298450" lvl="0" marL="457200" rtl="0" algn="l">
-              <a:spcBef>
-                <a:spcPts val="0"/>
-              </a:spcBef>
-              <a:spcAft>
-                <a:spcPts val="0"/>
-              </a:spcAft>
-              <a:buSzPts val="1100"/>
-              <a:buAutoNum type="arabicPeriod"/>
-            </a:pPr>
-            <a:r>
-              <a:rPr lang="en"/>
-              <a:t>Metrics are taken on each k-fold and stored</a:t>
+              <a:t>Grey boxes are what fold we are currently on in the loop, the blue boxes are the fold being used as test data in the current iteration, and the green boxes are the training data for the current iteration. Finds different data combinations as you create more folds. Tradeoff for better results is complexity in the model and time it takes to run.</a:t>
             </a:r>
             <a:endParaRPr/>
           </a:p>
@@ -1673,7 +1761,7 @@
   <p:cSld>
     <p:spTree>
       <p:nvGrpSpPr>
-        <p:cNvPr id="351" name="Shape 351"/>
+        <p:cNvPr id="347" name="Shape 347"/>
         <p:cNvGrpSpPr/>
         <p:nvPr/>
       </p:nvGrpSpPr>
@@ -1687,7 +1775,7 @@
       </p:grpSpPr>
       <p:sp>
         <p:nvSpPr>
-          <p:cNvPr id="352" name="Google Shape;352;g34d0de78c56_0_429:notes"/>
+          <p:cNvPr id="348" name="Google Shape;348;g34d0de78c56_0_461:notes"/>
           <p:cNvSpPr/>
           <p:nvPr>
             <p:ph idx="2" type="sldImg"/>
@@ -1722,7 +1810,7 @@
       </p:sp>
       <p:sp>
         <p:nvSpPr>
-          <p:cNvPr id="353" name="Google Shape;353;g34d0de78c56_0_429:notes"/>
+          <p:cNvPr id="349" name="Google Shape;349;g34d0de78c56_0_461:notes"/>
           <p:cNvSpPr txBox="1"/>
           <p:nvPr>
             <p:ph idx="1" type="body"/>
@@ -1743,18 +1831,161 @@
           </a:bodyPr>
           <a:lstStyle/>
           <a:p>
-            <a:pPr indent="0" lvl="0" marL="0" rtl="0" algn="l">
-              <a:spcBef>
-                <a:spcPts val="0"/>
-              </a:spcBef>
-              <a:spcAft>
-                <a:spcPts val="0"/>
-              </a:spcAft>
-              <a:buNone/>
+            <a:pPr indent="-298450" lvl="0" marL="457200" rtl="0" algn="l">
+              <a:spcBef>
+                <a:spcPts val="0"/>
+              </a:spcBef>
+              <a:spcAft>
+                <a:spcPts val="0"/>
+              </a:spcAft>
+              <a:buSzPts val="1100"/>
+              <a:buAutoNum type="arabicPeriod"/>
             </a:pPr>
             <a:r>
               <a:rPr lang="en"/>
-              <a:t>Metrics tracked: Accuracy, Precision, Recall, and F1 Score</a:t>
+              <a:t>Loop through K folds (K = 5)</a:t>
+            </a:r>
+            <a:endParaRPr/>
+          </a:p>
+          <a:p>
+            <a:pPr indent="0" lvl="0" marL="0" rtl="0" algn="l">
+              <a:spcBef>
+                <a:spcPts val="0"/>
+              </a:spcBef>
+              <a:spcAft>
+                <a:spcPts val="0"/>
+              </a:spcAft>
+              <a:buNone/>
+            </a:pPr>
+            <a:r>
+              <a:rPr lang="en"/>
+              <a:t>(Note: Each step after is </a:t>
+            </a:r>
+            <a:r>
+              <a:rPr lang="en"/>
+              <a:t>performed</a:t>
+            </a:r>
+            <a:r>
+              <a:rPr lang="en"/>
+              <a:t> in the loop for the given k fold)</a:t>
+            </a:r>
+            <a:endParaRPr/>
+          </a:p>
+          <a:p>
+            <a:pPr indent="-298450" lvl="0" marL="457200" rtl="0" algn="l">
+              <a:spcBef>
+                <a:spcPts val="0"/>
+              </a:spcBef>
+              <a:spcAft>
+                <a:spcPts val="0"/>
+              </a:spcAft>
+              <a:buSzPts val="1100"/>
+              <a:buAutoNum type="arabicPeriod"/>
+            </a:pPr>
+            <a:r>
+              <a:rPr lang="en"/>
+              <a:t>Split the data into training/testing sets as previously shown. To ensure duplicate combos didn’t occur, the test data would be the data from the current fold, and all other data would be the test data</a:t>
+            </a:r>
+            <a:endParaRPr/>
+          </a:p>
+          <a:p>
+            <a:pPr indent="-298450" lvl="0" marL="457200" rtl="0" algn="l">
+              <a:spcBef>
+                <a:spcPts val="0"/>
+              </a:spcBef>
+              <a:spcAft>
+                <a:spcPts val="0"/>
+              </a:spcAft>
+              <a:buSzPts val="1100"/>
+              <a:buAutoNum type="arabicPeriod"/>
+            </a:pPr>
+            <a:r>
+              <a:rPr lang="en"/>
+              <a:t>Stopword removal is the removal of common words that don’t help the model and are just clutter. Examples are the words “is”, “and” or “the”.</a:t>
+            </a:r>
+            <a:endParaRPr/>
+          </a:p>
+          <a:p>
+            <a:pPr indent="-298450" lvl="0" marL="457200" rtl="0" algn="l">
+              <a:spcBef>
+                <a:spcPts val="0"/>
+              </a:spcBef>
+              <a:spcAft>
+                <a:spcPts val="0"/>
+              </a:spcAft>
+              <a:buSzPts val="1100"/>
+              <a:buAutoNum type="arabicPeriod"/>
+            </a:pPr>
+            <a:r>
+              <a:rPr lang="en"/>
+              <a:t>Tokenization breaks down the text into tokens, where TF-IDF uses this to store how important/frequent the word is in the corpus. Tokens are created based on unigrams and bigrams, and the max vocabulary size for the model is 5000. Under 5000 results in lower metrics, </a:t>
+            </a:r>
+            <a:r>
+              <a:rPr lang="en"/>
+              <a:t>meaning</a:t>
+            </a:r>
+            <a:r>
+              <a:rPr lang="en"/>
+              <a:t> the model needs more info to work with, and over 5000 results in slightly lowered metrics and an increased overhead time, likely due to irrelevant words being tracked that otherwise wouldn’t be.</a:t>
+            </a:r>
+            <a:endParaRPr/>
+          </a:p>
+          <a:p>
+            <a:pPr indent="-298450" lvl="0" marL="457200" rtl="0" algn="l">
+              <a:spcBef>
+                <a:spcPts val="0"/>
+              </a:spcBef>
+              <a:spcAft>
+                <a:spcPts val="0"/>
+              </a:spcAft>
+              <a:buSzPts val="1100"/>
+              <a:buAutoNum type="arabicPeriod"/>
+            </a:pPr>
+            <a:r>
+              <a:rPr lang="en"/>
+              <a:t>Over Sampling addresses the </a:t>
+            </a:r>
+            <a:r>
+              <a:rPr lang="en"/>
+              <a:t>imbalance</a:t>
+            </a:r>
+            <a:r>
+              <a:rPr lang="en"/>
+              <a:t> in the emotion labels and balances the distribution better. Two versions of the model exist, one with and one without oversampling to show its impact on the matter</a:t>
+            </a:r>
+            <a:endParaRPr/>
+          </a:p>
+          <a:p>
+            <a:pPr indent="-298450" lvl="0" marL="457200" rtl="0" algn="l">
+              <a:spcBef>
+                <a:spcPts val="0"/>
+              </a:spcBef>
+              <a:spcAft>
+                <a:spcPts val="0"/>
+              </a:spcAft>
+              <a:buSzPts val="1100"/>
+              <a:buAutoNum type="arabicPeriod"/>
+            </a:pPr>
+            <a:r>
+              <a:rPr lang="en"/>
+              <a:t>The data is fit to the classifier so that it can perform a prediction on the given k-fold</a:t>
+            </a:r>
+            <a:endParaRPr/>
+          </a:p>
+          <a:p>
+            <a:pPr indent="-298450" lvl="0" marL="457200" rtl="0" algn="l">
+              <a:spcBef>
+                <a:spcPts val="0"/>
+              </a:spcBef>
+              <a:spcAft>
+                <a:spcPts val="0"/>
+              </a:spcAft>
+              <a:buSzPts val="1100"/>
+              <a:buAutoNum type="arabicPeriod"/>
+            </a:pPr>
+            <a:r>
+              <a:rPr lang="en"/>
+              <a:t>Metrics are taken on each k-fold and stored</a:t>
             </a:r>
             <a:endParaRPr/>
           </a:p>
@@ -1787,7 +2018,7 @@
       </p:grpSpPr>
       <p:sp>
         <p:nvSpPr>
-          <p:cNvPr id="359" name="Google Shape;359;g34d0de78c56_0_449:notes"/>
+          <p:cNvPr id="359" name="Google Shape;359;g34d0de78c56_0_429:notes"/>
           <p:cNvSpPr/>
           <p:nvPr>
             <p:ph idx="2" type="sldImg"/>
@@ -1822,7 +2053,7 @@
       </p:sp>
       <p:sp>
         <p:nvSpPr>
-          <p:cNvPr id="360" name="Google Shape;360;g34d0de78c56_0_449:notes"/>
+          <p:cNvPr id="360" name="Google Shape;360;g34d0de78c56_0_429:notes"/>
           <p:cNvSpPr txBox="1"/>
           <p:nvPr>
             <p:ph idx="1" type="body"/>
@@ -1853,7 +2084,8 @@
               <a:buNone/>
             </a:pPr>
             <a:r>
-              <a:t/>
+              <a:rPr lang="en"/>
+              <a:t>Metrics tracked: Accuracy, Precision, Recall, and F1 Score</a:t>
             </a:r>
             <a:endParaRPr/>
           </a:p>
@@ -1886,7 +2118,7 @@
       </p:grpSpPr>
       <p:sp>
         <p:nvSpPr>
-          <p:cNvPr id="366" name="Google Shape;366;g34d0de78c56_0_473:notes"/>
+          <p:cNvPr id="366" name="Google Shape;366;g34d0de78c56_0_449:notes"/>
           <p:cNvSpPr/>
           <p:nvPr>
             <p:ph idx="2" type="sldImg"/>
@@ -1921,7 +2153,7 @@
       </p:sp>
       <p:sp>
         <p:nvSpPr>
-          <p:cNvPr id="367" name="Google Shape;367;g34d0de78c56_0_473:notes"/>
+          <p:cNvPr id="367" name="Google Shape;367;g34d0de78c56_0_449:notes"/>
           <p:cNvSpPr txBox="1"/>
           <p:nvPr>
             <p:ph idx="1" type="body"/>
@@ -1952,138 +2184,7 @@
               <a:buNone/>
             </a:pPr>
             <a:r>
-              <a:rPr lang="en"/>
-              <a:t>Accuracy: Tells us how many of the model’s predictions were correct overall across all classes</a:t>
-            </a:r>
-            <a:endParaRPr/>
-          </a:p>
-          <a:p>
-            <a:pPr indent="0" lvl="0" marL="0" rtl="0" algn="l">
-              <a:spcBef>
-                <a:spcPts val="0"/>
-              </a:spcBef>
-              <a:spcAft>
-                <a:spcPts val="0"/>
-              </a:spcAft>
-              <a:buNone/>
-            </a:pPr>
-            <a:r>
-              <a:rPr lang="en"/>
-              <a:t>Precision: Tells us how often the model is correct when it predicts a class (how trustworthy is the prediction for the given class?).</a:t>
-            </a:r>
-            <a:endParaRPr/>
-          </a:p>
-          <a:p>
-            <a:pPr indent="0" lvl="0" marL="0" rtl="0" algn="l">
-              <a:spcBef>
-                <a:spcPts val="0"/>
-              </a:spcBef>
-              <a:spcAft>
-                <a:spcPts val="0"/>
-              </a:spcAft>
-              <a:buNone/>
-            </a:pPr>
-            <a:r>
-              <a:rPr lang="en"/>
-              <a:t>Recall: The number of True Positives (TP) over the number of True Positives (TP) and False Negatives (FN) -&gt; TP / (TP + FN). A true positive is an instance </a:t>
-            </a:r>
-            <a:r>
-              <a:rPr lang="en"/>
-              <a:t>where</a:t>
-            </a:r>
-            <a:r>
-              <a:rPr lang="en"/>
-              <a:t> the class was correctly classified by the model. A false negative is an instance where a class should have been guessed but the model ruled that class out as an option (aka picked another)</a:t>
-            </a:r>
-            <a:endParaRPr/>
-          </a:p>
-          <a:p>
-            <a:pPr indent="0" lvl="0" marL="0" rtl="0" algn="l">
-              <a:spcBef>
-                <a:spcPts val="0"/>
-              </a:spcBef>
-              <a:spcAft>
-                <a:spcPts val="0"/>
-              </a:spcAft>
-              <a:buNone/>
-            </a:pPr>
-            <a:r>
-              <a:rPr lang="en"/>
-              <a:t>F1 Score: The harmonic mean between precision and recall. A score that shows the balance between the 2 other scores.</a:t>
-            </a:r>
-            <a:endParaRPr/>
-          </a:p>
-          <a:p>
-            <a:pPr indent="0" lvl="0" marL="0" rtl="0" algn="l">
-              <a:spcBef>
-                <a:spcPts val="0"/>
-              </a:spcBef>
-              <a:spcAft>
-                <a:spcPts val="0"/>
-              </a:spcAft>
-              <a:buNone/>
-            </a:pPr>
-            <a:r>
               <a:t/>
-            </a:r>
-            <a:endParaRPr/>
-          </a:p>
-          <a:p>
-            <a:pPr indent="0" lvl="0" marL="0" rtl="0" algn="l">
-              <a:spcBef>
-                <a:spcPts val="0"/>
-              </a:spcBef>
-              <a:spcAft>
-                <a:spcPts val="0"/>
-              </a:spcAft>
-              <a:buNone/>
-            </a:pPr>
-            <a:r>
-              <a:rPr lang="en"/>
-              <a:t>All scores improved when over sampling was performed except for precision, which took a slight hit. However, given that </a:t>
-            </a:r>
-            <a:r>
-              <a:rPr lang="en"/>
-              <a:t>3/4</a:t>
-            </a:r>
-            <a:r>
-              <a:rPr lang="en"/>
-              <a:t> metrics improved INCLUDING F1 score, this outcome overall made the model perform better. F1 Score is an extremely important metric because it not only reflects both precision and recall, but the balance between the 2 as well.</a:t>
-            </a:r>
-            <a:endParaRPr/>
-          </a:p>
-          <a:p>
-            <a:pPr indent="0" lvl="0" marL="0" rtl="0" algn="l">
-              <a:spcBef>
-                <a:spcPts val="0"/>
-              </a:spcBef>
-              <a:spcAft>
-                <a:spcPts val="0"/>
-              </a:spcAft>
-              <a:buNone/>
-            </a:pPr>
-            <a:r>
-              <a:t/>
-            </a:r>
-            <a:endParaRPr/>
-          </a:p>
-          <a:p>
-            <a:pPr indent="0" lvl="0" marL="0" rtl="0" algn="l">
-              <a:spcBef>
-                <a:spcPts val="0"/>
-              </a:spcBef>
-              <a:spcAft>
-                <a:spcPts val="0"/>
-              </a:spcAft>
-              <a:buNone/>
-            </a:pPr>
-            <a:r>
-              <a:rPr lang="en"/>
-              <a:t>Overall, the model performed well. It could be improved through a variety of ways, such as introducing other ways of feature extraction or manually setting aside a test/train split (this is NOT what k-fold cross validation does, so it would be a different method </a:t>
-            </a:r>
-            <a:r>
-              <a:rPr lang="en"/>
-              <a:t>altogether). The hypothesis of whether or not we could predict the primary emotion conveyed in a tweet was proven to be true!</a:t>
             </a:r>
             <a:endParaRPr/>
           </a:p>
@@ -35045,7 +35146,7 @@
   <p:cSld>
     <p:spTree>
       <p:nvGrpSpPr>
-        <p:cNvPr id="374" name="Shape 374"/>
+        <p:cNvPr id="375" name="Shape 375"/>
         <p:cNvGrpSpPr/>
         <p:nvPr/>
       </p:nvGrpSpPr>
@@ -35059,2252 +35160,7 @@
       </p:grpSpPr>
       <p:sp>
         <p:nvSpPr>
-          <p:cNvPr id="375" name="Google Shape;375;p49"/>
-          <p:cNvSpPr txBox="1"/>
-          <p:nvPr>
-            <p:ph type="title"/>
-          </p:nvPr>
-        </p:nvSpPr>
-        <p:spPr>
-          <a:xfrm>
-            <a:off x="311700" y="445025"/>
-            <a:ext cx="8520600" cy="572700"/>
-          </a:xfrm>
-          <a:prstGeom prst="rect">
-            <a:avLst/>
-          </a:prstGeom>
-        </p:spPr>
-        <p:txBody>
-          <a:bodyPr anchorCtr="0" anchor="t" bIns="91425" lIns="91425" spcFirstLastPara="1" rIns="91425" wrap="square" tIns="91425">
-            <a:noAutofit/>
-          </a:bodyPr>
-          <a:lstStyle/>
-          <a:p>
-            <a:pPr indent="0" lvl="0" marL="0" rtl="0" algn="l">
-              <a:spcBef>
-                <a:spcPts val="0"/>
-              </a:spcBef>
-              <a:spcAft>
-                <a:spcPts val="0"/>
-              </a:spcAft>
-              <a:buNone/>
-            </a:pPr>
-            <a:r>
-              <a:rPr lang="en"/>
-              <a:t>References</a:t>
-            </a:r>
-            <a:endParaRPr/>
-          </a:p>
-        </p:txBody>
-      </p:sp>
-      <p:sp>
-        <p:nvSpPr>
           <p:cNvPr id="376" name="Google Shape;376;p49"/>
-          <p:cNvSpPr txBox="1"/>
-          <p:nvPr>
-            <p:ph idx="1" type="body"/>
-          </p:nvPr>
-        </p:nvSpPr>
-        <p:spPr>
-          <a:xfrm>
-            <a:off x="311700" y="1152475"/>
-            <a:ext cx="8520600" cy="3416400"/>
-          </a:xfrm>
-          <a:prstGeom prst="rect">
-            <a:avLst/>
-          </a:prstGeom>
-        </p:spPr>
-        <p:txBody>
-          <a:bodyPr anchorCtr="0" anchor="t" bIns="91425" lIns="91425" spcFirstLastPara="1" rIns="91425" wrap="square" tIns="91425">
-            <a:noAutofit/>
-          </a:bodyPr>
-          <a:lstStyle/>
-          <a:p>
-            <a:pPr indent="-336550" lvl="0" marL="457200" rtl="0" algn="l">
-              <a:spcBef>
-                <a:spcPts val="0"/>
-              </a:spcBef>
-              <a:spcAft>
-                <a:spcPts val="0"/>
-              </a:spcAft>
-              <a:buSzPts val="1700"/>
-              <a:buChar char="●"/>
-            </a:pPr>
-            <a:r>
-              <a:rPr lang="en" sz="1700" u="sng">
-                <a:solidFill>
-                  <a:schemeClr val="hlink"/>
-                </a:solidFill>
-                <a:hlinkClick r:id="rId3"/>
-              </a:rPr>
-              <a:t>https://www.kaggle.com/datasets/nelgiriyewithana/emotions</a:t>
-            </a:r>
-            <a:endParaRPr sz="1700"/>
-          </a:p>
-          <a:p>
-            <a:pPr indent="-336550" lvl="0" marL="457200" rtl="0" algn="l">
-              <a:spcBef>
-                <a:spcPts val="0"/>
-              </a:spcBef>
-              <a:spcAft>
-                <a:spcPts val="0"/>
-              </a:spcAft>
-              <a:buSzPts val="1700"/>
-              <a:buChar char="●"/>
-            </a:pPr>
-            <a:r>
-              <a:rPr lang="en" sz="1700" u="sng">
-                <a:solidFill>
-                  <a:schemeClr val="hlink"/>
-                </a:solidFill>
-                <a:hlinkClick r:id="rId4"/>
-              </a:rPr>
-              <a:t>https://scikit-learn.org/stable/_images/grid_search_cross_validation.png</a:t>
-            </a:r>
-            <a:endParaRPr sz="1700"/>
-          </a:p>
-          <a:p>
-            <a:pPr indent="-336550" lvl="0" marL="457200" rtl="0" algn="l">
-              <a:spcBef>
-                <a:spcPts val="0"/>
-              </a:spcBef>
-              <a:spcAft>
-                <a:spcPts val="0"/>
-              </a:spcAft>
-              <a:buSzPts val="1700"/>
-              <a:buChar char="●"/>
-            </a:pPr>
-            <a:r>
-              <a:rPr lang="en" sz="1700" u="sng">
-                <a:solidFill>
-                  <a:schemeClr val="hlink"/>
-                </a:solidFill>
-                <a:hlinkClick r:id="rId5"/>
-              </a:rPr>
-              <a:t>https://numpy.org/doc/</a:t>
-            </a:r>
-            <a:endParaRPr sz="1700"/>
-          </a:p>
-          <a:p>
-            <a:pPr indent="-336550" lvl="0" marL="457200" rtl="0" algn="l">
-              <a:spcBef>
-                <a:spcPts val="0"/>
-              </a:spcBef>
-              <a:spcAft>
-                <a:spcPts val="0"/>
-              </a:spcAft>
-              <a:buSzPts val="1700"/>
-              <a:buChar char="●"/>
-            </a:pPr>
-            <a:r>
-              <a:rPr lang="en" sz="1700" u="sng">
-                <a:solidFill>
-                  <a:schemeClr val="hlink"/>
-                </a:solidFill>
-                <a:hlinkClick r:id="rId6"/>
-              </a:rPr>
-              <a:t>https://pandas.pydata.org/docs/</a:t>
-            </a:r>
-            <a:endParaRPr sz="1700"/>
-          </a:p>
-          <a:p>
-            <a:pPr indent="-336550" lvl="0" marL="457200" rtl="0" algn="l">
-              <a:spcBef>
-                <a:spcPts val="0"/>
-              </a:spcBef>
-              <a:spcAft>
-                <a:spcPts val="0"/>
-              </a:spcAft>
-              <a:buSzPts val="1700"/>
-              <a:buChar char="●"/>
-            </a:pPr>
-            <a:r>
-              <a:rPr lang="en" sz="1700" u="sng">
-                <a:solidFill>
-                  <a:schemeClr val="hlink"/>
-                </a:solidFill>
-                <a:hlinkClick r:id="rId7"/>
-              </a:rPr>
-              <a:t>https://scikit-learn.org/stable/modules/naive_bayes.html</a:t>
-            </a:r>
-            <a:endParaRPr sz="1700"/>
-          </a:p>
-          <a:p>
-            <a:pPr indent="-336550" lvl="0" marL="457200" rtl="0" algn="l">
-              <a:spcBef>
-                <a:spcPts val="0"/>
-              </a:spcBef>
-              <a:spcAft>
-                <a:spcPts val="0"/>
-              </a:spcAft>
-              <a:buSzPts val="1700"/>
-              <a:buChar char="●"/>
-            </a:pPr>
-            <a:r>
-              <a:rPr lang="en" sz="1700" u="sng">
-                <a:solidFill>
-                  <a:schemeClr val="hlink"/>
-                </a:solidFill>
-                <a:hlinkClick r:id="rId8"/>
-              </a:rPr>
-              <a:t>https://scikit-learn.org/stable/modules/feature_extraction.html</a:t>
-            </a:r>
-            <a:endParaRPr sz="1700"/>
-          </a:p>
-          <a:p>
-            <a:pPr indent="-336550" lvl="0" marL="457200" rtl="0" algn="l">
-              <a:spcBef>
-                <a:spcPts val="0"/>
-              </a:spcBef>
-              <a:spcAft>
-                <a:spcPts val="0"/>
-              </a:spcAft>
-              <a:buSzPts val="1700"/>
-              <a:buChar char="●"/>
-            </a:pPr>
-            <a:r>
-              <a:rPr lang="en" sz="1700" u="sng">
-                <a:solidFill>
-                  <a:schemeClr val="hlink"/>
-                </a:solidFill>
-                <a:hlinkClick r:id="rId9"/>
-              </a:rPr>
-              <a:t>https://scikit-learn.org/stable/modules/generated/sklearn.model_selection.KFold.html#sklearn.model_selection.KFold</a:t>
-            </a:r>
-            <a:endParaRPr sz="1700"/>
-          </a:p>
-          <a:p>
-            <a:pPr indent="-336550" lvl="0" marL="457200" rtl="0" algn="l">
-              <a:spcBef>
-                <a:spcPts val="0"/>
-              </a:spcBef>
-              <a:spcAft>
-                <a:spcPts val="0"/>
-              </a:spcAft>
-              <a:buSzPts val="1700"/>
-              <a:buChar char="●"/>
-            </a:pPr>
-            <a:r>
-              <a:rPr lang="en" sz="1700" u="sng">
-                <a:solidFill>
-                  <a:schemeClr val="hlink"/>
-                </a:solidFill>
-                <a:hlinkClick r:id="rId10"/>
-              </a:rPr>
-              <a:t>https://imbalanced-learn.org/stable/over_sampling.html</a:t>
-            </a:r>
-            <a:endParaRPr sz="1700"/>
-          </a:p>
-          <a:p>
-            <a:pPr indent="-336550" lvl="0" marL="457200" rtl="0" algn="l">
-              <a:spcBef>
-                <a:spcPts val="0"/>
-              </a:spcBef>
-              <a:spcAft>
-                <a:spcPts val="0"/>
-              </a:spcAft>
-              <a:buSzPts val="1700"/>
-              <a:buChar char="●"/>
-            </a:pPr>
-            <a:r>
-              <a:rPr lang="en" sz="1700" u="sng">
-                <a:solidFill>
-                  <a:schemeClr val="hlink"/>
-                </a:solidFill>
-                <a:hlinkClick r:id="rId11"/>
-              </a:rPr>
-              <a:t>https://scikit-learn.org/stable/modules/model_evaluation.html</a:t>
-            </a:r>
-            <a:endParaRPr sz="1700"/>
-          </a:p>
-        </p:txBody>
-      </p:sp>
-    </p:spTree>
-  </p:cSld>
-  <p:clrMapOvr>
-    <a:masterClrMapping/>
-  </p:clrMapOvr>
-</p:sld>
-</file>
-
-<file path=ppt/slides/slide2.xml><?xml version="1.0" encoding="utf-8"?>
-<p:sld xmlns:a="http://schemas.openxmlformats.org/drawingml/2006/main" xmlns:r="http://schemas.openxmlformats.org/officeDocument/2006/relationships" xmlns:mc="http://schemas.openxmlformats.org/markup-compatibility/2006" xmlns:mv="urn:schemas-microsoft-com:mac:vml" xmlns:p="http://schemas.openxmlformats.org/presentationml/2006/main" xmlns:c="http://schemas.openxmlformats.org/drawingml/2006/chart" xmlns:dgm="http://schemas.openxmlformats.org/drawingml/2006/diagram" xmlns:o="urn:schemas-microsoft-com:office:office" xmlns:v="urn:schemas-microsoft-com:vml" xmlns:pvml="urn:schemas-microsoft-com:office:powerpoint" xmlns:com="http://schemas.openxmlformats.org/drawingml/2006/compatibility" xmlns:p14="http://schemas.microsoft.com/office/powerpoint/2010/main" xmlns:p15="http://schemas.microsoft.com/office/powerpoint/2012/main" xmlns:ahyp="http://schemas.microsoft.com/office/drawing/2018/hyperlinkcolor">
-  <p:cSld>
-    <p:spTree>
-      <p:nvGrpSpPr>
-        <p:cNvPr id="300" name="Shape 300"/>
-        <p:cNvGrpSpPr/>
-        <p:nvPr/>
-      </p:nvGrpSpPr>
-      <p:grpSpPr>
-        <a:xfrm>
-          <a:off x="0" y="0"/>
-          <a:ext cx="0" cy="0"/>
-          <a:chOff x="0" y="0"/>
-          <a:chExt cx="0" cy="0"/>
-        </a:xfrm>
-      </p:grpSpPr>
-      <p:sp>
-        <p:nvSpPr>
-          <p:cNvPr id="301" name="Google Shape;301;p41"/>
-          <p:cNvSpPr txBox="1"/>
-          <p:nvPr>
-            <p:ph type="title"/>
-          </p:nvPr>
-        </p:nvSpPr>
-        <p:spPr>
-          <a:xfrm>
-            <a:off x="385650" y="575525"/>
-            <a:ext cx="8372700" cy="968100"/>
-          </a:xfrm>
-          <a:prstGeom prst="rect">
-            <a:avLst/>
-          </a:prstGeom>
-        </p:spPr>
-        <p:txBody>
-          <a:bodyPr anchorCtr="0" anchor="ctr" bIns="91425" lIns="91425" spcFirstLastPara="1" rIns="91425" wrap="square" tIns="91425">
-            <a:noAutofit/>
-          </a:bodyPr>
-          <a:lstStyle/>
-          <a:p>
-            <a:pPr indent="0" lvl="0" marL="0" rtl="0" algn="ctr">
-              <a:spcBef>
-                <a:spcPts val="0"/>
-              </a:spcBef>
-              <a:spcAft>
-                <a:spcPts val="0"/>
-              </a:spcAft>
-              <a:buNone/>
-            </a:pPr>
-            <a:r>
-              <a:rPr lang="en"/>
-              <a:t>AGENDA</a:t>
-            </a:r>
-            <a:endParaRPr/>
-          </a:p>
-        </p:txBody>
-      </p:sp>
-      <p:sp>
-        <p:nvSpPr>
-          <p:cNvPr id="302" name="Google Shape;302;p41"/>
-          <p:cNvSpPr txBox="1"/>
-          <p:nvPr>
-            <p:ph idx="1" type="subTitle"/>
-          </p:nvPr>
-        </p:nvSpPr>
-        <p:spPr>
-          <a:xfrm>
-            <a:off x="597000" y="1740250"/>
-            <a:ext cx="2241300" cy="831600"/>
-          </a:xfrm>
-          <a:prstGeom prst="rect">
-            <a:avLst/>
-          </a:prstGeom>
-          <a:ln cap="flat" cmpd="sng" w="9525">
-            <a:solidFill>
-              <a:schemeClr val="dk1"/>
-            </a:solidFill>
-            <a:prstDash val="solid"/>
-            <a:round/>
-            <a:headEnd len="sm" w="sm" type="none"/>
-            <a:tailEnd len="sm" w="sm" type="none"/>
-          </a:ln>
-        </p:spPr>
-        <p:txBody>
-          <a:bodyPr anchorCtr="0" anchor="t" bIns="91425" lIns="91425" spcFirstLastPara="1" rIns="91425" wrap="square" tIns="91425">
-            <a:noAutofit/>
-          </a:bodyPr>
-          <a:lstStyle/>
-          <a:p>
-            <a:pPr indent="0" lvl="0" marL="0" rtl="0" algn="ctr">
-              <a:spcBef>
-                <a:spcPts val="0"/>
-              </a:spcBef>
-              <a:spcAft>
-                <a:spcPts val="0"/>
-              </a:spcAft>
-              <a:buNone/>
-            </a:pPr>
-            <a:r>
-              <a:rPr lang="en" sz="2000"/>
-              <a:t>Project Definition/Scope</a:t>
-            </a:r>
-            <a:endParaRPr sz="2000"/>
-          </a:p>
-        </p:txBody>
-      </p:sp>
-      <p:sp>
-        <p:nvSpPr>
-          <p:cNvPr id="303" name="Google Shape;303;p41"/>
-          <p:cNvSpPr txBox="1"/>
-          <p:nvPr>
-            <p:ph idx="2" type="subTitle"/>
-          </p:nvPr>
-        </p:nvSpPr>
-        <p:spPr>
-          <a:xfrm>
-            <a:off x="3578250" y="1740250"/>
-            <a:ext cx="1987500" cy="831600"/>
-          </a:xfrm>
-          <a:prstGeom prst="rect">
-            <a:avLst/>
-          </a:prstGeom>
-          <a:ln cap="flat" cmpd="sng" w="9525">
-            <a:solidFill>
-              <a:schemeClr val="dk1"/>
-            </a:solidFill>
-            <a:prstDash val="solid"/>
-            <a:round/>
-            <a:headEnd len="sm" w="sm" type="none"/>
-            <a:tailEnd len="sm" w="sm" type="none"/>
-          </a:ln>
-        </p:spPr>
-        <p:txBody>
-          <a:bodyPr anchorCtr="0" anchor="t" bIns="91425" lIns="91425" spcFirstLastPara="1" rIns="91425" wrap="square" tIns="91425">
-            <a:noAutofit/>
-          </a:bodyPr>
-          <a:lstStyle/>
-          <a:p>
-            <a:pPr indent="0" lvl="0" marL="0" rtl="0" algn="ctr">
-              <a:spcBef>
-                <a:spcPts val="0"/>
-              </a:spcBef>
-              <a:spcAft>
-                <a:spcPts val="0"/>
-              </a:spcAft>
-              <a:buNone/>
-            </a:pPr>
-            <a:r>
-              <a:rPr lang="en" sz="2000"/>
-              <a:t>Approach Taken</a:t>
-            </a:r>
-            <a:endParaRPr sz="2000"/>
-          </a:p>
-        </p:txBody>
-      </p:sp>
-      <p:sp>
-        <p:nvSpPr>
-          <p:cNvPr id="304" name="Google Shape;304;p41"/>
-          <p:cNvSpPr txBox="1"/>
-          <p:nvPr>
-            <p:ph idx="3" type="subTitle"/>
-          </p:nvPr>
-        </p:nvSpPr>
-        <p:spPr>
-          <a:xfrm>
-            <a:off x="6484950" y="1740250"/>
-            <a:ext cx="1987500" cy="831600"/>
-          </a:xfrm>
-          <a:prstGeom prst="rect">
-            <a:avLst/>
-          </a:prstGeom>
-          <a:ln cap="flat" cmpd="sng" w="9525">
-            <a:solidFill>
-              <a:schemeClr val="dk1"/>
-            </a:solidFill>
-            <a:prstDash val="solid"/>
-            <a:round/>
-            <a:headEnd len="sm" w="sm" type="none"/>
-            <a:tailEnd len="sm" w="sm" type="none"/>
-          </a:ln>
-        </p:spPr>
-        <p:txBody>
-          <a:bodyPr anchorCtr="0" anchor="t" bIns="91425" lIns="91425" spcFirstLastPara="1" rIns="91425" wrap="square" tIns="91425">
-            <a:noAutofit/>
-          </a:bodyPr>
-          <a:lstStyle/>
-          <a:p>
-            <a:pPr indent="0" lvl="0" marL="0" rtl="0" algn="ctr">
-              <a:spcBef>
-                <a:spcPts val="0"/>
-              </a:spcBef>
-              <a:spcAft>
-                <a:spcPts val="0"/>
-              </a:spcAft>
-              <a:buNone/>
-            </a:pPr>
-            <a:r>
-              <a:rPr lang="en" sz="2000"/>
-              <a:t>Data Used</a:t>
-            </a:r>
-            <a:endParaRPr sz="2000"/>
-          </a:p>
-        </p:txBody>
-      </p:sp>
-      <p:sp>
-        <p:nvSpPr>
-          <p:cNvPr id="305" name="Google Shape;305;p41"/>
-          <p:cNvSpPr txBox="1"/>
-          <p:nvPr>
-            <p:ph idx="9" type="sldNum"/>
-          </p:nvPr>
-        </p:nvSpPr>
-        <p:spPr>
-          <a:xfrm>
-            <a:off x="390559" y="40226"/>
-            <a:ext cx="548700" cy="393600"/>
-          </a:xfrm>
-          <a:prstGeom prst="rect">
-            <a:avLst/>
-          </a:prstGeom>
-        </p:spPr>
-        <p:txBody>
-          <a:bodyPr anchorCtr="0" anchor="t" bIns="91425" lIns="91425" spcFirstLastPara="1" rIns="91425" wrap="square" tIns="91425">
-            <a:noAutofit/>
-          </a:bodyPr>
-          <a:lstStyle/>
-          <a:p>
-            <a:pPr indent="0" lvl="0" marL="0" rtl="0" algn="l">
-              <a:spcBef>
-                <a:spcPts val="0"/>
-              </a:spcBef>
-              <a:spcAft>
-                <a:spcPts val="0"/>
-              </a:spcAft>
-              <a:buNone/>
-            </a:pPr>
-            <a:fld id="{00000000-1234-1234-1234-123412341234}" type="slidenum">
-              <a:rPr lang="en"/>
-              <a:t>‹#›</a:t>
-            </a:fld>
-            <a:endParaRPr/>
-          </a:p>
-        </p:txBody>
-      </p:sp>
-      <p:sp>
-        <p:nvSpPr>
-          <p:cNvPr id="306" name="Google Shape;306;p41"/>
-          <p:cNvSpPr txBox="1"/>
-          <p:nvPr>
-            <p:ph idx="12" type="sldNum"/>
-          </p:nvPr>
-        </p:nvSpPr>
-        <p:spPr>
-          <a:xfrm>
-            <a:off x="8472458" y="4663217"/>
-            <a:ext cx="548700" cy="393600"/>
-          </a:xfrm>
-          <a:prstGeom prst="rect">
-            <a:avLst/>
-          </a:prstGeom>
-        </p:spPr>
-        <p:txBody>
-          <a:bodyPr anchorCtr="0" anchor="ctr" bIns="91425" lIns="91425" spcFirstLastPara="1" rIns="91425" wrap="square" tIns="91425">
-            <a:noAutofit/>
-          </a:bodyPr>
-          <a:lstStyle/>
-          <a:p>
-            <a:pPr indent="0" lvl="0" marL="0" rtl="0" algn="l">
-              <a:spcBef>
-                <a:spcPts val="0"/>
-              </a:spcBef>
-              <a:spcAft>
-                <a:spcPts val="0"/>
-              </a:spcAft>
-              <a:buNone/>
-            </a:pPr>
-            <a:fld id="{00000000-1234-1234-1234-123412341234}" type="slidenum">
-              <a:rPr lang="en"/>
-              <a:t>‹#›</a:t>
-            </a:fld>
-            <a:endParaRPr/>
-          </a:p>
-        </p:txBody>
-      </p:sp>
-      <p:sp>
-        <p:nvSpPr>
-          <p:cNvPr id="307" name="Google Shape;307;p41"/>
-          <p:cNvSpPr txBox="1"/>
-          <p:nvPr>
-            <p:ph idx="1" type="subTitle"/>
-          </p:nvPr>
-        </p:nvSpPr>
-        <p:spPr>
-          <a:xfrm>
-            <a:off x="2146425" y="3284825"/>
-            <a:ext cx="1987500" cy="617700"/>
-          </a:xfrm>
-          <a:prstGeom prst="rect">
-            <a:avLst/>
-          </a:prstGeom>
-          <a:ln cap="flat" cmpd="sng" w="9525">
-            <a:solidFill>
-              <a:schemeClr val="dk1"/>
-            </a:solidFill>
-            <a:prstDash val="solid"/>
-            <a:round/>
-            <a:headEnd len="sm" w="sm" type="none"/>
-            <a:tailEnd len="sm" w="sm" type="none"/>
-          </a:ln>
-        </p:spPr>
-        <p:txBody>
-          <a:bodyPr anchorCtr="0" anchor="t" bIns="91425" lIns="91425" spcFirstLastPara="1" rIns="91425" wrap="square" tIns="91425">
-            <a:noAutofit/>
-          </a:bodyPr>
-          <a:lstStyle/>
-          <a:p>
-            <a:pPr indent="0" lvl="0" marL="0" rtl="0" algn="ctr">
-              <a:spcBef>
-                <a:spcPts val="0"/>
-              </a:spcBef>
-              <a:spcAft>
-                <a:spcPts val="0"/>
-              </a:spcAft>
-              <a:buNone/>
-            </a:pPr>
-            <a:r>
-              <a:rPr lang="en" sz="2000"/>
-              <a:t>Results</a:t>
-            </a:r>
-            <a:endParaRPr sz="2000"/>
-          </a:p>
-        </p:txBody>
-      </p:sp>
-      <p:sp>
-        <p:nvSpPr>
-          <p:cNvPr id="308" name="Google Shape;308;p41"/>
-          <p:cNvSpPr txBox="1"/>
-          <p:nvPr>
-            <p:ph idx="1" type="subTitle"/>
-          </p:nvPr>
-        </p:nvSpPr>
-        <p:spPr>
-          <a:xfrm>
-            <a:off x="4965825" y="3284825"/>
-            <a:ext cx="1987500" cy="617700"/>
-          </a:xfrm>
-          <a:prstGeom prst="rect">
-            <a:avLst/>
-          </a:prstGeom>
-          <a:ln cap="flat" cmpd="sng" w="9525">
-            <a:solidFill>
-              <a:schemeClr val="dk1"/>
-            </a:solidFill>
-            <a:prstDash val="solid"/>
-            <a:round/>
-            <a:headEnd len="sm" w="sm" type="none"/>
-            <a:tailEnd len="sm" w="sm" type="none"/>
-          </a:ln>
-        </p:spPr>
-        <p:txBody>
-          <a:bodyPr anchorCtr="0" anchor="t" bIns="91425" lIns="91425" spcFirstLastPara="1" rIns="91425" wrap="square" tIns="91425">
-            <a:noAutofit/>
-          </a:bodyPr>
-          <a:lstStyle/>
-          <a:p>
-            <a:pPr indent="0" lvl="0" marL="0" rtl="0" algn="ctr">
-              <a:spcBef>
-                <a:spcPts val="0"/>
-              </a:spcBef>
-              <a:spcAft>
-                <a:spcPts val="0"/>
-              </a:spcAft>
-              <a:buNone/>
-            </a:pPr>
-            <a:r>
-              <a:rPr lang="en" sz="2000"/>
-              <a:t>Conclusion</a:t>
-            </a:r>
-            <a:endParaRPr sz="2000"/>
-          </a:p>
-        </p:txBody>
-      </p:sp>
-    </p:spTree>
-  </p:cSld>
-  <p:clrMapOvr>
-    <a:masterClrMapping/>
-  </p:clrMapOvr>
-</p:sld>
-</file>
-
-<file path=ppt/slides/slide3.xml><?xml version="1.0" encoding="utf-8"?>
-<p:sld xmlns:a="http://schemas.openxmlformats.org/drawingml/2006/main" xmlns:r="http://schemas.openxmlformats.org/officeDocument/2006/relationships" xmlns:mc="http://schemas.openxmlformats.org/markup-compatibility/2006" xmlns:mv="urn:schemas-microsoft-com:mac:vml" xmlns:p="http://schemas.openxmlformats.org/presentationml/2006/main" xmlns:c="http://schemas.openxmlformats.org/drawingml/2006/chart" xmlns:dgm="http://schemas.openxmlformats.org/drawingml/2006/diagram" xmlns:o="urn:schemas-microsoft-com:office:office" xmlns:v="urn:schemas-microsoft-com:vml" xmlns:pvml="urn:schemas-microsoft-com:office:powerpoint" xmlns:com="http://schemas.openxmlformats.org/drawingml/2006/compatibility" xmlns:p14="http://schemas.microsoft.com/office/powerpoint/2010/main" xmlns:p15="http://schemas.microsoft.com/office/powerpoint/2012/main" xmlns:ahyp="http://schemas.microsoft.com/office/drawing/2018/hyperlinkcolor">
-  <p:cSld>
-    <p:spTree>
-      <p:nvGrpSpPr>
-        <p:cNvPr id="312" name="Shape 312"/>
-        <p:cNvGrpSpPr/>
-        <p:nvPr/>
-      </p:nvGrpSpPr>
-      <p:grpSpPr>
-        <a:xfrm>
-          <a:off x="0" y="0"/>
-          <a:ext cx="0" cy="0"/>
-          <a:chOff x="0" y="0"/>
-          <a:chExt cx="0" cy="0"/>
-        </a:xfrm>
-      </p:grpSpPr>
-      <p:sp>
-        <p:nvSpPr>
-          <p:cNvPr id="313" name="Google Shape;313;p42"/>
-          <p:cNvSpPr txBox="1"/>
-          <p:nvPr>
-            <p:ph type="title"/>
-          </p:nvPr>
-        </p:nvSpPr>
-        <p:spPr>
-          <a:xfrm>
-            <a:off x="390550" y="575525"/>
-            <a:ext cx="8372700" cy="968100"/>
-          </a:xfrm>
-          <a:prstGeom prst="rect">
-            <a:avLst/>
-          </a:prstGeom>
-        </p:spPr>
-        <p:txBody>
-          <a:bodyPr anchorCtr="0" anchor="ctr" bIns="91425" lIns="91425" spcFirstLastPara="1" rIns="91425" wrap="square" tIns="91425">
-            <a:noAutofit/>
-          </a:bodyPr>
-          <a:lstStyle/>
-          <a:p>
-            <a:pPr indent="0" lvl="0" marL="0" rtl="0" algn="ctr">
-              <a:spcBef>
-                <a:spcPts val="0"/>
-              </a:spcBef>
-              <a:spcAft>
-                <a:spcPts val="0"/>
-              </a:spcAft>
-              <a:buNone/>
-            </a:pPr>
-            <a:r>
-              <a:rPr lang="en"/>
-              <a:t>Project Definition/Scope</a:t>
-            </a:r>
-            <a:endParaRPr/>
-          </a:p>
-        </p:txBody>
-      </p:sp>
-      <p:sp>
-        <p:nvSpPr>
-          <p:cNvPr id="314" name="Google Shape;314;p42"/>
-          <p:cNvSpPr txBox="1"/>
-          <p:nvPr>
-            <p:ph idx="1" type="subTitle"/>
-          </p:nvPr>
-        </p:nvSpPr>
-        <p:spPr>
-          <a:xfrm>
-            <a:off x="597000" y="1740250"/>
-            <a:ext cx="1987500" cy="617700"/>
-          </a:xfrm>
-          <a:prstGeom prst="rect">
-            <a:avLst/>
-          </a:prstGeom>
-          <a:ln cap="flat" cmpd="sng" w="9525">
-            <a:solidFill>
-              <a:schemeClr val="lt2"/>
-            </a:solidFill>
-            <a:prstDash val="solid"/>
-            <a:round/>
-            <a:headEnd len="sm" w="sm" type="none"/>
-            <a:tailEnd len="sm" w="sm" type="none"/>
-          </a:ln>
-        </p:spPr>
-        <p:txBody>
-          <a:bodyPr anchorCtr="0" anchor="t" bIns="91425" lIns="91425" spcFirstLastPara="1" rIns="91425" wrap="square" tIns="91425">
-            <a:noAutofit/>
-          </a:bodyPr>
-          <a:lstStyle/>
-          <a:p>
-            <a:pPr indent="0" lvl="0" marL="0" rtl="0" algn="ctr">
-              <a:spcBef>
-                <a:spcPts val="0"/>
-              </a:spcBef>
-              <a:spcAft>
-                <a:spcPts val="0"/>
-              </a:spcAft>
-              <a:buNone/>
-            </a:pPr>
-            <a:r>
-              <a:rPr lang="en"/>
-              <a:t>Dataset</a:t>
-            </a:r>
-            <a:endParaRPr/>
-          </a:p>
-        </p:txBody>
-      </p:sp>
-      <p:sp>
-        <p:nvSpPr>
-          <p:cNvPr id="315" name="Google Shape;315;p42"/>
-          <p:cNvSpPr txBox="1"/>
-          <p:nvPr>
-            <p:ph idx="2" type="subTitle"/>
-          </p:nvPr>
-        </p:nvSpPr>
-        <p:spPr>
-          <a:xfrm>
-            <a:off x="2584500" y="1740250"/>
-            <a:ext cx="1987500" cy="617700"/>
-          </a:xfrm>
-          <a:prstGeom prst="rect">
-            <a:avLst/>
-          </a:prstGeom>
-          <a:ln cap="flat" cmpd="sng" w="9525">
-            <a:solidFill>
-              <a:schemeClr val="lt2"/>
-            </a:solidFill>
-            <a:prstDash val="solid"/>
-            <a:round/>
-            <a:headEnd len="sm" w="sm" type="none"/>
-            <a:tailEnd len="sm" w="sm" type="none"/>
-          </a:ln>
-        </p:spPr>
-        <p:txBody>
-          <a:bodyPr anchorCtr="0" anchor="t" bIns="91425" lIns="91425" spcFirstLastPara="1" rIns="91425" wrap="square" tIns="91425">
-            <a:noAutofit/>
-          </a:bodyPr>
-          <a:lstStyle/>
-          <a:p>
-            <a:pPr indent="0" lvl="0" marL="0" rtl="0" algn="ctr">
-              <a:spcBef>
-                <a:spcPts val="0"/>
-              </a:spcBef>
-              <a:spcAft>
-                <a:spcPts val="0"/>
-              </a:spcAft>
-              <a:buNone/>
-            </a:pPr>
-            <a:r>
-              <a:rPr lang="en"/>
-              <a:t>Hypothesis</a:t>
-            </a:r>
-            <a:endParaRPr/>
-          </a:p>
-        </p:txBody>
-      </p:sp>
-      <p:sp>
-        <p:nvSpPr>
-          <p:cNvPr id="316" name="Google Shape;316;p42"/>
-          <p:cNvSpPr txBox="1"/>
-          <p:nvPr>
-            <p:ph idx="3" type="subTitle"/>
-          </p:nvPr>
-        </p:nvSpPr>
-        <p:spPr>
-          <a:xfrm>
-            <a:off x="4572000" y="1740250"/>
-            <a:ext cx="1987500" cy="617700"/>
-          </a:xfrm>
-          <a:prstGeom prst="rect">
-            <a:avLst/>
-          </a:prstGeom>
-          <a:ln cap="flat" cmpd="sng" w="9525">
-            <a:solidFill>
-              <a:schemeClr val="lt2"/>
-            </a:solidFill>
-            <a:prstDash val="solid"/>
-            <a:round/>
-            <a:headEnd len="sm" w="sm" type="none"/>
-            <a:tailEnd len="sm" w="sm" type="none"/>
-          </a:ln>
-        </p:spPr>
-        <p:txBody>
-          <a:bodyPr anchorCtr="0" anchor="t" bIns="91425" lIns="91425" spcFirstLastPara="1" rIns="91425" wrap="square" tIns="91425">
-            <a:noAutofit/>
-          </a:bodyPr>
-          <a:lstStyle/>
-          <a:p>
-            <a:pPr indent="0" lvl="0" marL="0" rtl="0" algn="ctr">
-              <a:spcBef>
-                <a:spcPts val="0"/>
-              </a:spcBef>
-              <a:spcAft>
-                <a:spcPts val="0"/>
-              </a:spcAft>
-              <a:buNone/>
-            </a:pPr>
-            <a:r>
-              <a:rPr lang="en"/>
-              <a:t>Model</a:t>
-            </a:r>
-            <a:endParaRPr/>
-          </a:p>
-        </p:txBody>
-      </p:sp>
-      <p:sp>
-        <p:nvSpPr>
-          <p:cNvPr id="317" name="Google Shape;317;p42"/>
-          <p:cNvSpPr txBox="1"/>
-          <p:nvPr>
-            <p:ph idx="4" type="subTitle"/>
-          </p:nvPr>
-        </p:nvSpPr>
-        <p:spPr>
-          <a:xfrm>
-            <a:off x="6559500" y="1740250"/>
-            <a:ext cx="1987500" cy="617700"/>
-          </a:xfrm>
-          <a:prstGeom prst="rect">
-            <a:avLst/>
-          </a:prstGeom>
-          <a:ln cap="flat" cmpd="sng" w="9525">
-            <a:solidFill>
-              <a:schemeClr val="lt2"/>
-            </a:solidFill>
-            <a:prstDash val="solid"/>
-            <a:round/>
-            <a:headEnd len="sm" w="sm" type="none"/>
-            <a:tailEnd len="sm" w="sm" type="none"/>
-          </a:ln>
-        </p:spPr>
-        <p:txBody>
-          <a:bodyPr anchorCtr="0" anchor="t" bIns="91425" lIns="91425" spcFirstLastPara="1" rIns="91425" wrap="square" tIns="91425">
-            <a:noAutofit/>
-          </a:bodyPr>
-          <a:lstStyle/>
-          <a:p>
-            <a:pPr indent="0" lvl="0" marL="0" rtl="0" algn="ctr">
-              <a:spcBef>
-                <a:spcPts val="0"/>
-              </a:spcBef>
-              <a:spcAft>
-                <a:spcPts val="0"/>
-              </a:spcAft>
-              <a:buNone/>
-            </a:pPr>
-            <a:r>
-              <a:rPr lang="en"/>
-              <a:t>Features</a:t>
-            </a:r>
-            <a:endParaRPr/>
-          </a:p>
-        </p:txBody>
-      </p:sp>
-      <p:sp>
-        <p:nvSpPr>
-          <p:cNvPr id="318" name="Google Shape;318;p42"/>
-          <p:cNvSpPr txBox="1"/>
-          <p:nvPr>
-            <p:ph idx="5" type="body"/>
-          </p:nvPr>
-        </p:nvSpPr>
-        <p:spPr>
-          <a:xfrm>
-            <a:off x="597000" y="2357950"/>
-            <a:ext cx="1987500" cy="1956600"/>
-          </a:xfrm>
-          <a:prstGeom prst="rect">
-            <a:avLst/>
-          </a:prstGeom>
-          <a:ln cap="flat" cmpd="sng" w="9525">
-            <a:solidFill>
-              <a:schemeClr val="dk1"/>
-            </a:solidFill>
-            <a:prstDash val="solid"/>
-            <a:round/>
-            <a:headEnd len="sm" w="sm" type="none"/>
-            <a:tailEnd len="sm" w="sm" type="none"/>
-          </a:ln>
-        </p:spPr>
-        <p:txBody>
-          <a:bodyPr anchorCtr="0" anchor="t" bIns="91425" lIns="91425" spcFirstLastPara="1" rIns="91425" wrap="square" tIns="91425">
-            <a:noAutofit/>
-          </a:bodyPr>
-          <a:lstStyle/>
-          <a:p>
-            <a:pPr indent="0" lvl="0" marL="0" rtl="0" algn="l">
-              <a:spcBef>
-                <a:spcPts val="0"/>
-              </a:spcBef>
-              <a:spcAft>
-                <a:spcPts val="0"/>
-              </a:spcAft>
-              <a:buNone/>
-            </a:pPr>
-            <a:r>
-              <a:rPr lang="en"/>
-              <a:t>The </a:t>
-            </a:r>
-            <a:r>
-              <a:rPr lang="en" u="sng">
-                <a:solidFill>
-                  <a:schemeClr val="hlink"/>
-                </a:solidFill>
-                <a:hlinkClick r:id="rId3"/>
-              </a:rPr>
-              <a:t>dataset</a:t>
-            </a:r>
-            <a:r>
-              <a:rPr lang="en"/>
-              <a:t> is a collection of annotated english twitter messages. Each message has an emotion label attached: sadness, joy, love, anger, fear, and surprise. It has over 400,000 entries.</a:t>
-            </a:r>
-            <a:endParaRPr/>
-          </a:p>
-        </p:txBody>
-      </p:sp>
-      <p:sp>
-        <p:nvSpPr>
-          <p:cNvPr id="319" name="Google Shape;319;p42"/>
-          <p:cNvSpPr txBox="1"/>
-          <p:nvPr>
-            <p:ph idx="6" type="body"/>
-          </p:nvPr>
-        </p:nvSpPr>
-        <p:spPr>
-          <a:xfrm>
-            <a:off x="2584500" y="2357950"/>
-            <a:ext cx="1987500" cy="1956600"/>
-          </a:xfrm>
-          <a:prstGeom prst="rect">
-            <a:avLst/>
-          </a:prstGeom>
-          <a:ln cap="flat" cmpd="sng" w="9525">
-            <a:solidFill>
-              <a:schemeClr val="dk1"/>
-            </a:solidFill>
-            <a:prstDash val="solid"/>
-            <a:round/>
-            <a:headEnd len="sm" w="sm" type="none"/>
-            <a:tailEnd len="sm" w="sm" type="none"/>
-          </a:ln>
-        </p:spPr>
-        <p:txBody>
-          <a:bodyPr anchorCtr="0" anchor="t" bIns="91425" lIns="91425" spcFirstLastPara="1" rIns="91425" wrap="square" tIns="91425">
-            <a:noAutofit/>
-          </a:bodyPr>
-          <a:lstStyle/>
-          <a:p>
-            <a:pPr indent="0" lvl="0" marL="0" rtl="0" algn="l">
-              <a:spcBef>
-                <a:spcPts val="0"/>
-              </a:spcBef>
-              <a:spcAft>
-                <a:spcPts val="0"/>
-              </a:spcAft>
-              <a:buNone/>
-            </a:pPr>
-            <a:r>
-              <a:rPr lang="en"/>
-              <a:t>Using the contents of a tweet, the primary emotion being conveyed by the user can be predicted</a:t>
-            </a:r>
-            <a:endParaRPr/>
-          </a:p>
-        </p:txBody>
-      </p:sp>
-      <p:sp>
-        <p:nvSpPr>
-          <p:cNvPr id="320" name="Google Shape;320;p42"/>
-          <p:cNvSpPr txBox="1"/>
-          <p:nvPr>
-            <p:ph idx="7" type="body"/>
-          </p:nvPr>
-        </p:nvSpPr>
-        <p:spPr>
-          <a:xfrm>
-            <a:off x="4572000" y="2357950"/>
-            <a:ext cx="1987500" cy="1956600"/>
-          </a:xfrm>
-          <a:prstGeom prst="rect">
-            <a:avLst/>
-          </a:prstGeom>
-          <a:ln cap="flat" cmpd="sng" w="9525">
-            <a:solidFill>
-              <a:schemeClr val="dk1"/>
-            </a:solidFill>
-            <a:prstDash val="solid"/>
-            <a:round/>
-            <a:headEnd len="sm" w="sm" type="none"/>
-            <a:tailEnd len="sm" w="sm" type="none"/>
-          </a:ln>
-        </p:spPr>
-        <p:txBody>
-          <a:bodyPr anchorCtr="0" anchor="t" bIns="91425" lIns="91425" spcFirstLastPara="1" rIns="91425" wrap="square" tIns="91425">
-            <a:noAutofit/>
-          </a:bodyPr>
-          <a:lstStyle/>
-          <a:p>
-            <a:pPr indent="0" lvl="0" marL="0" rtl="0" algn="l">
-              <a:spcBef>
-                <a:spcPts val="0"/>
-              </a:spcBef>
-              <a:spcAft>
-                <a:spcPts val="0"/>
-              </a:spcAft>
-              <a:buNone/>
-            </a:pPr>
-            <a:r>
-              <a:rPr lang="en"/>
-              <a:t>Naïve Bayes</a:t>
-            </a:r>
-            <a:endParaRPr/>
-          </a:p>
-        </p:txBody>
-      </p:sp>
-      <p:sp>
-        <p:nvSpPr>
-          <p:cNvPr id="321" name="Google Shape;321;p42"/>
-          <p:cNvSpPr txBox="1"/>
-          <p:nvPr>
-            <p:ph idx="8" type="body"/>
-          </p:nvPr>
-        </p:nvSpPr>
-        <p:spPr>
-          <a:xfrm>
-            <a:off x="6559500" y="2357950"/>
-            <a:ext cx="1987500" cy="1956600"/>
-          </a:xfrm>
-          <a:prstGeom prst="rect">
-            <a:avLst/>
-          </a:prstGeom>
-          <a:ln cap="flat" cmpd="sng" w="9525">
-            <a:solidFill>
-              <a:schemeClr val="dk1"/>
-            </a:solidFill>
-            <a:prstDash val="solid"/>
-            <a:round/>
-            <a:headEnd len="sm" w="sm" type="none"/>
-            <a:tailEnd len="sm" w="sm" type="none"/>
-          </a:ln>
-        </p:spPr>
-        <p:txBody>
-          <a:bodyPr anchorCtr="0" anchor="t" bIns="91425" lIns="91425" spcFirstLastPara="1" rIns="91425" wrap="square" tIns="91425">
-            <a:noAutofit/>
-          </a:bodyPr>
-          <a:lstStyle/>
-          <a:p>
-            <a:pPr indent="0" lvl="0" marL="0" rtl="0" algn="l">
-              <a:spcBef>
-                <a:spcPts val="0"/>
-              </a:spcBef>
-              <a:spcAft>
-                <a:spcPts val="0"/>
-              </a:spcAft>
-              <a:buNone/>
-            </a:pPr>
-            <a:r>
-              <a:rPr lang="en"/>
-              <a:t>Unigrams, bigrams, TF-IDF</a:t>
-            </a:r>
-            <a:endParaRPr/>
-          </a:p>
-        </p:txBody>
-      </p:sp>
-    </p:spTree>
-  </p:cSld>
-  <p:clrMapOvr>
-    <a:masterClrMapping/>
-  </p:clrMapOvr>
-</p:sld>
-</file>
-
-<file path=ppt/slides/slide4.xml><?xml version="1.0" encoding="utf-8"?>
-<p:sld xmlns:a="http://schemas.openxmlformats.org/drawingml/2006/main" xmlns:r="http://schemas.openxmlformats.org/officeDocument/2006/relationships" xmlns:mc="http://schemas.openxmlformats.org/markup-compatibility/2006" xmlns:mv="urn:schemas-microsoft-com:mac:vml" xmlns:p="http://schemas.openxmlformats.org/presentationml/2006/main" xmlns:c="http://schemas.openxmlformats.org/drawingml/2006/chart" xmlns:dgm="http://schemas.openxmlformats.org/drawingml/2006/diagram" xmlns:o="urn:schemas-microsoft-com:office:office" xmlns:v="urn:schemas-microsoft-com:vml" xmlns:pvml="urn:schemas-microsoft-com:office:powerpoint" xmlns:com="http://schemas.openxmlformats.org/drawingml/2006/compatibility" xmlns:p14="http://schemas.microsoft.com/office/powerpoint/2010/main" xmlns:p15="http://schemas.microsoft.com/office/powerpoint/2012/main" xmlns:ahyp="http://schemas.microsoft.com/office/drawing/2018/hyperlinkcolor">
-  <p:cSld>
-    <p:spTree>
-      <p:nvGrpSpPr>
-        <p:cNvPr id="325" name="Shape 325"/>
-        <p:cNvGrpSpPr/>
-        <p:nvPr/>
-      </p:nvGrpSpPr>
-      <p:grpSpPr>
-        <a:xfrm>
-          <a:off x="0" y="0"/>
-          <a:ext cx="0" cy="0"/>
-          <a:chOff x="0" y="0"/>
-          <a:chExt cx="0" cy="0"/>
-        </a:xfrm>
-      </p:grpSpPr>
-      <p:sp>
-        <p:nvSpPr>
-          <p:cNvPr id="326" name="Google Shape;326;p43"/>
-          <p:cNvSpPr txBox="1"/>
-          <p:nvPr>
-            <p:ph idx="6" type="subTitle"/>
-          </p:nvPr>
-        </p:nvSpPr>
-        <p:spPr>
-          <a:xfrm>
-            <a:off x="4938713" y="1277907"/>
-            <a:ext cx="3838500" cy="481200"/>
-          </a:xfrm>
-          <a:prstGeom prst="rect">
-            <a:avLst/>
-          </a:prstGeom>
-          <a:ln cap="flat" cmpd="sng" w="9525">
-            <a:solidFill>
-              <a:schemeClr val="dk1"/>
-            </a:solidFill>
-            <a:prstDash val="solid"/>
-            <a:round/>
-            <a:headEnd len="sm" w="sm" type="none"/>
-            <a:tailEnd len="sm" w="sm" type="none"/>
-          </a:ln>
-        </p:spPr>
-        <p:txBody>
-          <a:bodyPr anchorCtr="0" anchor="t" bIns="91425" lIns="91425" spcFirstLastPara="1" rIns="91425" wrap="square" tIns="91425">
-            <a:noAutofit/>
-          </a:bodyPr>
-          <a:lstStyle/>
-          <a:p>
-            <a:pPr indent="0" lvl="0" marL="0" rtl="0" algn="l">
-              <a:spcBef>
-                <a:spcPts val="0"/>
-              </a:spcBef>
-              <a:spcAft>
-                <a:spcPts val="0"/>
-              </a:spcAft>
-              <a:buNone/>
-            </a:pPr>
-            <a:r>
-              <a:rPr lang="en"/>
-              <a:t>Software Used</a:t>
-            </a:r>
-            <a:endParaRPr/>
-          </a:p>
-        </p:txBody>
-      </p:sp>
-      <p:sp>
-        <p:nvSpPr>
-          <p:cNvPr id="327" name="Google Shape;327;p43"/>
-          <p:cNvSpPr txBox="1"/>
-          <p:nvPr>
-            <p:ph idx="8" type="subTitle"/>
-          </p:nvPr>
-        </p:nvSpPr>
-        <p:spPr>
-          <a:xfrm>
-            <a:off x="366750" y="3167363"/>
-            <a:ext cx="3838500" cy="481200"/>
-          </a:xfrm>
-          <a:prstGeom prst="rect">
-            <a:avLst/>
-          </a:prstGeom>
-          <a:ln cap="flat" cmpd="sng" w="9525">
-            <a:solidFill>
-              <a:schemeClr val="dk1"/>
-            </a:solidFill>
-            <a:prstDash val="solid"/>
-            <a:round/>
-            <a:headEnd len="sm" w="sm" type="none"/>
-            <a:tailEnd len="sm" w="sm" type="none"/>
-          </a:ln>
-        </p:spPr>
-        <p:txBody>
-          <a:bodyPr anchorCtr="0" anchor="t" bIns="91425" lIns="91425" spcFirstLastPara="1" rIns="91425" wrap="square" tIns="91425">
-            <a:noAutofit/>
-          </a:bodyPr>
-          <a:lstStyle/>
-          <a:p>
-            <a:pPr indent="0" lvl="0" marL="0" rtl="0" algn="l">
-              <a:spcBef>
-                <a:spcPts val="0"/>
-              </a:spcBef>
-              <a:spcAft>
-                <a:spcPts val="0"/>
-              </a:spcAft>
-              <a:buNone/>
-            </a:pPr>
-            <a:r>
-              <a:rPr lang="en"/>
-              <a:t>K-Fold Cross Validation</a:t>
-            </a:r>
-            <a:endParaRPr/>
-          </a:p>
-        </p:txBody>
-      </p:sp>
-      <p:sp>
-        <p:nvSpPr>
-          <p:cNvPr id="328" name="Google Shape;328;p43"/>
-          <p:cNvSpPr txBox="1"/>
-          <p:nvPr>
-            <p:ph idx="2" type="body"/>
-          </p:nvPr>
-        </p:nvSpPr>
-        <p:spPr>
-          <a:xfrm>
-            <a:off x="4938725" y="1759093"/>
-            <a:ext cx="3838500" cy="1138500"/>
-          </a:xfrm>
-          <a:prstGeom prst="rect">
-            <a:avLst/>
-          </a:prstGeom>
-          <a:ln cap="flat" cmpd="sng" w="9525">
-            <a:solidFill>
-              <a:schemeClr val="dk1"/>
-            </a:solidFill>
-            <a:prstDash val="solid"/>
-            <a:round/>
-            <a:headEnd len="sm" w="sm" type="none"/>
-            <a:tailEnd len="sm" w="sm" type="none"/>
-          </a:ln>
-        </p:spPr>
-        <p:txBody>
-          <a:bodyPr anchorCtr="0" anchor="t" bIns="91425" lIns="91425" spcFirstLastPara="1" rIns="91425" wrap="square" tIns="91425">
-            <a:noAutofit/>
-          </a:bodyPr>
-          <a:lstStyle/>
-          <a:p>
-            <a:pPr indent="-317500" lvl="0" marL="457200" rtl="0" algn="l">
-              <a:spcBef>
-                <a:spcPts val="0"/>
-              </a:spcBef>
-              <a:spcAft>
-                <a:spcPts val="0"/>
-              </a:spcAft>
-              <a:buSzPts val="1400"/>
-              <a:buChar char="●"/>
-            </a:pPr>
-            <a:r>
-              <a:rPr lang="en"/>
-              <a:t>Pandas and numpy for data organization</a:t>
-            </a:r>
-            <a:endParaRPr/>
-          </a:p>
-          <a:p>
-            <a:pPr indent="-317500" lvl="0" marL="457200" rtl="0" algn="l">
-              <a:spcBef>
-                <a:spcPts val="0"/>
-              </a:spcBef>
-              <a:spcAft>
-                <a:spcPts val="0"/>
-              </a:spcAft>
-              <a:buSzPts val="1400"/>
-              <a:buChar char="●"/>
-            </a:pPr>
-            <a:r>
-              <a:rPr lang="en"/>
-              <a:t>Sklearn and imblearn for the model and metrics</a:t>
-            </a:r>
-            <a:endParaRPr/>
-          </a:p>
-        </p:txBody>
-      </p:sp>
-      <p:sp>
-        <p:nvSpPr>
-          <p:cNvPr id="329" name="Google Shape;329;p43"/>
-          <p:cNvSpPr txBox="1"/>
-          <p:nvPr>
-            <p:ph idx="1" type="body"/>
-          </p:nvPr>
-        </p:nvSpPr>
-        <p:spPr>
-          <a:xfrm>
-            <a:off x="366725" y="1759093"/>
-            <a:ext cx="3838500" cy="1138500"/>
-          </a:xfrm>
-          <a:prstGeom prst="rect">
-            <a:avLst/>
-          </a:prstGeom>
-          <a:ln cap="flat" cmpd="sng" w="9525">
-            <a:solidFill>
-              <a:schemeClr val="dk1"/>
-            </a:solidFill>
-            <a:prstDash val="solid"/>
-            <a:round/>
-            <a:headEnd len="sm" w="sm" type="none"/>
-            <a:tailEnd len="sm" w="sm" type="none"/>
-          </a:ln>
-        </p:spPr>
-        <p:txBody>
-          <a:bodyPr anchorCtr="0" anchor="t" bIns="91425" lIns="91425" spcFirstLastPara="1" rIns="91425" wrap="square" tIns="91425">
-            <a:noAutofit/>
-          </a:bodyPr>
-          <a:lstStyle/>
-          <a:p>
-            <a:pPr indent="0" lvl="0" marL="0" rtl="0" algn="l">
-              <a:spcBef>
-                <a:spcPts val="0"/>
-              </a:spcBef>
-              <a:spcAft>
-                <a:spcPts val="0"/>
-              </a:spcAft>
-              <a:buNone/>
-            </a:pPr>
-            <a:r>
-              <a:rPr lang="en"/>
-              <a:t>Minimal preprocessing needed; Removed entries with missing information</a:t>
-            </a:r>
-            <a:endParaRPr/>
-          </a:p>
-        </p:txBody>
-      </p:sp>
-      <p:sp>
-        <p:nvSpPr>
-          <p:cNvPr id="330" name="Google Shape;330;p43"/>
-          <p:cNvSpPr txBox="1"/>
-          <p:nvPr>
-            <p:ph idx="3" type="body"/>
-          </p:nvPr>
-        </p:nvSpPr>
-        <p:spPr>
-          <a:xfrm>
-            <a:off x="366750" y="3648575"/>
-            <a:ext cx="3838500" cy="1138500"/>
-          </a:xfrm>
-          <a:prstGeom prst="rect">
-            <a:avLst/>
-          </a:prstGeom>
-          <a:ln cap="flat" cmpd="sng" w="9525">
-            <a:solidFill>
-              <a:schemeClr val="dk1"/>
-            </a:solidFill>
-            <a:prstDash val="solid"/>
-            <a:round/>
-            <a:headEnd len="sm" w="sm" type="none"/>
-            <a:tailEnd len="sm" w="sm" type="none"/>
-          </a:ln>
-        </p:spPr>
-        <p:txBody>
-          <a:bodyPr anchorCtr="0" anchor="t" bIns="91425" lIns="91425" spcFirstLastPara="1" rIns="91425" wrap="square" tIns="91425">
-            <a:noAutofit/>
-          </a:bodyPr>
-          <a:lstStyle/>
-          <a:p>
-            <a:pPr indent="0" lvl="0" marL="0" rtl="0" algn="l">
-              <a:spcBef>
-                <a:spcPts val="0"/>
-              </a:spcBef>
-              <a:spcAft>
-                <a:spcPts val="0"/>
-              </a:spcAft>
-              <a:buNone/>
-            </a:pPr>
-            <a:r>
-              <a:rPr lang="en"/>
-              <a:t>Data is divided into k=5 equal size folds. The model is trained and tested k times, validating through different portions each time</a:t>
-            </a:r>
-            <a:endParaRPr/>
-          </a:p>
-        </p:txBody>
-      </p:sp>
-      <p:sp>
-        <p:nvSpPr>
-          <p:cNvPr id="331" name="Google Shape;331;p43"/>
-          <p:cNvSpPr txBox="1"/>
-          <p:nvPr>
-            <p:ph idx="4" type="body"/>
-          </p:nvPr>
-        </p:nvSpPr>
-        <p:spPr>
-          <a:xfrm>
-            <a:off x="4938750" y="3648575"/>
-            <a:ext cx="3838500" cy="1138500"/>
-          </a:xfrm>
-          <a:prstGeom prst="rect">
-            <a:avLst/>
-          </a:prstGeom>
-          <a:ln cap="flat" cmpd="sng" w="9525">
-            <a:solidFill>
-              <a:schemeClr val="dk1"/>
-            </a:solidFill>
-            <a:prstDash val="solid"/>
-            <a:round/>
-            <a:headEnd len="sm" w="sm" type="none"/>
-            <a:tailEnd len="sm" w="sm" type="none"/>
-          </a:ln>
-        </p:spPr>
-        <p:txBody>
-          <a:bodyPr anchorCtr="0" anchor="t" bIns="91425" lIns="91425" spcFirstLastPara="1" rIns="91425" wrap="square" tIns="91425">
-            <a:noAutofit/>
-          </a:bodyPr>
-          <a:lstStyle/>
-          <a:p>
-            <a:pPr indent="0" lvl="0" marL="0" rtl="0" algn="l">
-              <a:spcBef>
-                <a:spcPts val="0"/>
-              </a:spcBef>
-              <a:spcAft>
-                <a:spcPts val="0"/>
-              </a:spcAft>
-              <a:buNone/>
-            </a:pPr>
-            <a:r>
-              <a:rPr lang="en"/>
-              <a:t>Some emotions are more frequent than others in the </a:t>
-            </a:r>
-            <a:r>
-              <a:rPr lang="en"/>
-              <a:t>dataset</a:t>
-            </a:r>
-            <a:r>
-              <a:rPr lang="en"/>
-              <a:t>, with </a:t>
-            </a:r>
-            <a:r>
-              <a:rPr lang="en"/>
-              <a:t>surprise</a:t>
-            </a:r>
-            <a:r>
-              <a:rPr lang="en"/>
-              <a:t> trailing behind the next least frequent by over 5,000 </a:t>
-            </a:r>
-            <a:r>
-              <a:rPr lang="en"/>
-              <a:t>occurrences.</a:t>
-            </a:r>
-            <a:endParaRPr/>
-          </a:p>
-        </p:txBody>
-      </p:sp>
-      <p:sp>
-        <p:nvSpPr>
-          <p:cNvPr id="332" name="Google Shape;332;p43"/>
-          <p:cNvSpPr txBox="1"/>
-          <p:nvPr>
-            <p:ph type="title"/>
-          </p:nvPr>
-        </p:nvSpPr>
-        <p:spPr>
-          <a:xfrm>
-            <a:off x="366750" y="450025"/>
-            <a:ext cx="8184600" cy="758100"/>
-          </a:xfrm>
-          <a:prstGeom prst="rect">
-            <a:avLst/>
-          </a:prstGeom>
-        </p:spPr>
-        <p:txBody>
-          <a:bodyPr anchorCtr="0" anchor="ctr" bIns="91425" lIns="91425" spcFirstLastPara="1" rIns="91425" wrap="square" tIns="91425">
-            <a:noAutofit/>
-          </a:bodyPr>
-          <a:lstStyle/>
-          <a:p>
-            <a:pPr indent="0" lvl="0" marL="0" rtl="0" algn="l">
-              <a:spcBef>
-                <a:spcPts val="0"/>
-              </a:spcBef>
-              <a:spcAft>
-                <a:spcPts val="0"/>
-              </a:spcAft>
-              <a:buNone/>
-            </a:pPr>
-            <a:r>
-              <a:rPr lang="en"/>
-              <a:t>Approach Taken</a:t>
-            </a:r>
-            <a:endParaRPr/>
-          </a:p>
-        </p:txBody>
-      </p:sp>
-      <p:sp>
-        <p:nvSpPr>
-          <p:cNvPr id="333" name="Google Shape;333;p43"/>
-          <p:cNvSpPr txBox="1"/>
-          <p:nvPr>
-            <p:ph idx="5" type="subTitle"/>
-          </p:nvPr>
-        </p:nvSpPr>
-        <p:spPr>
-          <a:xfrm>
-            <a:off x="366763" y="1277907"/>
-            <a:ext cx="3838500" cy="481200"/>
-          </a:xfrm>
-          <a:prstGeom prst="rect">
-            <a:avLst/>
-          </a:prstGeom>
-          <a:ln cap="flat" cmpd="sng" w="9525">
-            <a:solidFill>
-              <a:schemeClr val="dk1"/>
-            </a:solidFill>
-            <a:prstDash val="solid"/>
-            <a:round/>
-            <a:headEnd len="sm" w="sm" type="none"/>
-            <a:tailEnd len="sm" w="sm" type="none"/>
-          </a:ln>
-        </p:spPr>
-        <p:txBody>
-          <a:bodyPr anchorCtr="0" anchor="t" bIns="91425" lIns="91425" spcFirstLastPara="1" rIns="91425" wrap="square" tIns="91425">
-            <a:noAutofit/>
-          </a:bodyPr>
-          <a:lstStyle/>
-          <a:p>
-            <a:pPr indent="0" lvl="0" marL="0" rtl="0" algn="l">
-              <a:spcBef>
-                <a:spcPts val="0"/>
-              </a:spcBef>
-              <a:spcAft>
-                <a:spcPts val="0"/>
-              </a:spcAft>
-              <a:buNone/>
-            </a:pPr>
-            <a:r>
-              <a:rPr lang="en"/>
-              <a:t>Data Preprocessing</a:t>
-            </a:r>
-            <a:endParaRPr/>
-          </a:p>
-        </p:txBody>
-      </p:sp>
-      <p:sp>
-        <p:nvSpPr>
-          <p:cNvPr id="334" name="Google Shape;334;p43"/>
-          <p:cNvSpPr txBox="1"/>
-          <p:nvPr>
-            <p:ph idx="7" type="subTitle"/>
-          </p:nvPr>
-        </p:nvSpPr>
-        <p:spPr>
-          <a:xfrm>
-            <a:off x="4938761" y="3167363"/>
-            <a:ext cx="3838500" cy="481200"/>
-          </a:xfrm>
-          <a:prstGeom prst="rect">
-            <a:avLst/>
-          </a:prstGeom>
-          <a:ln cap="flat" cmpd="sng" w="9525">
-            <a:solidFill>
-              <a:schemeClr val="dk1"/>
-            </a:solidFill>
-            <a:prstDash val="solid"/>
-            <a:round/>
-            <a:headEnd len="sm" w="sm" type="none"/>
-            <a:tailEnd len="sm" w="sm" type="none"/>
-          </a:ln>
-        </p:spPr>
-        <p:txBody>
-          <a:bodyPr anchorCtr="0" anchor="t" bIns="91425" lIns="91425" spcFirstLastPara="1" rIns="91425" wrap="square" tIns="91425">
-            <a:noAutofit/>
-          </a:bodyPr>
-          <a:lstStyle/>
-          <a:p>
-            <a:pPr indent="0" lvl="0" marL="0" rtl="0" algn="l">
-              <a:spcBef>
-                <a:spcPts val="0"/>
-              </a:spcBef>
-              <a:spcAft>
-                <a:spcPts val="0"/>
-              </a:spcAft>
-              <a:buNone/>
-            </a:pPr>
-            <a:r>
-              <a:rPr lang="en"/>
-              <a:t>Oversampling</a:t>
-            </a:r>
-            <a:endParaRPr/>
-          </a:p>
-        </p:txBody>
-      </p:sp>
-    </p:spTree>
-  </p:cSld>
-  <p:clrMapOvr>
-    <a:masterClrMapping/>
-  </p:clrMapOvr>
-</p:sld>
-</file>
-
-<file path=ppt/slides/slide5.xml><?xml version="1.0" encoding="utf-8"?>
-<p:sld xmlns:a="http://schemas.openxmlformats.org/drawingml/2006/main" xmlns:r="http://schemas.openxmlformats.org/officeDocument/2006/relationships" xmlns:mc="http://schemas.openxmlformats.org/markup-compatibility/2006" xmlns:mv="urn:schemas-microsoft-com:mac:vml" xmlns:p="http://schemas.openxmlformats.org/presentationml/2006/main" xmlns:c="http://schemas.openxmlformats.org/drawingml/2006/chart" xmlns:dgm="http://schemas.openxmlformats.org/drawingml/2006/diagram" xmlns:o="urn:schemas-microsoft-com:office:office" xmlns:v="urn:schemas-microsoft-com:vml" xmlns:pvml="urn:schemas-microsoft-com:office:powerpoint" xmlns:com="http://schemas.openxmlformats.org/drawingml/2006/compatibility" xmlns:p14="http://schemas.microsoft.com/office/powerpoint/2010/main" xmlns:p15="http://schemas.microsoft.com/office/powerpoint/2012/main" xmlns:ahyp="http://schemas.microsoft.com/office/drawing/2018/hyperlinkcolor">
-  <p:cSld>
-    <p:spTree>
-      <p:nvGrpSpPr>
-        <p:cNvPr id="338" name="Shape 338"/>
-        <p:cNvGrpSpPr/>
-        <p:nvPr/>
-      </p:nvGrpSpPr>
-      <p:grpSpPr>
-        <a:xfrm>
-          <a:off x="0" y="0"/>
-          <a:ext cx="0" cy="0"/>
-          <a:chOff x="0" y="0"/>
-          <a:chExt cx="0" cy="0"/>
-        </a:xfrm>
-      </p:grpSpPr>
-      <p:pic>
-        <p:nvPicPr>
-          <p:cNvPr id="339" name="Google Shape;339;p44"/>
-          <p:cNvPicPr preferRelativeResize="0"/>
-          <p:nvPr/>
-        </p:nvPicPr>
-        <p:blipFill>
-          <a:blip r:embed="rId3">
-            <a:alphaModFix/>
-          </a:blip>
-          <a:stretch>
-            <a:fillRect/>
-          </a:stretch>
-        </p:blipFill>
-        <p:spPr>
-          <a:xfrm>
-            <a:off x="1079138" y="152400"/>
-            <a:ext cx="6985725" cy="4838700"/>
-          </a:xfrm>
-          <a:prstGeom prst="rect">
-            <a:avLst/>
-          </a:prstGeom>
-          <a:noFill/>
-          <a:ln>
-            <a:noFill/>
-          </a:ln>
-        </p:spPr>
-      </p:pic>
-    </p:spTree>
-  </p:cSld>
-  <p:clrMapOvr>
-    <a:masterClrMapping/>
-  </p:clrMapOvr>
-</p:sld>
-</file>
-
-<file path=ppt/slides/slide6.xml><?xml version="1.0" encoding="utf-8"?>
-<p:sld xmlns:a="http://schemas.openxmlformats.org/drawingml/2006/main" xmlns:r="http://schemas.openxmlformats.org/officeDocument/2006/relationships" xmlns:mc="http://schemas.openxmlformats.org/markup-compatibility/2006" xmlns:mv="urn:schemas-microsoft-com:mac:vml" xmlns:p="http://schemas.openxmlformats.org/presentationml/2006/main" xmlns:c="http://schemas.openxmlformats.org/drawingml/2006/chart" xmlns:dgm="http://schemas.openxmlformats.org/drawingml/2006/diagram" xmlns:o="urn:schemas-microsoft-com:office:office" xmlns:v="urn:schemas-microsoft-com:vml" xmlns:pvml="urn:schemas-microsoft-com:office:powerpoint" xmlns:com="http://schemas.openxmlformats.org/drawingml/2006/compatibility" xmlns:p14="http://schemas.microsoft.com/office/powerpoint/2010/main" xmlns:p15="http://schemas.microsoft.com/office/powerpoint/2012/main" xmlns:ahyp="http://schemas.microsoft.com/office/drawing/2018/hyperlinkcolor">
-  <p:cSld>
-    <p:spTree>
-      <p:nvGrpSpPr>
-        <p:cNvPr id="343" name="Shape 343"/>
-        <p:cNvGrpSpPr/>
-        <p:nvPr/>
-      </p:nvGrpSpPr>
-      <p:grpSpPr>
-        <a:xfrm>
-          <a:off x="0" y="0"/>
-          <a:ext cx="0" cy="0"/>
-          <a:chOff x="0" y="0"/>
-          <a:chExt cx="0" cy="0"/>
-        </a:xfrm>
-      </p:grpSpPr>
-      <p:sp>
-        <p:nvSpPr>
-          <p:cNvPr id="344" name="Google Shape;344;p45"/>
-          <p:cNvSpPr txBox="1"/>
-          <p:nvPr>
-            <p:ph idx="3" type="subTitle"/>
-          </p:nvPr>
-        </p:nvSpPr>
-        <p:spPr>
-          <a:xfrm>
-            <a:off x="4406650" y="3425570"/>
-            <a:ext cx="4409700" cy="542700"/>
-          </a:xfrm>
-          <a:prstGeom prst="rect">
-            <a:avLst/>
-          </a:prstGeom>
-        </p:spPr>
-        <p:txBody>
-          <a:bodyPr anchorCtr="0" anchor="t" bIns="91425" lIns="91425" spcFirstLastPara="1" rIns="91425" wrap="square" tIns="91425">
-            <a:noAutofit/>
-          </a:bodyPr>
-          <a:lstStyle/>
-          <a:p>
-            <a:pPr indent="0" lvl="0" marL="0" rtl="0" algn="l">
-              <a:spcBef>
-                <a:spcPts val="0"/>
-              </a:spcBef>
-              <a:spcAft>
-                <a:spcPts val="0"/>
-              </a:spcAft>
-              <a:buNone/>
-            </a:pPr>
-            <a:r>
-              <a:rPr lang="en"/>
-              <a:t>OverSampling (If used)</a:t>
-            </a:r>
-            <a:endParaRPr/>
-          </a:p>
-        </p:txBody>
-      </p:sp>
-      <p:sp>
-        <p:nvSpPr>
-          <p:cNvPr id="345" name="Google Shape;345;p45"/>
-          <p:cNvSpPr txBox="1"/>
-          <p:nvPr>
-            <p:ph idx="1" type="subTitle"/>
-          </p:nvPr>
-        </p:nvSpPr>
-        <p:spPr>
-          <a:xfrm>
-            <a:off x="4406650" y="393750"/>
-            <a:ext cx="4409700" cy="542700"/>
-          </a:xfrm>
-          <a:prstGeom prst="rect">
-            <a:avLst/>
-          </a:prstGeom>
-        </p:spPr>
-        <p:txBody>
-          <a:bodyPr anchorCtr="0" anchor="t" bIns="91425" lIns="91425" spcFirstLastPara="1" rIns="91425" wrap="square" tIns="91425">
-            <a:noAutofit/>
-          </a:bodyPr>
-          <a:lstStyle/>
-          <a:p>
-            <a:pPr indent="0" lvl="0" marL="0" rtl="0" algn="l">
-              <a:spcBef>
-                <a:spcPts val="0"/>
-              </a:spcBef>
-              <a:spcAft>
-                <a:spcPts val="0"/>
-              </a:spcAft>
-              <a:buNone/>
-            </a:pPr>
-            <a:r>
-              <a:rPr lang="en"/>
-              <a:t>Loop through K-Folds (K=5)</a:t>
-            </a:r>
-            <a:endParaRPr/>
-          </a:p>
-        </p:txBody>
-      </p:sp>
-      <p:sp>
-        <p:nvSpPr>
-          <p:cNvPr id="346" name="Google Shape;346;p45"/>
-          <p:cNvSpPr txBox="1"/>
-          <p:nvPr>
-            <p:ph idx="4" type="subTitle"/>
-          </p:nvPr>
-        </p:nvSpPr>
-        <p:spPr>
-          <a:xfrm>
-            <a:off x="4406650" y="1909660"/>
-            <a:ext cx="4409700" cy="542700"/>
-          </a:xfrm>
-          <a:prstGeom prst="rect">
-            <a:avLst/>
-          </a:prstGeom>
-        </p:spPr>
-        <p:txBody>
-          <a:bodyPr anchorCtr="0" anchor="t" bIns="91425" lIns="91425" spcFirstLastPara="1" rIns="91425" wrap="square" tIns="91425">
-            <a:noAutofit/>
-          </a:bodyPr>
-          <a:lstStyle/>
-          <a:p>
-            <a:pPr indent="0" lvl="0" marL="0" rtl="0" algn="l">
-              <a:spcBef>
-                <a:spcPts val="0"/>
-              </a:spcBef>
-              <a:spcAft>
-                <a:spcPts val="0"/>
-              </a:spcAft>
-              <a:buNone/>
-            </a:pPr>
-            <a:r>
-              <a:rPr lang="en"/>
-              <a:t>Perform Stopword Removal</a:t>
-            </a:r>
-            <a:endParaRPr/>
-          </a:p>
-        </p:txBody>
-      </p:sp>
-      <p:sp>
-        <p:nvSpPr>
-          <p:cNvPr id="347" name="Google Shape;347;p45"/>
-          <p:cNvSpPr txBox="1"/>
-          <p:nvPr>
-            <p:ph idx="2" type="subTitle"/>
-          </p:nvPr>
-        </p:nvSpPr>
-        <p:spPr>
-          <a:xfrm>
-            <a:off x="4406650" y="1151705"/>
-            <a:ext cx="4409700" cy="542700"/>
-          </a:xfrm>
-          <a:prstGeom prst="rect">
-            <a:avLst/>
-          </a:prstGeom>
-        </p:spPr>
-        <p:txBody>
-          <a:bodyPr anchorCtr="0" anchor="t" bIns="91425" lIns="91425" spcFirstLastPara="1" rIns="91425" wrap="square" tIns="91425">
-            <a:noAutofit/>
-          </a:bodyPr>
-          <a:lstStyle/>
-          <a:p>
-            <a:pPr indent="0" lvl="0" marL="0" rtl="0" algn="l">
-              <a:spcBef>
-                <a:spcPts val="0"/>
-              </a:spcBef>
-              <a:spcAft>
-                <a:spcPts val="0"/>
-              </a:spcAft>
-              <a:buNone/>
-            </a:pPr>
-            <a:r>
-              <a:rPr lang="en"/>
-              <a:t>Split data</a:t>
-            </a:r>
-            <a:endParaRPr/>
-          </a:p>
-        </p:txBody>
-      </p:sp>
-      <p:sp>
-        <p:nvSpPr>
-          <p:cNvPr id="348" name="Google Shape;348;p45"/>
-          <p:cNvSpPr txBox="1"/>
-          <p:nvPr>
-            <p:ph type="title"/>
-          </p:nvPr>
-        </p:nvSpPr>
-        <p:spPr>
-          <a:xfrm>
-            <a:off x="179025" y="1832775"/>
-            <a:ext cx="4021500" cy="1484100"/>
-          </a:xfrm>
-          <a:prstGeom prst="rect">
-            <a:avLst/>
-          </a:prstGeom>
-        </p:spPr>
-        <p:txBody>
-          <a:bodyPr anchorCtr="0" anchor="ctr" bIns="91425" lIns="91425" spcFirstLastPara="1" rIns="91425" wrap="square" tIns="91425">
-            <a:noAutofit/>
-          </a:bodyPr>
-          <a:lstStyle/>
-          <a:p>
-            <a:pPr indent="0" lvl="0" marL="0" rtl="0" algn="ctr">
-              <a:spcBef>
-                <a:spcPts val="0"/>
-              </a:spcBef>
-              <a:spcAft>
-                <a:spcPts val="0"/>
-              </a:spcAft>
-              <a:buNone/>
-            </a:pPr>
-            <a:r>
-              <a:rPr lang="en"/>
-              <a:t>Implementation and </a:t>
-            </a:r>
-            <a:r>
-              <a:rPr lang="en"/>
-              <a:t>Data Used</a:t>
-            </a:r>
-            <a:endParaRPr/>
-          </a:p>
-        </p:txBody>
-      </p:sp>
-      <p:sp>
-        <p:nvSpPr>
-          <p:cNvPr id="349" name="Google Shape;349;p45"/>
-          <p:cNvSpPr txBox="1"/>
-          <p:nvPr>
-            <p:ph idx="5" type="subTitle"/>
-          </p:nvPr>
-        </p:nvSpPr>
-        <p:spPr>
-          <a:xfrm>
-            <a:off x="4406650" y="4183525"/>
-            <a:ext cx="4409700" cy="542700"/>
-          </a:xfrm>
-          <a:prstGeom prst="rect">
-            <a:avLst/>
-          </a:prstGeom>
-        </p:spPr>
-        <p:txBody>
-          <a:bodyPr anchorCtr="0" anchor="t" bIns="91425" lIns="91425" spcFirstLastPara="1" rIns="91425" wrap="square" tIns="91425">
-            <a:noAutofit/>
-          </a:bodyPr>
-          <a:lstStyle/>
-          <a:p>
-            <a:pPr indent="0" lvl="0" marL="0" rtl="0" algn="l">
-              <a:spcBef>
-                <a:spcPts val="0"/>
-              </a:spcBef>
-              <a:spcAft>
-                <a:spcPts val="0"/>
-              </a:spcAft>
-              <a:buNone/>
-            </a:pPr>
-            <a:r>
-              <a:rPr lang="en"/>
-              <a:t>Fit data to classifier/Predict</a:t>
-            </a:r>
-            <a:endParaRPr/>
-          </a:p>
-        </p:txBody>
-      </p:sp>
-      <p:sp>
-        <p:nvSpPr>
-          <p:cNvPr id="350" name="Google Shape;350;p45"/>
-          <p:cNvSpPr txBox="1"/>
-          <p:nvPr>
-            <p:ph idx="6" type="subTitle"/>
-          </p:nvPr>
-        </p:nvSpPr>
-        <p:spPr>
-          <a:xfrm>
-            <a:off x="4406650" y="2667615"/>
-            <a:ext cx="4409700" cy="542700"/>
-          </a:xfrm>
-          <a:prstGeom prst="rect">
-            <a:avLst/>
-          </a:prstGeom>
-        </p:spPr>
-        <p:txBody>
-          <a:bodyPr anchorCtr="0" anchor="t" bIns="91425" lIns="91425" spcFirstLastPara="1" rIns="91425" wrap="square" tIns="91425">
-            <a:noAutofit/>
-          </a:bodyPr>
-          <a:lstStyle/>
-          <a:p>
-            <a:pPr indent="0" lvl="0" marL="0" rtl="0" algn="l">
-              <a:spcBef>
-                <a:spcPts val="0"/>
-              </a:spcBef>
-              <a:spcAft>
-                <a:spcPts val="0"/>
-              </a:spcAft>
-              <a:buNone/>
-            </a:pPr>
-            <a:r>
-              <a:rPr lang="en"/>
-              <a:t>Tokenization/TF-IDF</a:t>
-            </a:r>
-            <a:endParaRPr/>
-          </a:p>
-        </p:txBody>
-      </p:sp>
-    </p:spTree>
-  </p:cSld>
-  <p:clrMapOvr>
-    <a:masterClrMapping/>
-  </p:clrMapOvr>
-</p:sld>
-</file>
-
-<file path=ppt/slides/slide7.xml><?xml version="1.0" encoding="utf-8"?>
-<p:sld xmlns:a="http://schemas.openxmlformats.org/drawingml/2006/main" xmlns:r="http://schemas.openxmlformats.org/officeDocument/2006/relationships" xmlns:mc="http://schemas.openxmlformats.org/markup-compatibility/2006" xmlns:mv="urn:schemas-microsoft-com:mac:vml" xmlns:p="http://schemas.openxmlformats.org/presentationml/2006/main" xmlns:c="http://schemas.openxmlformats.org/drawingml/2006/chart" xmlns:dgm="http://schemas.openxmlformats.org/drawingml/2006/diagram" xmlns:o="urn:schemas-microsoft-com:office:office" xmlns:v="urn:schemas-microsoft-com:vml" xmlns:pvml="urn:schemas-microsoft-com:office:powerpoint" xmlns:com="http://schemas.openxmlformats.org/drawingml/2006/compatibility" xmlns:p14="http://schemas.microsoft.com/office/powerpoint/2010/main" xmlns:p15="http://schemas.microsoft.com/office/powerpoint/2012/main" xmlns:ahyp="http://schemas.microsoft.com/office/drawing/2018/hyperlinkcolor">
-  <p:cSld>
-    <p:spTree>
-      <p:nvGrpSpPr>
-        <p:cNvPr id="354" name="Shape 354"/>
-        <p:cNvGrpSpPr/>
-        <p:nvPr/>
-      </p:nvGrpSpPr>
-      <p:grpSpPr>
-        <a:xfrm>
-          <a:off x="0" y="0"/>
-          <a:ext cx="0" cy="0"/>
-          <a:chOff x="0" y="0"/>
-          <a:chExt cx="0" cy="0"/>
-        </a:xfrm>
-      </p:grpSpPr>
-      <p:sp>
-        <p:nvSpPr>
-          <p:cNvPr id="355" name="Google Shape;355;p46"/>
-          <p:cNvSpPr txBox="1"/>
-          <p:nvPr>
-            <p:ph type="title"/>
-          </p:nvPr>
-        </p:nvSpPr>
-        <p:spPr>
-          <a:xfrm>
-            <a:off x="311700" y="230700"/>
-            <a:ext cx="8520600" cy="572700"/>
-          </a:xfrm>
-          <a:prstGeom prst="rect">
-            <a:avLst/>
-          </a:prstGeom>
-        </p:spPr>
-        <p:txBody>
-          <a:bodyPr anchorCtr="0" anchor="t" bIns="91425" lIns="91425" spcFirstLastPara="1" rIns="91425" wrap="square" tIns="91425">
-            <a:noAutofit/>
-          </a:bodyPr>
-          <a:lstStyle/>
-          <a:p>
-            <a:pPr indent="0" lvl="0" marL="0" rtl="0" algn="l">
-              <a:spcBef>
-                <a:spcPts val="0"/>
-              </a:spcBef>
-              <a:spcAft>
-                <a:spcPts val="0"/>
-              </a:spcAft>
-              <a:buNone/>
-            </a:pPr>
-            <a:r>
-              <a:rPr lang="en"/>
-              <a:t>Results - (No OS)</a:t>
-            </a:r>
-            <a:endParaRPr/>
-          </a:p>
-        </p:txBody>
-      </p:sp>
-      <p:pic>
-        <p:nvPicPr>
-          <p:cNvPr id="356" name="Google Shape;356;p46"/>
-          <p:cNvPicPr preferRelativeResize="0"/>
-          <p:nvPr/>
-        </p:nvPicPr>
-        <p:blipFill>
-          <a:blip r:embed="rId3">
-            <a:alphaModFix/>
-          </a:blip>
-          <a:stretch>
-            <a:fillRect/>
-          </a:stretch>
-        </p:blipFill>
-        <p:spPr>
-          <a:xfrm>
-            <a:off x="122600" y="1073850"/>
-            <a:ext cx="6042750" cy="3608250"/>
-          </a:xfrm>
-          <a:prstGeom prst="rect">
-            <a:avLst/>
-          </a:prstGeom>
-          <a:noFill/>
-          <a:ln>
-            <a:noFill/>
-          </a:ln>
-        </p:spPr>
-      </p:pic>
-      <p:pic>
-        <p:nvPicPr>
-          <p:cNvPr id="357" name="Google Shape;357;p46"/>
-          <p:cNvPicPr preferRelativeResize="0"/>
-          <p:nvPr/>
-        </p:nvPicPr>
-        <p:blipFill>
-          <a:blip r:embed="rId4">
-            <a:alphaModFix/>
-          </a:blip>
-          <a:stretch>
-            <a:fillRect/>
-          </a:stretch>
-        </p:blipFill>
-        <p:spPr>
-          <a:xfrm>
-            <a:off x="6245025" y="0"/>
-            <a:ext cx="2788193" cy="5143500"/>
-          </a:xfrm>
-          <a:prstGeom prst="rect">
-            <a:avLst/>
-          </a:prstGeom>
-          <a:noFill/>
-          <a:ln>
-            <a:noFill/>
-          </a:ln>
-        </p:spPr>
-      </p:pic>
-    </p:spTree>
-  </p:cSld>
-  <p:clrMapOvr>
-    <a:masterClrMapping/>
-  </p:clrMapOvr>
-</p:sld>
-</file>
-
-<file path=ppt/slides/slide8.xml><?xml version="1.0" encoding="utf-8"?>
-<p:sld xmlns:a="http://schemas.openxmlformats.org/drawingml/2006/main" xmlns:r="http://schemas.openxmlformats.org/officeDocument/2006/relationships" xmlns:mc="http://schemas.openxmlformats.org/markup-compatibility/2006" xmlns:mv="urn:schemas-microsoft-com:mac:vml" xmlns:p="http://schemas.openxmlformats.org/presentationml/2006/main" xmlns:c="http://schemas.openxmlformats.org/drawingml/2006/chart" xmlns:dgm="http://schemas.openxmlformats.org/drawingml/2006/diagram" xmlns:o="urn:schemas-microsoft-com:office:office" xmlns:v="urn:schemas-microsoft-com:vml" xmlns:pvml="urn:schemas-microsoft-com:office:powerpoint" xmlns:com="http://schemas.openxmlformats.org/drawingml/2006/compatibility" xmlns:p14="http://schemas.microsoft.com/office/powerpoint/2010/main" xmlns:p15="http://schemas.microsoft.com/office/powerpoint/2012/main" xmlns:ahyp="http://schemas.microsoft.com/office/drawing/2018/hyperlinkcolor">
-  <p:cSld>
-    <p:spTree>
-      <p:nvGrpSpPr>
-        <p:cNvPr id="361" name="Shape 361"/>
-        <p:cNvGrpSpPr/>
-        <p:nvPr/>
-      </p:nvGrpSpPr>
-      <p:grpSpPr>
-        <a:xfrm>
-          <a:off x="0" y="0"/>
-          <a:ext cx="0" cy="0"/>
-          <a:chOff x="0" y="0"/>
-          <a:chExt cx="0" cy="0"/>
-        </a:xfrm>
-      </p:grpSpPr>
-      <p:sp>
-        <p:nvSpPr>
-          <p:cNvPr id="362" name="Google Shape;362;p47"/>
-          <p:cNvSpPr txBox="1"/>
-          <p:nvPr>
-            <p:ph type="title"/>
-          </p:nvPr>
-        </p:nvSpPr>
-        <p:spPr>
-          <a:xfrm>
-            <a:off x="311700" y="230700"/>
-            <a:ext cx="8520600" cy="572700"/>
-          </a:xfrm>
-          <a:prstGeom prst="rect">
-            <a:avLst/>
-          </a:prstGeom>
-        </p:spPr>
-        <p:txBody>
-          <a:bodyPr anchorCtr="0" anchor="t" bIns="91425" lIns="91425" spcFirstLastPara="1" rIns="91425" wrap="square" tIns="91425">
-            <a:noAutofit/>
-          </a:bodyPr>
-          <a:lstStyle/>
-          <a:p>
-            <a:pPr indent="0" lvl="0" marL="0" rtl="0" algn="l">
-              <a:spcBef>
-                <a:spcPts val="0"/>
-              </a:spcBef>
-              <a:spcAft>
-                <a:spcPts val="0"/>
-              </a:spcAft>
-              <a:buNone/>
-            </a:pPr>
-            <a:r>
-              <a:rPr lang="en"/>
-              <a:t>Results - (OS)</a:t>
-            </a:r>
-            <a:endParaRPr/>
-          </a:p>
-        </p:txBody>
-      </p:sp>
-      <p:pic>
-        <p:nvPicPr>
-          <p:cNvPr id="363" name="Google Shape;363;p47"/>
-          <p:cNvPicPr preferRelativeResize="0"/>
-          <p:nvPr/>
-        </p:nvPicPr>
-        <p:blipFill rotWithShape="1">
-          <a:blip r:embed="rId3">
-            <a:alphaModFix/>
-          </a:blip>
-          <a:srcRect b="12403" l="0" r="0" t="0"/>
-          <a:stretch/>
-        </p:blipFill>
-        <p:spPr>
-          <a:xfrm>
-            <a:off x="6291425" y="0"/>
-            <a:ext cx="2777063" cy="5143501"/>
-          </a:xfrm>
-          <a:prstGeom prst="rect">
-            <a:avLst/>
-          </a:prstGeom>
-          <a:noFill/>
-          <a:ln>
-            <a:noFill/>
-          </a:ln>
-        </p:spPr>
-      </p:pic>
-      <p:pic>
-        <p:nvPicPr>
-          <p:cNvPr id="364" name="Google Shape;364;p47"/>
-          <p:cNvPicPr preferRelativeResize="0"/>
-          <p:nvPr/>
-        </p:nvPicPr>
-        <p:blipFill>
-          <a:blip r:embed="rId4">
-            <a:alphaModFix/>
-          </a:blip>
-          <a:stretch>
-            <a:fillRect/>
-          </a:stretch>
-        </p:blipFill>
-        <p:spPr>
-          <a:xfrm>
-            <a:off x="111125" y="1124850"/>
-            <a:ext cx="6042750" cy="3564788"/>
-          </a:xfrm>
-          <a:prstGeom prst="rect">
-            <a:avLst/>
-          </a:prstGeom>
-          <a:noFill/>
-          <a:ln>
-            <a:noFill/>
-          </a:ln>
-        </p:spPr>
-      </p:pic>
-    </p:spTree>
-  </p:cSld>
-  <p:clrMapOvr>
-    <a:masterClrMapping/>
-  </p:clrMapOvr>
-</p:sld>
-</file>
-
-<file path=ppt/slides/slide9.xml><?xml version="1.0" encoding="utf-8"?>
-<p:sld xmlns:a="http://schemas.openxmlformats.org/drawingml/2006/main" xmlns:r="http://schemas.openxmlformats.org/officeDocument/2006/relationships" xmlns:mc="http://schemas.openxmlformats.org/markup-compatibility/2006" xmlns:mv="urn:schemas-microsoft-com:mac:vml" xmlns:p="http://schemas.openxmlformats.org/presentationml/2006/main" xmlns:c="http://schemas.openxmlformats.org/drawingml/2006/chart" xmlns:dgm="http://schemas.openxmlformats.org/drawingml/2006/diagram" xmlns:o="urn:schemas-microsoft-com:office:office" xmlns:v="urn:schemas-microsoft-com:vml" xmlns:pvml="urn:schemas-microsoft-com:office:powerpoint" xmlns:com="http://schemas.openxmlformats.org/drawingml/2006/compatibility" xmlns:p14="http://schemas.microsoft.com/office/powerpoint/2010/main" xmlns:p15="http://schemas.microsoft.com/office/powerpoint/2012/main" xmlns:ahyp="http://schemas.microsoft.com/office/drawing/2018/hyperlinkcolor">
-  <p:cSld>
-    <p:spTree>
-      <p:nvGrpSpPr>
-        <p:cNvPr id="368" name="Shape 368"/>
-        <p:cNvGrpSpPr/>
-        <p:nvPr/>
-      </p:nvGrpSpPr>
-      <p:grpSpPr>
-        <a:xfrm>
-          <a:off x="0" y="0"/>
-          <a:ext cx="0" cy="0"/>
-          <a:chOff x="0" y="0"/>
-          <a:chExt cx="0" cy="0"/>
-        </a:xfrm>
-      </p:grpSpPr>
-      <p:sp>
-        <p:nvSpPr>
-          <p:cNvPr id="369" name="Google Shape;369;p48"/>
           <p:cNvSpPr txBox="1"/>
           <p:nvPr>
             <p:ph type="title"/>
@@ -37376,7 +35232,7 @@
       </p:sp>
       <p:graphicFrame>
         <p:nvGraphicFramePr>
-          <p:cNvPr id="370" name="Google Shape;370;p48"/>
+          <p:cNvPr id="377" name="Google Shape;377;p49"/>
           <p:cNvGraphicFramePr/>
           <p:nvPr/>
         </p:nvGraphicFramePr>
@@ -37389,7 +35245,7 @@
             <a:tbl>
               <a:tblPr>
                 <a:noFill/>
-                <a:tableStyleId>{CE463D87-3C09-414F-828E-3EF6359C941E}</a:tableStyleId>
+                <a:tableStyleId>{C8A6E4C6-5361-4C3F-AD50-660C7093A980}</a:tableStyleId>
               </a:tblPr>
               <a:tblGrid>
                 <a:gridCol w="1652400"/>
@@ -37755,6 +35611,2937 @@
           </a:graphicData>
         </a:graphic>
       </p:graphicFrame>
+    </p:spTree>
+  </p:cSld>
+  <p:clrMapOvr>
+    <a:masterClrMapping/>
+  </p:clrMapOvr>
+</p:sld>
+</file>
+
+<file path=ppt/slides/slide11.xml><?xml version="1.0" encoding="utf-8"?>
+<p:sld xmlns:a="http://schemas.openxmlformats.org/drawingml/2006/main" xmlns:r="http://schemas.openxmlformats.org/officeDocument/2006/relationships" xmlns:mc="http://schemas.openxmlformats.org/markup-compatibility/2006" xmlns:mv="urn:schemas-microsoft-com:mac:vml" xmlns:p="http://schemas.openxmlformats.org/presentationml/2006/main" xmlns:c="http://schemas.openxmlformats.org/drawingml/2006/chart" xmlns:dgm="http://schemas.openxmlformats.org/drawingml/2006/diagram" xmlns:o="urn:schemas-microsoft-com:office:office" xmlns:v="urn:schemas-microsoft-com:vml" xmlns:pvml="urn:schemas-microsoft-com:office:powerpoint" xmlns:com="http://schemas.openxmlformats.org/drawingml/2006/compatibility" xmlns:p14="http://schemas.microsoft.com/office/powerpoint/2010/main" xmlns:p15="http://schemas.microsoft.com/office/powerpoint/2012/main" xmlns:ahyp="http://schemas.microsoft.com/office/drawing/2018/hyperlinkcolor">
+  <p:cSld>
+    <p:spTree>
+      <p:nvGrpSpPr>
+        <p:cNvPr id="381" name="Shape 381"/>
+        <p:cNvGrpSpPr/>
+        <p:nvPr/>
+      </p:nvGrpSpPr>
+      <p:grpSpPr>
+        <a:xfrm>
+          <a:off x="0" y="0"/>
+          <a:ext cx="0" cy="0"/>
+          <a:chOff x="0" y="0"/>
+          <a:chExt cx="0" cy="0"/>
+        </a:xfrm>
+      </p:grpSpPr>
+      <p:sp>
+        <p:nvSpPr>
+          <p:cNvPr id="382" name="Google Shape;382;p50"/>
+          <p:cNvSpPr txBox="1"/>
+          <p:nvPr>
+            <p:ph type="title"/>
+          </p:nvPr>
+        </p:nvSpPr>
+        <p:spPr>
+          <a:xfrm>
+            <a:off x="311700" y="445025"/>
+            <a:ext cx="8520600" cy="572700"/>
+          </a:xfrm>
+          <a:prstGeom prst="rect">
+            <a:avLst/>
+          </a:prstGeom>
+        </p:spPr>
+        <p:txBody>
+          <a:bodyPr anchorCtr="0" anchor="t" bIns="91425" lIns="91425" spcFirstLastPara="1" rIns="91425" wrap="square" tIns="91425">
+            <a:noAutofit/>
+          </a:bodyPr>
+          <a:lstStyle/>
+          <a:p>
+            <a:pPr indent="0" lvl="0" marL="0" rtl="0" algn="l">
+              <a:spcBef>
+                <a:spcPts val="0"/>
+              </a:spcBef>
+              <a:spcAft>
+                <a:spcPts val="0"/>
+              </a:spcAft>
+              <a:buNone/>
+            </a:pPr>
+            <a:r>
+              <a:rPr lang="en"/>
+              <a:t>References</a:t>
+            </a:r>
+            <a:endParaRPr/>
+          </a:p>
+        </p:txBody>
+      </p:sp>
+      <p:sp>
+        <p:nvSpPr>
+          <p:cNvPr id="383" name="Google Shape;383;p50"/>
+          <p:cNvSpPr txBox="1"/>
+          <p:nvPr>
+            <p:ph idx="1" type="body"/>
+          </p:nvPr>
+        </p:nvSpPr>
+        <p:spPr>
+          <a:xfrm>
+            <a:off x="311700" y="1152475"/>
+            <a:ext cx="8520600" cy="3416400"/>
+          </a:xfrm>
+          <a:prstGeom prst="rect">
+            <a:avLst/>
+          </a:prstGeom>
+        </p:spPr>
+        <p:txBody>
+          <a:bodyPr anchorCtr="0" anchor="t" bIns="91425" lIns="91425" spcFirstLastPara="1" rIns="91425" wrap="square" tIns="91425">
+            <a:noAutofit/>
+          </a:bodyPr>
+          <a:lstStyle/>
+          <a:p>
+            <a:pPr indent="-336550" lvl="0" marL="457200" rtl="0" algn="l">
+              <a:spcBef>
+                <a:spcPts val="0"/>
+              </a:spcBef>
+              <a:spcAft>
+                <a:spcPts val="0"/>
+              </a:spcAft>
+              <a:buSzPts val="1700"/>
+              <a:buChar char="●"/>
+            </a:pPr>
+            <a:r>
+              <a:rPr lang="en" sz="1700" u="sng">
+                <a:solidFill>
+                  <a:schemeClr val="hlink"/>
+                </a:solidFill>
+                <a:hlinkClick r:id="rId3"/>
+              </a:rPr>
+              <a:t>https://www.kaggle.com/datasets/nelgiriyewithana/emotions</a:t>
+            </a:r>
+            <a:endParaRPr sz="1700"/>
+          </a:p>
+          <a:p>
+            <a:pPr indent="-336550" lvl="0" marL="457200" rtl="0" algn="l">
+              <a:spcBef>
+                <a:spcPts val="0"/>
+              </a:spcBef>
+              <a:spcAft>
+                <a:spcPts val="0"/>
+              </a:spcAft>
+              <a:buSzPts val="1700"/>
+              <a:buChar char="●"/>
+            </a:pPr>
+            <a:r>
+              <a:rPr lang="en" sz="1700" u="sng">
+                <a:solidFill>
+                  <a:schemeClr val="hlink"/>
+                </a:solidFill>
+                <a:hlinkClick r:id="rId4"/>
+              </a:rPr>
+              <a:t>https://scikit-learn.org/stable/_images/grid_search_cross_validation.png</a:t>
+            </a:r>
+            <a:endParaRPr sz="1700"/>
+          </a:p>
+          <a:p>
+            <a:pPr indent="-336550" lvl="0" marL="457200" rtl="0" algn="l">
+              <a:spcBef>
+                <a:spcPts val="0"/>
+              </a:spcBef>
+              <a:spcAft>
+                <a:spcPts val="0"/>
+              </a:spcAft>
+              <a:buSzPts val="1700"/>
+              <a:buChar char="●"/>
+            </a:pPr>
+            <a:r>
+              <a:rPr lang="en" sz="1700" u="sng">
+                <a:solidFill>
+                  <a:schemeClr val="hlink"/>
+                </a:solidFill>
+                <a:hlinkClick r:id="rId5"/>
+              </a:rPr>
+              <a:t>https://numpy.org/doc/</a:t>
+            </a:r>
+            <a:endParaRPr sz="1700"/>
+          </a:p>
+          <a:p>
+            <a:pPr indent="-336550" lvl="0" marL="457200" rtl="0" algn="l">
+              <a:spcBef>
+                <a:spcPts val="0"/>
+              </a:spcBef>
+              <a:spcAft>
+                <a:spcPts val="0"/>
+              </a:spcAft>
+              <a:buSzPts val="1700"/>
+              <a:buChar char="●"/>
+            </a:pPr>
+            <a:r>
+              <a:rPr lang="en" sz="1700" u="sng">
+                <a:solidFill>
+                  <a:schemeClr val="hlink"/>
+                </a:solidFill>
+                <a:hlinkClick r:id="rId6"/>
+              </a:rPr>
+              <a:t>https://pandas.pydata.org/docs/</a:t>
+            </a:r>
+            <a:endParaRPr sz="1700"/>
+          </a:p>
+          <a:p>
+            <a:pPr indent="-336550" lvl="0" marL="457200" rtl="0" algn="l">
+              <a:spcBef>
+                <a:spcPts val="0"/>
+              </a:spcBef>
+              <a:spcAft>
+                <a:spcPts val="0"/>
+              </a:spcAft>
+              <a:buSzPts val="1700"/>
+              <a:buChar char="●"/>
+            </a:pPr>
+            <a:r>
+              <a:rPr lang="en" sz="1700" u="sng">
+                <a:solidFill>
+                  <a:schemeClr val="hlink"/>
+                </a:solidFill>
+                <a:hlinkClick r:id="rId7"/>
+              </a:rPr>
+              <a:t>https://scikit-learn.org/stable/modules/naive_bayes.html</a:t>
+            </a:r>
+            <a:endParaRPr sz="1700"/>
+          </a:p>
+          <a:p>
+            <a:pPr indent="-336550" lvl="0" marL="457200" rtl="0" algn="l">
+              <a:spcBef>
+                <a:spcPts val="0"/>
+              </a:spcBef>
+              <a:spcAft>
+                <a:spcPts val="0"/>
+              </a:spcAft>
+              <a:buSzPts val="1700"/>
+              <a:buChar char="●"/>
+            </a:pPr>
+            <a:r>
+              <a:rPr lang="en" sz="1700" u="sng">
+                <a:solidFill>
+                  <a:schemeClr val="hlink"/>
+                </a:solidFill>
+                <a:hlinkClick r:id="rId8"/>
+              </a:rPr>
+              <a:t>https://scikit-learn.org/stable/modules/feature_extraction.html</a:t>
+            </a:r>
+            <a:endParaRPr sz="1700"/>
+          </a:p>
+          <a:p>
+            <a:pPr indent="-336550" lvl="0" marL="457200" rtl="0" algn="l">
+              <a:spcBef>
+                <a:spcPts val="0"/>
+              </a:spcBef>
+              <a:spcAft>
+                <a:spcPts val="0"/>
+              </a:spcAft>
+              <a:buSzPts val="1700"/>
+              <a:buChar char="●"/>
+            </a:pPr>
+            <a:r>
+              <a:rPr lang="en" sz="1700" u="sng">
+                <a:solidFill>
+                  <a:schemeClr val="hlink"/>
+                </a:solidFill>
+                <a:hlinkClick r:id="rId9"/>
+              </a:rPr>
+              <a:t>https://scikit-learn.org/stable/modules/generated/sklearn.model_selection.KFold.html#sklearn.model_selection.KFold</a:t>
+            </a:r>
+            <a:endParaRPr sz="1700"/>
+          </a:p>
+          <a:p>
+            <a:pPr indent="-336550" lvl="0" marL="457200" rtl="0" algn="l">
+              <a:spcBef>
+                <a:spcPts val="0"/>
+              </a:spcBef>
+              <a:spcAft>
+                <a:spcPts val="0"/>
+              </a:spcAft>
+              <a:buSzPts val="1700"/>
+              <a:buChar char="●"/>
+            </a:pPr>
+            <a:r>
+              <a:rPr lang="en" sz="1700" u="sng">
+                <a:solidFill>
+                  <a:schemeClr val="hlink"/>
+                </a:solidFill>
+                <a:hlinkClick r:id="rId10"/>
+              </a:rPr>
+              <a:t>https://imbalanced-learn.org/stable/over_sampling.html</a:t>
+            </a:r>
+            <a:endParaRPr sz="1700"/>
+          </a:p>
+          <a:p>
+            <a:pPr indent="-336550" lvl="0" marL="457200" rtl="0" algn="l">
+              <a:spcBef>
+                <a:spcPts val="0"/>
+              </a:spcBef>
+              <a:spcAft>
+                <a:spcPts val="0"/>
+              </a:spcAft>
+              <a:buSzPts val="1700"/>
+              <a:buChar char="●"/>
+            </a:pPr>
+            <a:r>
+              <a:rPr lang="en" sz="1700" u="sng">
+                <a:solidFill>
+                  <a:schemeClr val="hlink"/>
+                </a:solidFill>
+                <a:hlinkClick r:id="rId11"/>
+              </a:rPr>
+              <a:t>https://scikit-learn.org/stable/modules/model_evaluation.html</a:t>
+            </a:r>
+            <a:endParaRPr sz="1700"/>
+          </a:p>
+        </p:txBody>
+      </p:sp>
+    </p:spTree>
+  </p:cSld>
+  <p:clrMapOvr>
+    <a:masterClrMapping/>
+  </p:clrMapOvr>
+</p:sld>
+</file>
+
+<file path=ppt/slides/slide2.xml><?xml version="1.0" encoding="utf-8"?>
+<p:sld xmlns:a="http://schemas.openxmlformats.org/drawingml/2006/main" xmlns:r="http://schemas.openxmlformats.org/officeDocument/2006/relationships" xmlns:mc="http://schemas.openxmlformats.org/markup-compatibility/2006" xmlns:mv="urn:schemas-microsoft-com:mac:vml" xmlns:p="http://schemas.openxmlformats.org/presentationml/2006/main" xmlns:c="http://schemas.openxmlformats.org/drawingml/2006/chart" xmlns:dgm="http://schemas.openxmlformats.org/drawingml/2006/diagram" xmlns:o="urn:schemas-microsoft-com:office:office" xmlns:v="urn:schemas-microsoft-com:vml" xmlns:pvml="urn:schemas-microsoft-com:office:powerpoint" xmlns:com="http://schemas.openxmlformats.org/drawingml/2006/compatibility" xmlns:p14="http://schemas.microsoft.com/office/powerpoint/2010/main" xmlns:p15="http://schemas.microsoft.com/office/powerpoint/2012/main" xmlns:ahyp="http://schemas.microsoft.com/office/drawing/2018/hyperlinkcolor">
+  <p:cSld>
+    <p:spTree>
+      <p:nvGrpSpPr>
+        <p:cNvPr id="300" name="Shape 300"/>
+        <p:cNvGrpSpPr/>
+        <p:nvPr/>
+      </p:nvGrpSpPr>
+      <p:grpSpPr>
+        <a:xfrm>
+          <a:off x="0" y="0"/>
+          <a:ext cx="0" cy="0"/>
+          <a:chOff x="0" y="0"/>
+          <a:chExt cx="0" cy="0"/>
+        </a:xfrm>
+      </p:grpSpPr>
+      <p:sp>
+        <p:nvSpPr>
+          <p:cNvPr id="301" name="Google Shape;301;p41"/>
+          <p:cNvSpPr txBox="1"/>
+          <p:nvPr>
+            <p:ph type="title"/>
+          </p:nvPr>
+        </p:nvSpPr>
+        <p:spPr>
+          <a:xfrm>
+            <a:off x="385650" y="575525"/>
+            <a:ext cx="8372700" cy="968100"/>
+          </a:xfrm>
+          <a:prstGeom prst="rect">
+            <a:avLst/>
+          </a:prstGeom>
+        </p:spPr>
+        <p:txBody>
+          <a:bodyPr anchorCtr="0" anchor="ctr" bIns="91425" lIns="91425" spcFirstLastPara="1" rIns="91425" wrap="square" tIns="91425">
+            <a:noAutofit/>
+          </a:bodyPr>
+          <a:lstStyle/>
+          <a:p>
+            <a:pPr indent="0" lvl="0" marL="0" rtl="0" algn="ctr">
+              <a:spcBef>
+                <a:spcPts val="0"/>
+              </a:spcBef>
+              <a:spcAft>
+                <a:spcPts val="0"/>
+              </a:spcAft>
+              <a:buNone/>
+            </a:pPr>
+            <a:r>
+              <a:rPr lang="en"/>
+              <a:t>AGENDA</a:t>
+            </a:r>
+            <a:endParaRPr/>
+          </a:p>
+        </p:txBody>
+      </p:sp>
+      <p:sp>
+        <p:nvSpPr>
+          <p:cNvPr id="302" name="Google Shape;302;p41"/>
+          <p:cNvSpPr txBox="1"/>
+          <p:nvPr>
+            <p:ph idx="1" type="subTitle"/>
+          </p:nvPr>
+        </p:nvSpPr>
+        <p:spPr>
+          <a:xfrm>
+            <a:off x="597000" y="1740250"/>
+            <a:ext cx="2241300" cy="831600"/>
+          </a:xfrm>
+          <a:prstGeom prst="rect">
+            <a:avLst/>
+          </a:prstGeom>
+          <a:ln cap="flat" cmpd="sng" w="9525">
+            <a:solidFill>
+              <a:schemeClr val="dk1"/>
+            </a:solidFill>
+            <a:prstDash val="solid"/>
+            <a:round/>
+            <a:headEnd len="sm" w="sm" type="none"/>
+            <a:tailEnd len="sm" w="sm" type="none"/>
+          </a:ln>
+        </p:spPr>
+        <p:txBody>
+          <a:bodyPr anchorCtr="0" anchor="t" bIns="91425" lIns="91425" spcFirstLastPara="1" rIns="91425" wrap="square" tIns="91425">
+            <a:noAutofit/>
+          </a:bodyPr>
+          <a:lstStyle/>
+          <a:p>
+            <a:pPr indent="0" lvl="0" marL="0" rtl="0" algn="ctr">
+              <a:spcBef>
+                <a:spcPts val="0"/>
+              </a:spcBef>
+              <a:spcAft>
+                <a:spcPts val="0"/>
+              </a:spcAft>
+              <a:buNone/>
+            </a:pPr>
+            <a:r>
+              <a:rPr lang="en" sz="2000"/>
+              <a:t>Project Definition/Scope</a:t>
+            </a:r>
+            <a:endParaRPr sz="2000"/>
+          </a:p>
+        </p:txBody>
+      </p:sp>
+      <p:sp>
+        <p:nvSpPr>
+          <p:cNvPr id="303" name="Google Shape;303;p41"/>
+          <p:cNvSpPr txBox="1"/>
+          <p:nvPr>
+            <p:ph idx="2" type="subTitle"/>
+          </p:nvPr>
+        </p:nvSpPr>
+        <p:spPr>
+          <a:xfrm>
+            <a:off x="3578250" y="1740250"/>
+            <a:ext cx="1987500" cy="831600"/>
+          </a:xfrm>
+          <a:prstGeom prst="rect">
+            <a:avLst/>
+          </a:prstGeom>
+          <a:ln cap="flat" cmpd="sng" w="9525">
+            <a:solidFill>
+              <a:schemeClr val="dk1"/>
+            </a:solidFill>
+            <a:prstDash val="solid"/>
+            <a:round/>
+            <a:headEnd len="sm" w="sm" type="none"/>
+            <a:tailEnd len="sm" w="sm" type="none"/>
+          </a:ln>
+        </p:spPr>
+        <p:txBody>
+          <a:bodyPr anchorCtr="0" anchor="t" bIns="91425" lIns="91425" spcFirstLastPara="1" rIns="91425" wrap="square" tIns="91425">
+            <a:noAutofit/>
+          </a:bodyPr>
+          <a:lstStyle/>
+          <a:p>
+            <a:pPr indent="0" lvl="0" marL="0" rtl="0" algn="ctr">
+              <a:spcBef>
+                <a:spcPts val="0"/>
+              </a:spcBef>
+              <a:spcAft>
+                <a:spcPts val="0"/>
+              </a:spcAft>
+              <a:buNone/>
+            </a:pPr>
+            <a:r>
+              <a:rPr lang="en" sz="2000"/>
+              <a:t>Approach Taken</a:t>
+            </a:r>
+            <a:endParaRPr sz="2000"/>
+          </a:p>
+        </p:txBody>
+      </p:sp>
+      <p:sp>
+        <p:nvSpPr>
+          <p:cNvPr id="304" name="Google Shape;304;p41"/>
+          <p:cNvSpPr txBox="1"/>
+          <p:nvPr>
+            <p:ph idx="3" type="subTitle"/>
+          </p:nvPr>
+        </p:nvSpPr>
+        <p:spPr>
+          <a:xfrm>
+            <a:off x="6484950" y="1740250"/>
+            <a:ext cx="1987500" cy="831600"/>
+          </a:xfrm>
+          <a:prstGeom prst="rect">
+            <a:avLst/>
+          </a:prstGeom>
+          <a:ln cap="flat" cmpd="sng" w="9525">
+            <a:solidFill>
+              <a:schemeClr val="dk1"/>
+            </a:solidFill>
+            <a:prstDash val="solid"/>
+            <a:round/>
+            <a:headEnd len="sm" w="sm" type="none"/>
+            <a:tailEnd len="sm" w="sm" type="none"/>
+          </a:ln>
+        </p:spPr>
+        <p:txBody>
+          <a:bodyPr anchorCtr="0" anchor="t" bIns="91425" lIns="91425" spcFirstLastPara="1" rIns="91425" wrap="square" tIns="91425">
+            <a:noAutofit/>
+          </a:bodyPr>
+          <a:lstStyle/>
+          <a:p>
+            <a:pPr indent="0" lvl="0" marL="0" rtl="0" algn="ctr">
+              <a:spcBef>
+                <a:spcPts val="0"/>
+              </a:spcBef>
+              <a:spcAft>
+                <a:spcPts val="0"/>
+              </a:spcAft>
+              <a:buNone/>
+            </a:pPr>
+            <a:r>
+              <a:rPr lang="en" sz="2000"/>
+              <a:t>Data Used</a:t>
+            </a:r>
+            <a:endParaRPr sz="2000"/>
+          </a:p>
+        </p:txBody>
+      </p:sp>
+      <p:sp>
+        <p:nvSpPr>
+          <p:cNvPr id="305" name="Google Shape;305;p41"/>
+          <p:cNvSpPr txBox="1"/>
+          <p:nvPr>
+            <p:ph idx="9" type="sldNum"/>
+          </p:nvPr>
+        </p:nvSpPr>
+        <p:spPr>
+          <a:xfrm>
+            <a:off x="390559" y="40226"/>
+            <a:ext cx="548700" cy="393600"/>
+          </a:xfrm>
+          <a:prstGeom prst="rect">
+            <a:avLst/>
+          </a:prstGeom>
+        </p:spPr>
+        <p:txBody>
+          <a:bodyPr anchorCtr="0" anchor="t" bIns="91425" lIns="91425" spcFirstLastPara="1" rIns="91425" wrap="square" tIns="91425">
+            <a:noAutofit/>
+          </a:bodyPr>
+          <a:lstStyle/>
+          <a:p>
+            <a:pPr indent="0" lvl="0" marL="0" rtl="0" algn="l">
+              <a:spcBef>
+                <a:spcPts val="0"/>
+              </a:spcBef>
+              <a:spcAft>
+                <a:spcPts val="0"/>
+              </a:spcAft>
+              <a:buNone/>
+            </a:pPr>
+            <a:fld id="{00000000-1234-1234-1234-123412341234}" type="slidenum">
+              <a:rPr lang="en"/>
+              <a:t>‹#›</a:t>
+            </a:fld>
+            <a:endParaRPr/>
+          </a:p>
+        </p:txBody>
+      </p:sp>
+      <p:sp>
+        <p:nvSpPr>
+          <p:cNvPr id="306" name="Google Shape;306;p41"/>
+          <p:cNvSpPr txBox="1"/>
+          <p:nvPr>
+            <p:ph idx="12" type="sldNum"/>
+          </p:nvPr>
+        </p:nvSpPr>
+        <p:spPr>
+          <a:xfrm>
+            <a:off x="8472458" y="4663217"/>
+            <a:ext cx="548700" cy="393600"/>
+          </a:xfrm>
+          <a:prstGeom prst="rect">
+            <a:avLst/>
+          </a:prstGeom>
+        </p:spPr>
+        <p:txBody>
+          <a:bodyPr anchorCtr="0" anchor="ctr" bIns="91425" lIns="91425" spcFirstLastPara="1" rIns="91425" wrap="square" tIns="91425">
+            <a:noAutofit/>
+          </a:bodyPr>
+          <a:lstStyle/>
+          <a:p>
+            <a:pPr indent="0" lvl="0" marL="0" rtl="0" algn="l">
+              <a:spcBef>
+                <a:spcPts val="0"/>
+              </a:spcBef>
+              <a:spcAft>
+                <a:spcPts val="0"/>
+              </a:spcAft>
+              <a:buNone/>
+            </a:pPr>
+            <a:fld id="{00000000-1234-1234-1234-123412341234}" type="slidenum">
+              <a:rPr lang="en"/>
+              <a:t>‹#›</a:t>
+            </a:fld>
+            <a:endParaRPr/>
+          </a:p>
+        </p:txBody>
+      </p:sp>
+      <p:sp>
+        <p:nvSpPr>
+          <p:cNvPr id="307" name="Google Shape;307;p41"/>
+          <p:cNvSpPr txBox="1"/>
+          <p:nvPr>
+            <p:ph idx="1" type="subTitle"/>
+          </p:nvPr>
+        </p:nvSpPr>
+        <p:spPr>
+          <a:xfrm>
+            <a:off x="2146425" y="3284825"/>
+            <a:ext cx="1987500" cy="617700"/>
+          </a:xfrm>
+          <a:prstGeom prst="rect">
+            <a:avLst/>
+          </a:prstGeom>
+          <a:ln cap="flat" cmpd="sng" w="9525">
+            <a:solidFill>
+              <a:schemeClr val="dk1"/>
+            </a:solidFill>
+            <a:prstDash val="solid"/>
+            <a:round/>
+            <a:headEnd len="sm" w="sm" type="none"/>
+            <a:tailEnd len="sm" w="sm" type="none"/>
+          </a:ln>
+        </p:spPr>
+        <p:txBody>
+          <a:bodyPr anchorCtr="0" anchor="t" bIns="91425" lIns="91425" spcFirstLastPara="1" rIns="91425" wrap="square" tIns="91425">
+            <a:noAutofit/>
+          </a:bodyPr>
+          <a:lstStyle/>
+          <a:p>
+            <a:pPr indent="0" lvl="0" marL="0" rtl="0" algn="ctr">
+              <a:spcBef>
+                <a:spcPts val="0"/>
+              </a:spcBef>
+              <a:spcAft>
+                <a:spcPts val="0"/>
+              </a:spcAft>
+              <a:buNone/>
+            </a:pPr>
+            <a:r>
+              <a:rPr lang="en" sz="2000"/>
+              <a:t>Results</a:t>
+            </a:r>
+            <a:endParaRPr sz="2000"/>
+          </a:p>
+        </p:txBody>
+      </p:sp>
+      <p:sp>
+        <p:nvSpPr>
+          <p:cNvPr id="308" name="Google Shape;308;p41"/>
+          <p:cNvSpPr txBox="1"/>
+          <p:nvPr>
+            <p:ph idx="1" type="subTitle"/>
+          </p:nvPr>
+        </p:nvSpPr>
+        <p:spPr>
+          <a:xfrm>
+            <a:off x="4965825" y="3284825"/>
+            <a:ext cx="1987500" cy="617700"/>
+          </a:xfrm>
+          <a:prstGeom prst="rect">
+            <a:avLst/>
+          </a:prstGeom>
+          <a:ln cap="flat" cmpd="sng" w="9525">
+            <a:solidFill>
+              <a:schemeClr val="dk1"/>
+            </a:solidFill>
+            <a:prstDash val="solid"/>
+            <a:round/>
+            <a:headEnd len="sm" w="sm" type="none"/>
+            <a:tailEnd len="sm" w="sm" type="none"/>
+          </a:ln>
+        </p:spPr>
+        <p:txBody>
+          <a:bodyPr anchorCtr="0" anchor="t" bIns="91425" lIns="91425" spcFirstLastPara="1" rIns="91425" wrap="square" tIns="91425">
+            <a:noAutofit/>
+          </a:bodyPr>
+          <a:lstStyle/>
+          <a:p>
+            <a:pPr indent="0" lvl="0" marL="0" rtl="0" algn="ctr">
+              <a:spcBef>
+                <a:spcPts val="0"/>
+              </a:spcBef>
+              <a:spcAft>
+                <a:spcPts val="0"/>
+              </a:spcAft>
+              <a:buNone/>
+            </a:pPr>
+            <a:r>
+              <a:rPr lang="en" sz="2000"/>
+              <a:t>Conclusion</a:t>
+            </a:r>
+            <a:endParaRPr sz="2000"/>
+          </a:p>
+        </p:txBody>
+      </p:sp>
+    </p:spTree>
+  </p:cSld>
+  <p:clrMapOvr>
+    <a:masterClrMapping/>
+  </p:clrMapOvr>
+</p:sld>
+</file>
+
+<file path=ppt/slides/slide3.xml><?xml version="1.0" encoding="utf-8"?>
+<p:sld xmlns:a="http://schemas.openxmlformats.org/drawingml/2006/main" xmlns:r="http://schemas.openxmlformats.org/officeDocument/2006/relationships" xmlns:mc="http://schemas.openxmlformats.org/markup-compatibility/2006" xmlns:mv="urn:schemas-microsoft-com:mac:vml" xmlns:p="http://schemas.openxmlformats.org/presentationml/2006/main" xmlns:c="http://schemas.openxmlformats.org/drawingml/2006/chart" xmlns:dgm="http://schemas.openxmlformats.org/drawingml/2006/diagram" xmlns:o="urn:schemas-microsoft-com:office:office" xmlns:v="urn:schemas-microsoft-com:vml" xmlns:pvml="urn:schemas-microsoft-com:office:powerpoint" xmlns:com="http://schemas.openxmlformats.org/drawingml/2006/compatibility" xmlns:p14="http://schemas.microsoft.com/office/powerpoint/2010/main" xmlns:p15="http://schemas.microsoft.com/office/powerpoint/2012/main" xmlns:ahyp="http://schemas.microsoft.com/office/drawing/2018/hyperlinkcolor">
+  <p:cSld>
+    <p:spTree>
+      <p:nvGrpSpPr>
+        <p:cNvPr id="312" name="Shape 312"/>
+        <p:cNvGrpSpPr/>
+        <p:nvPr/>
+      </p:nvGrpSpPr>
+      <p:grpSpPr>
+        <a:xfrm>
+          <a:off x="0" y="0"/>
+          <a:ext cx="0" cy="0"/>
+          <a:chOff x="0" y="0"/>
+          <a:chExt cx="0" cy="0"/>
+        </a:xfrm>
+      </p:grpSpPr>
+      <p:sp>
+        <p:nvSpPr>
+          <p:cNvPr id="313" name="Google Shape;313;p42"/>
+          <p:cNvSpPr txBox="1"/>
+          <p:nvPr>
+            <p:ph type="title"/>
+          </p:nvPr>
+        </p:nvSpPr>
+        <p:spPr>
+          <a:xfrm>
+            <a:off x="390550" y="575525"/>
+            <a:ext cx="8372700" cy="968100"/>
+          </a:xfrm>
+          <a:prstGeom prst="rect">
+            <a:avLst/>
+          </a:prstGeom>
+        </p:spPr>
+        <p:txBody>
+          <a:bodyPr anchorCtr="0" anchor="ctr" bIns="91425" lIns="91425" spcFirstLastPara="1" rIns="91425" wrap="square" tIns="91425">
+            <a:noAutofit/>
+          </a:bodyPr>
+          <a:lstStyle/>
+          <a:p>
+            <a:pPr indent="0" lvl="0" marL="0" rtl="0" algn="ctr">
+              <a:spcBef>
+                <a:spcPts val="0"/>
+              </a:spcBef>
+              <a:spcAft>
+                <a:spcPts val="0"/>
+              </a:spcAft>
+              <a:buNone/>
+            </a:pPr>
+            <a:r>
+              <a:rPr lang="en"/>
+              <a:t>Project Definition/Scope</a:t>
+            </a:r>
+            <a:endParaRPr/>
+          </a:p>
+        </p:txBody>
+      </p:sp>
+      <p:sp>
+        <p:nvSpPr>
+          <p:cNvPr id="314" name="Google Shape;314;p42"/>
+          <p:cNvSpPr txBox="1"/>
+          <p:nvPr>
+            <p:ph idx="1" type="subTitle"/>
+          </p:nvPr>
+        </p:nvSpPr>
+        <p:spPr>
+          <a:xfrm>
+            <a:off x="597000" y="1740250"/>
+            <a:ext cx="1987500" cy="617700"/>
+          </a:xfrm>
+          <a:prstGeom prst="rect">
+            <a:avLst/>
+          </a:prstGeom>
+          <a:ln cap="flat" cmpd="sng" w="9525">
+            <a:solidFill>
+              <a:schemeClr val="lt2"/>
+            </a:solidFill>
+            <a:prstDash val="solid"/>
+            <a:round/>
+            <a:headEnd len="sm" w="sm" type="none"/>
+            <a:tailEnd len="sm" w="sm" type="none"/>
+          </a:ln>
+        </p:spPr>
+        <p:txBody>
+          <a:bodyPr anchorCtr="0" anchor="t" bIns="91425" lIns="91425" spcFirstLastPara="1" rIns="91425" wrap="square" tIns="91425">
+            <a:noAutofit/>
+          </a:bodyPr>
+          <a:lstStyle/>
+          <a:p>
+            <a:pPr indent="0" lvl="0" marL="0" rtl="0" algn="ctr">
+              <a:spcBef>
+                <a:spcPts val="0"/>
+              </a:spcBef>
+              <a:spcAft>
+                <a:spcPts val="0"/>
+              </a:spcAft>
+              <a:buNone/>
+            </a:pPr>
+            <a:r>
+              <a:rPr lang="en"/>
+              <a:t>Dataset</a:t>
+            </a:r>
+            <a:endParaRPr/>
+          </a:p>
+        </p:txBody>
+      </p:sp>
+      <p:sp>
+        <p:nvSpPr>
+          <p:cNvPr id="315" name="Google Shape;315;p42"/>
+          <p:cNvSpPr txBox="1"/>
+          <p:nvPr>
+            <p:ph idx="2" type="subTitle"/>
+          </p:nvPr>
+        </p:nvSpPr>
+        <p:spPr>
+          <a:xfrm>
+            <a:off x="2584500" y="1740250"/>
+            <a:ext cx="1987500" cy="617700"/>
+          </a:xfrm>
+          <a:prstGeom prst="rect">
+            <a:avLst/>
+          </a:prstGeom>
+          <a:ln cap="flat" cmpd="sng" w="9525">
+            <a:solidFill>
+              <a:schemeClr val="lt2"/>
+            </a:solidFill>
+            <a:prstDash val="solid"/>
+            <a:round/>
+            <a:headEnd len="sm" w="sm" type="none"/>
+            <a:tailEnd len="sm" w="sm" type="none"/>
+          </a:ln>
+        </p:spPr>
+        <p:txBody>
+          <a:bodyPr anchorCtr="0" anchor="t" bIns="91425" lIns="91425" spcFirstLastPara="1" rIns="91425" wrap="square" tIns="91425">
+            <a:noAutofit/>
+          </a:bodyPr>
+          <a:lstStyle/>
+          <a:p>
+            <a:pPr indent="0" lvl="0" marL="0" rtl="0" algn="ctr">
+              <a:spcBef>
+                <a:spcPts val="0"/>
+              </a:spcBef>
+              <a:spcAft>
+                <a:spcPts val="0"/>
+              </a:spcAft>
+              <a:buNone/>
+            </a:pPr>
+            <a:r>
+              <a:rPr lang="en"/>
+              <a:t>Hypothesis</a:t>
+            </a:r>
+            <a:endParaRPr/>
+          </a:p>
+        </p:txBody>
+      </p:sp>
+      <p:sp>
+        <p:nvSpPr>
+          <p:cNvPr id="316" name="Google Shape;316;p42"/>
+          <p:cNvSpPr txBox="1"/>
+          <p:nvPr>
+            <p:ph idx="3" type="subTitle"/>
+          </p:nvPr>
+        </p:nvSpPr>
+        <p:spPr>
+          <a:xfrm>
+            <a:off x="4572000" y="1740250"/>
+            <a:ext cx="1987500" cy="617700"/>
+          </a:xfrm>
+          <a:prstGeom prst="rect">
+            <a:avLst/>
+          </a:prstGeom>
+          <a:ln cap="flat" cmpd="sng" w="9525">
+            <a:solidFill>
+              <a:schemeClr val="lt2"/>
+            </a:solidFill>
+            <a:prstDash val="solid"/>
+            <a:round/>
+            <a:headEnd len="sm" w="sm" type="none"/>
+            <a:tailEnd len="sm" w="sm" type="none"/>
+          </a:ln>
+        </p:spPr>
+        <p:txBody>
+          <a:bodyPr anchorCtr="0" anchor="t" bIns="91425" lIns="91425" spcFirstLastPara="1" rIns="91425" wrap="square" tIns="91425">
+            <a:noAutofit/>
+          </a:bodyPr>
+          <a:lstStyle/>
+          <a:p>
+            <a:pPr indent="0" lvl="0" marL="0" rtl="0" algn="ctr">
+              <a:spcBef>
+                <a:spcPts val="0"/>
+              </a:spcBef>
+              <a:spcAft>
+                <a:spcPts val="0"/>
+              </a:spcAft>
+              <a:buNone/>
+            </a:pPr>
+            <a:r>
+              <a:rPr lang="en"/>
+              <a:t>Model</a:t>
+            </a:r>
+            <a:endParaRPr/>
+          </a:p>
+        </p:txBody>
+      </p:sp>
+      <p:sp>
+        <p:nvSpPr>
+          <p:cNvPr id="317" name="Google Shape;317;p42"/>
+          <p:cNvSpPr txBox="1"/>
+          <p:nvPr>
+            <p:ph idx="4" type="subTitle"/>
+          </p:nvPr>
+        </p:nvSpPr>
+        <p:spPr>
+          <a:xfrm>
+            <a:off x="6559500" y="1740250"/>
+            <a:ext cx="1987500" cy="617700"/>
+          </a:xfrm>
+          <a:prstGeom prst="rect">
+            <a:avLst/>
+          </a:prstGeom>
+          <a:ln cap="flat" cmpd="sng" w="9525">
+            <a:solidFill>
+              <a:schemeClr val="lt2"/>
+            </a:solidFill>
+            <a:prstDash val="solid"/>
+            <a:round/>
+            <a:headEnd len="sm" w="sm" type="none"/>
+            <a:tailEnd len="sm" w="sm" type="none"/>
+          </a:ln>
+        </p:spPr>
+        <p:txBody>
+          <a:bodyPr anchorCtr="0" anchor="t" bIns="91425" lIns="91425" spcFirstLastPara="1" rIns="91425" wrap="square" tIns="91425">
+            <a:noAutofit/>
+          </a:bodyPr>
+          <a:lstStyle/>
+          <a:p>
+            <a:pPr indent="0" lvl="0" marL="0" rtl="0" algn="ctr">
+              <a:spcBef>
+                <a:spcPts val="0"/>
+              </a:spcBef>
+              <a:spcAft>
+                <a:spcPts val="0"/>
+              </a:spcAft>
+              <a:buNone/>
+            </a:pPr>
+            <a:r>
+              <a:rPr lang="en"/>
+              <a:t>Features</a:t>
+            </a:r>
+            <a:endParaRPr/>
+          </a:p>
+        </p:txBody>
+      </p:sp>
+      <p:sp>
+        <p:nvSpPr>
+          <p:cNvPr id="318" name="Google Shape;318;p42"/>
+          <p:cNvSpPr txBox="1"/>
+          <p:nvPr>
+            <p:ph idx="5" type="body"/>
+          </p:nvPr>
+        </p:nvSpPr>
+        <p:spPr>
+          <a:xfrm>
+            <a:off x="597000" y="2357950"/>
+            <a:ext cx="1987500" cy="1956600"/>
+          </a:xfrm>
+          <a:prstGeom prst="rect">
+            <a:avLst/>
+          </a:prstGeom>
+          <a:ln cap="flat" cmpd="sng" w="9525">
+            <a:solidFill>
+              <a:schemeClr val="dk1"/>
+            </a:solidFill>
+            <a:prstDash val="solid"/>
+            <a:round/>
+            <a:headEnd len="sm" w="sm" type="none"/>
+            <a:tailEnd len="sm" w="sm" type="none"/>
+          </a:ln>
+        </p:spPr>
+        <p:txBody>
+          <a:bodyPr anchorCtr="0" anchor="t" bIns="91425" lIns="91425" spcFirstLastPara="1" rIns="91425" wrap="square" tIns="91425">
+            <a:noAutofit/>
+          </a:bodyPr>
+          <a:lstStyle/>
+          <a:p>
+            <a:pPr indent="0" lvl="0" marL="0" rtl="0" algn="l">
+              <a:spcBef>
+                <a:spcPts val="0"/>
+              </a:spcBef>
+              <a:spcAft>
+                <a:spcPts val="0"/>
+              </a:spcAft>
+              <a:buNone/>
+            </a:pPr>
+            <a:r>
+              <a:rPr lang="en"/>
+              <a:t>The </a:t>
+            </a:r>
+            <a:r>
+              <a:rPr lang="en" u="sng">
+                <a:solidFill>
+                  <a:schemeClr val="hlink"/>
+                </a:solidFill>
+                <a:hlinkClick r:id="rId3"/>
+              </a:rPr>
+              <a:t>dataset</a:t>
+            </a:r>
+            <a:r>
+              <a:rPr lang="en"/>
+              <a:t> is a collection of annotated english twitter messages. Each message has an emotion label attached: sadness, joy, love, anger, fear, and surprise. It has over 400,000 entries.</a:t>
+            </a:r>
+            <a:endParaRPr/>
+          </a:p>
+        </p:txBody>
+      </p:sp>
+      <p:sp>
+        <p:nvSpPr>
+          <p:cNvPr id="319" name="Google Shape;319;p42"/>
+          <p:cNvSpPr txBox="1"/>
+          <p:nvPr>
+            <p:ph idx="6" type="body"/>
+          </p:nvPr>
+        </p:nvSpPr>
+        <p:spPr>
+          <a:xfrm>
+            <a:off x="2584500" y="2357950"/>
+            <a:ext cx="1987500" cy="1956600"/>
+          </a:xfrm>
+          <a:prstGeom prst="rect">
+            <a:avLst/>
+          </a:prstGeom>
+          <a:ln cap="flat" cmpd="sng" w="9525">
+            <a:solidFill>
+              <a:schemeClr val="dk1"/>
+            </a:solidFill>
+            <a:prstDash val="solid"/>
+            <a:round/>
+            <a:headEnd len="sm" w="sm" type="none"/>
+            <a:tailEnd len="sm" w="sm" type="none"/>
+          </a:ln>
+        </p:spPr>
+        <p:txBody>
+          <a:bodyPr anchorCtr="0" anchor="t" bIns="91425" lIns="91425" spcFirstLastPara="1" rIns="91425" wrap="square" tIns="91425">
+            <a:noAutofit/>
+          </a:bodyPr>
+          <a:lstStyle/>
+          <a:p>
+            <a:pPr indent="0" lvl="0" marL="0" rtl="0" algn="l">
+              <a:spcBef>
+                <a:spcPts val="0"/>
+              </a:spcBef>
+              <a:spcAft>
+                <a:spcPts val="0"/>
+              </a:spcAft>
+              <a:buNone/>
+            </a:pPr>
+            <a:r>
+              <a:rPr lang="en"/>
+              <a:t>Using the contents of a tweet, the primary emotion being conveyed by the user can be predicted</a:t>
+            </a:r>
+            <a:endParaRPr/>
+          </a:p>
+        </p:txBody>
+      </p:sp>
+      <p:sp>
+        <p:nvSpPr>
+          <p:cNvPr id="320" name="Google Shape;320;p42"/>
+          <p:cNvSpPr txBox="1"/>
+          <p:nvPr>
+            <p:ph idx="7" type="body"/>
+          </p:nvPr>
+        </p:nvSpPr>
+        <p:spPr>
+          <a:xfrm>
+            <a:off x="4572000" y="2357950"/>
+            <a:ext cx="1987500" cy="1956600"/>
+          </a:xfrm>
+          <a:prstGeom prst="rect">
+            <a:avLst/>
+          </a:prstGeom>
+          <a:ln cap="flat" cmpd="sng" w="9525">
+            <a:solidFill>
+              <a:schemeClr val="dk1"/>
+            </a:solidFill>
+            <a:prstDash val="solid"/>
+            <a:round/>
+            <a:headEnd len="sm" w="sm" type="none"/>
+            <a:tailEnd len="sm" w="sm" type="none"/>
+          </a:ln>
+        </p:spPr>
+        <p:txBody>
+          <a:bodyPr anchorCtr="0" anchor="t" bIns="91425" lIns="91425" spcFirstLastPara="1" rIns="91425" wrap="square" tIns="91425">
+            <a:noAutofit/>
+          </a:bodyPr>
+          <a:lstStyle/>
+          <a:p>
+            <a:pPr indent="0" lvl="0" marL="0" rtl="0" algn="l">
+              <a:spcBef>
+                <a:spcPts val="0"/>
+              </a:spcBef>
+              <a:spcAft>
+                <a:spcPts val="0"/>
+              </a:spcAft>
+              <a:buNone/>
+            </a:pPr>
+            <a:r>
+              <a:rPr lang="en"/>
+              <a:t>Naïve Bayes</a:t>
+            </a:r>
+            <a:endParaRPr/>
+          </a:p>
+        </p:txBody>
+      </p:sp>
+      <p:sp>
+        <p:nvSpPr>
+          <p:cNvPr id="321" name="Google Shape;321;p42"/>
+          <p:cNvSpPr txBox="1"/>
+          <p:nvPr>
+            <p:ph idx="8" type="body"/>
+          </p:nvPr>
+        </p:nvSpPr>
+        <p:spPr>
+          <a:xfrm>
+            <a:off x="6559500" y="2357950"/>
+            <a:ext cx="1987500" cy="1956600"/>
+          </a:xfrm>
+          <a:prstGeom prst="rect">
+            <a:avLst/>
+          </a:prstGeom>
+          <a:ln cap="flat" cmpd="sng" w="9525">
+            <a:solidFill>
+              <a:schemeClr val="dk1"/>
+            </a:solidFill>
+            <a:prstDash val="solid"/>
+            <a:round/>
+            <a:headEnd len="sm" w="sm" type="none"/>
+            <a:tailEnd len="sm" w="sm" type="none"/>
+          </a:ln>
+        </p:spPr>
+        <p:txBody>
+          <a:bodyPr anchorCtr="0" anchor="t" bIns="91425" lIns="91425" spcFirstLastPara="1" rIns="91425" wrap="square" tIns="91425">
+            <a:noAutofit/>
+          </a:bodyPr>
+          <a:lstStyle/>
+          <a:p>
+            <a:pPr indent="0" lvl="0" marL="0" rtl="0" algn="l">
+              <a:spcBef>
+                <a:spcPts val="0"/>
+              </a:spcBef>
+              <a:spcAft>
+                <a:spcPts val="0"/>
+              </a:spcAft>
+              <a:buNone/>
+            </a:pPr>
+            <a:r>
+              <a:rPr lang="en"/>
+              <a:t>Unigrams, bigrams, TF-IDF</a:t>
+            </a:r>
+            <a:endParaRPr/>
+          </a:p>
+        </p:txBody>
+      </p:sp>
+    </p:spTree>
+  </p:cSld>
+  <p:clrMapOvr>
+    <a:masterClrMapping/>
+  </p:clrMapOvr>
+</p:sld>
+</file>
+
+<file path=ppt/slides/slide4.xml><?xml version="1.0" encoding="utf-8"?>
+<p:sld xmlns:a="http://schemas.openxmlformats.org/drawingml/2006/main" xmlns:r="http://schemas.openxmlformats.org/officeDocument/2006/relationships" xmlns:mc="http://schemas.openxmlformats.org/markup-compatibility/2006" xmlns:mv="urn:schemas-microsoft-com:mac:vml" xmlns:p="http://schemas.openxmlformats.org/presentationml/2006/main" xmlns:c="http://schemas.openxmlformats.org/drawingml/2006/chart" xmlns:dgm="http://schemas.openxmlformats.org/drawingml/2006/diagram" xmlns:o="urn:schemas-microsoft-com:office:office" xmlns:v="urn:schemas-microsoft-com:vml" xmlns:pvml="urn:schemas-microsoft-com:office:powerpoint" xmlns:com="http://schemas.openxmlformats.org/drawingml/2006/compatibility" xmlns:p14="http://schemas.microsoft.com/office/powerpoint/2010/main" xmlns:p15="http://schemas.microsoft.com/office/powerpoint/2012/main" xmlns:ahyp="http://schemas.microsoft.com/office/drawing/2018/hyperlinkcolor">
+  <p:cSld>
+    <p:spTree>
+      <p:nvGrpSpPr>
+        <p:cNvPr id="325" name="Shape 325"/>
+        <p:cNvGrpSpPr/>
+        <p:nvPr/>
+      </p:nvGrpSpPr>
+      <p:grpSpPr>
+        <a:xfrm>
+          <a:off x="0" y="0"/>
+          <a:ext cx="0" cy="0"/>
+          <a:chOff x="0" y="0"/>
+          <a:chExt cx="0" cy="0"/>
+        </a:xfrm>
+      </p:grpSpPr>
+      <p:sp>
+        <p:nvSpPr>
+          <p:cNvPr id="326" name="Google Shape;326;p43"/>
+          <p:cNvSpPr txBox="1"/>
+          <p:nvPr>
+            <p:ph type="title"/>
+          </p:nvPr>
+        </p:nvSpPr>
+        <p:spPr>
+          <a:xfrm>
+            <a:off x="390550" y="433800"/>
+            <a:ext cx="5953500" cy="968100"/>
+          </a:xfrm>
+          <a:prstGeom prst="rect">
+            <a:avLst/>
+          </a:prstGeom>
+        </p:spPr>
+        <p:txBody>
+          <a:bodyPr anchorCtr="0" anchor="ctr" bIns="91425" lIns="91425" spcFirstLastPara="1" rIns="91425" wrap="square" tIns="91425">
+            <a:noAutofit/>
+          </a:bodyPr>
+          <a:lstStyle/>
+          <a:p>
+            <a:pPr indent="0" lvl="0" marL="0" rtl="0" algn="l">
+              <a:spcBef>
+                <a:spcPts val="0"/>
+              </a:spcBef>
+              <a:spcAft>
+                <a:spcPts val="0"/>
+              </a:spcAft>
+              <a:buNone/>
+            </a:pPr>
+            <a:r>
+              <a:rPr lang="en"/>
+              <a:t>Dataset Example</a:t>
+            </a:r>
+            <a:endParaRPr/>
+          </a:p>
+        </p:txBody>
+      </p:sp>
+      <p:graphicFrame>
+        <p:nvGraphicFramePr>
+          <p:cNvPr id="327" name="Google Shape;327;p43"/>
+          <p:cNvGraphicFramePr/>
+          <p:nvPr/>
+        </p:nvGraphicFramePr>
+        <p:xfrm>
+          <a:off x="952500" y="1334825"/>
+          <a:ext cx="3000000" cy="3000000"/>
+        </p:xfrm>
+        <a:graphic>
+          <a:graphicData uri="http://schemas.openxmlformats.org/drawingml/2006/table">
+            <a:tbl>
+              <a:tblPr>
+                <a:noFill/>
+                <a:tableStyleId>{C8A6E4C6-5361-4C3F-AD50-660C7093A980}</a:tableStyleId>
+              </a:tblPr>
+              <a:tblGrid>
+                <a:gridCol w="6374525"/>
+                <a:gridCol w="864475"/>
+              </a:tblGrid>
+              <a:tr h="381000">
+                <a:tc>
+                  <a:txBody>
+                    <a:bodyPr/>
+                    <a:lstStyle/>
+                    <a:p>
+                      <a:pPr indent="0" lvl="0" marL="0" rtl="0" algn="l">
+                        <a:spcBef>
+                          <a:spcPts val="0"/>
+                        </a:spcBef>
+                        <a:spcAft>
+                          <a:spcPts val="0"/>
+                        </a:spcAft>
+                        <a:buNone/>
+                      </a:pPr>
+                      <a:r>
+                        <a:rPr lang="en"/>
+                        <a:t>Text</a:t>
+                      </a:r>
+                      <a:endParaRPr/>
+                    </a:p>
+                  </a:txBody>
+                  <a:tcPr marT="91425" marB="91425" marR="91425" marL="91425"/>
+                </a:tc>
+                <a:tc>
+                  <a:txBody>
+                    <a:bodyPr/>
+                    <a:lstStyle/>
+                    <a:p>
+                      <a:pPr indent="0" lvl="0" marL="0" rtl="0" algn="l">
+                        <a:spcBef>
+                          <a:spcPts val="0"/>
+                        </a:spcBef>
+                        <a:spcAft>
+                          <a:spcPts val="0"/>
+                        </a:spcAft>
+                        <a:buNone/>
+                      </a:pPr>
+                      <a:r>
+                        <a:rPr lang="en"/>
+                        <a:t>Label</a:t>
+                      </a:r>
+                      <a:endParaRPr/>
+                    </a:p>
+                  </a:txBody>
+                  <a:tcPr marT="91425" marB="91425" marR="91425" marL="91425"/>
+                </a:tc>
+              </a:tr>
+              <a:tr h="381000">
+                <a:tc>
+                  <a:txBody>
+                    <a:bodyPr/>
+                    <a:lstStyle/>
+                    <a:p>
+                      <a:pPr indent="0" lvl="0" marL="0" rtl="0" algn="l">
+                        <a:spcBef>
+                          <a:spcPts val="0"/>
+                        </a:spcBef>
+                        <a:spcAft>
+                          <a:spcPts val="0"/>
+                        </a:spcAft>
+                        <a:buNone/>
+                      </a:pPr>
+                      <a:r>
+                        <a:rPr lang="en"/>
+                        <a:t>i just feel really helpless and heavy hearted</a:t>
+                      </a:r>
+                      <a:endParaRPr/>
+                    </a:p>
+                  </a:txBody>
+                  <a:tcPr marT="91425" marB="91425" marR="91425" marL="91425"/>
+                </a:tc>
+                <a:tc>
+                  <a:txBody>
+                    <a:bodyPr/>
+                    <a:lstStyle/>
+                    <a:p>
+                      <a:pPr indent="0" lvl="0" marL="0" rtl="0" algn="l">
+                        <a:spcBef>
+                          <a:spcPts val="0"/>
+                        </a:spcBef>
+                        <a:spcAft>
+                          <a:spcPts val="0"/>
+                        </a:spcAft>
+                        <a:buNone/>
+                      </a:pPr>
+                      <a:r>
+                        <a:rPr lang="en"/>
+                        <a:t>4</a:t>
+                      </a:r>
+                      <a:endParaRPr/>
+                    </a:p>
+                  </a:txBody>
+                  <a:tcPr marT="91425" marB="91425" marR="91425" marL="91425"/>
+                </a:tc>
+              </a:tr>
+              <a:tr h="381000">
+                <a:tc>
+                  <a:txBody>
+                    <a:bodyPr/>
+                    <a:lstStyle/>
+                    <a:p>
+                      <a:pPr indent="0" lvl="0" marL="0" rtl="0" algn="l">
+                        <a:spcBef>
+                          <a:spcPts val="0"/>
+                        </a:spcBef>
+                        <a:spcAft>
+                          <a:spcPts val="0"/>
+                        </a:spcAft>
+                        <a:buNone/>
+                      </a:pPr>
+                      <a:r>
+                        <a:rPr lang="en"/>
+                        <a:t>i feel so stupid that i realise it so late</a:t>
+                      </a:r>
+                      <a:endParaRPr/>
+                    </a:p>
+                  </a:txBody>
+                  <a:tcPr marT="91425" marB="91425" marR="91425" marL="91425"/>
+                </a:tc>
+                <a:tc>
+                  <a:txBody>
+                    <a:bodyPr/>
+                    <a:lstStyle/>
+                    <a:p>
+                      <a:pPr indent="0" lvl="0" marL="0" rtl="0" algn="l">
+                        <a:spcBef>
+                          <a:spcPts val="0"/>
+                        </a:spcBef>
+                        <a:spcAft>
+                          <a:spcPts val="0"/>
+                        </a:spcAft>
+                        <a:buNone/>
+                      </a:pPr>
+                      <a:r>
+                        <a:rPr lang="en"/>
+                        <a:t>0</a:t>
+                      </a:r>
+                      <a:endParaRPr/>
+                    </a:p>
+                  </a:txBody>
+                  <a:tcPr marT="91425" marB="91425" marR="91425" marL="91425"/>
+                </a:tc>
+              </a:tr>
+              <a:tr h="381000">
+                <a:tc>
+                  <a:txBody>
+                    <a:bodyPr/>
+                    <a:lstStyle/>
+                    <a:p>
+                      <a:pPr indent="0" lvl="0" marL="0" rtl="0" algn="l">
+                        <a:spcBef>
+                          <a:spcPts val="0"/>
+                        </a:spcBef>
+                        <a:spcAft>
+                          <a:spcPts val="0"/>
+                        </a:spcAft>
+                        <a:buNone/>
+                      </a:pPr>
+                      <a:r>
+                        <a:rPr lang="en"/>
+                        <a:t>i miss all the others as well that feel that i wronged them and they will soon understand that i didnt</a:t>
+                      </a:r>
+                      <a:endParaRPr/>
+                    </a:p>
+                  </a:txBody>
+                  <a:tcPr marT="91425" marB="91425" marR="91425" marL="91425"/>
+                </a:tc>
+                <a:tc>
+                  <a:txBody>
+                    <a:bodyPr/>
+                    <a:lstStyle/>
+                    <a:p>
+                      <a:pPr indent="0" lvl="0" marL="0" rtl="0" algn="l">
+                        <a:spcBef>
+                          <a:spcPts val="0"/>
+                        </a:spcBef>
+                        <a:spcAft>
+                          <a:spcPts val="0"/>
+                        </a:spcAft>
+                        <a:buNone/>
+                      </a:pPr>
+                      <a:r>
+                        <a:rPr lang="en"/>
+                        <a:t>3</a:t>
+                      </a:r>
+                      <a:endParaRPr/>
+                    </a:p>
+                  </a:txBody>
+                  <a:tcPr marT="91425" marB="91425" marR="91425" marL="91425"/>
+                </a:tc>
+              </a:tr>
+              <a:tr h="381000">
+                <a:tc>
+                  <a:txBody>
+                    <a:bodyPr/>
+                    <a:lstStyle/>
+                    <a:p>
+                      <a:pPr indent="0" lvl="0" marL="0" rtl="0" algn="l">
+                        <a:spcBef>
+                          <a:spcPts val="0"/>
+                        </a:spcBef>
+                        <a:spcAft>
+                          <a:spcPts val="0"/>
+                        </a:spcAft>
+                        <a:buNone/>
+                      </a:pPr>
+                      <a:r>
+                        <a:rPr lang="en"/>
+                        <a:t>i didn t feel terrific</a:t>
+                      </a:r>
+                      <a:endParaRPr/>
+                    </a:p>
+                  </a:txBody>
+                  <a:tcPr marT="91425" marB="91425" marR="91425" marL="91425"/>
+                </a:tc>
+                <a:tc>
+                  <a:txBody>
+                    <a:bodyPr/>
+                    <a:lstStyle/>
+                    <a:p>
+                      <a:pPr indent="0" lvl="0" marL="0" rtl="0" algn="l">
+                        <a:spcBef>
+                          <a:spcPts val="0"/>
+                        </a:spcBef>
+                        <a:spcAft>
+                          <a:spcPts val="0"/>
+                        </a:spcAft>
+                        <a:buNone/>
+                      </a:pPr>
+                      <a:r>
+                        <a:rPr lang="en"/>
+                        <a:t>1</a:t>
+                      </a:r>
+                      <a:endParaRPr/>
+                    </a:p>
+                  </a:txBody>
+                  <a:tcPr marT="91425" marB="91425" marR="91425" marL="91425"/>
+                </a:tc>
+              </a:tr>
+            </a:tbl>
+          </a:graphicData>
+        </a:graphic>
+      </p:graphicFrame>
+      <p:graphicFrame>
+        <p:nvGraphicFramePr>
+          <p:cNvPr id="328" name="Google Shape;328;p43"/>
+          <p:cNvGraphicFramePr/>
+          <p:nvPr/>
+        </p:nvGraphicFramePr>
+        <p:xfrm>
+          <a:off x="887275" y="3847850"/>
+          <a:ext cx="3000000" cy="3000000"/>
+        </p:xfrm>
+        <a:graphic>
+          <a:graphicData uri="http://schemas.openxmlformats.org/drawingml/2006/table">
+            <a:tbl>
+              <a:tblPr>
+                <a:noFill/>
+                <a:tableStyleId>{C8A6E4C6-5361-4C3F-AD50-660C7093A980}</a:tableStyleId>
+              </a:tblPr>
+              <a:tblGrid>
+                <a:gridCol w="1464725"/>
+                <a:gridCol w="1115300"/>
+                <a:gridCol w="989850"/>
+                <a:gridCol w="934475"/>
+                <a:gridCol w="901250"/>
+                <a:gridCol w="1034150"/>
+                <a:gridCol w="1034150"/>
+              </a:tblGrid>
+              <a:tr h="381000">
+                <a:tc>
+                  <a:txBody>
+                    <a:bodyPr/>
+                    <a:lstStyle/>
+                    <a:p>
+                      <a:pPr indent="0" lvl="0" marL="0" rtl="0" algn="l">
+                        <a:spcBef>
+                          <a:spcPts val="0"/>
+                        </a:spcBef>
+                        <a:spcAft>
+                          <a:spcPts val="0"/>
+                        </a:spcAft>
+                        <a:buNone/>
+                      </a:pPr>
+                      <a:r>
+                        <a:rPr lang="en"/>
+                        <a:t>Label In actual Dataset</a:t>
+                      </a:r>
+                      <a:endParaRPr/>
+                    </a:p>
+                  </a:txBody>
+                  <a:tcPr marT="91425" marB="91425" marR="91425" marL="91425"/>
+                </a:tc>
+                <a:tc>
+                  <a:txBody>
+                    <a:bodyPr/>
+                    <a:lstStyle/>
+                    <a:p>
+                      <a:pPr indent="0" lvl="0" marL="0" rtl="0" algn="l">
+                        <a:spcBef>
+                          <a:spcPts val="0"/>
+                        </a:spcBef>
+                        <a:spcAft>
+                          <a:spcPts val="0"/>
+                        </a:spcAft>
+                        <a:buNone/>
+                      </a:pPr>
+                      <a:r>
+                        <a:rPr lang="en"/>
+                        <a:t>0</a:t>
+                      </a:r>
+                      <a:endParaRPr/>
+                    </a:p>
+                  </a:txBody>
+                  <a:tcPr marT="91425" marB="91425" marR="91425" marL="91425"/>
+                </a:tc>
+                <a:tc>
+                  <a:txBody>
+                    <a:bodyPr/>
+                    <a:lstStyle/>
+                    <a:p>
+                      <a:pPr indent="0" lvl="0" marL="0" rtl="0" algn="l">
+                        <a:spcBef>
+                          <a:spcPts val="0"/>
+                        </a:spcBef>
+                        <a:spcAft>
+                          <a:spcPts val="0"/>
+                        </a:spcAft>
+                        <a:buNone/>
+                      </a:pPr>
+                      <a:r>
+                        <a:rPr lang="en"/>
+                        <a:t>1</a:t>
+                      </a:r>
+                      <a:endParaRPr/>
+                    </a:p>
+                  </a:txBody>
+                  <a:tcPr marT="91425" marB="91425" marR="91425" marL="91425"/>
+                </a:tc>
+                <a:tc>
+                  <a:txBody>
+                    <a:bodyPr/>
+                    <a:lstStyle/>
+                    <a:p>
+                      <a:pPr indent="0" lvl="0" marL="0" rtl="0" algn="l">
+                        <a:spcBef>
+                          <a:spcPts val="0"/>
+                        </a:spcBef>
+                        <a:spcAft>
+                          <a:spcPts val="0"/>
+                        </a:spcAft>
+                        <a:buNone/>
+                      </a:pPr>
+                      <a:r>
+                        <a:rPr lang="en"/>
+                        <a:t>2</a:t>
+                      </a:r>
+                      <a:endParaRPr/>
+                    </a:p>
+                  </a:txBody>
+                  <a:tcPr marT="91425" marB="91425" marR="91425" marL="91425"/>
+                </a:tc>
+                <a:tc>
+                  <a:txBody>
+                    <a:bodyPr/>
+                    <a:lstStyle/>
+                    <a:p>
+                      <a:pPr indent="0" lvl="0" marL="0" rtl="0" algn="l">
+                        <a:spcBef>
+                          <a:spcPts val="0"/>
+                        </a:spcBef>
+                        <a:spcAft>
+                          <a:spcPts val="0"/>
+                        </a:spcAft>
+                        <a:buNone/>
+                      </a:pPr>
+                      <a:r>
+                        <a:rPr lang="en"/>
+                        <a:t>3</a:t>
+                      </a:r>
+                      <a:endParaRPr/>
+                    </a:p>
+                  </a:txBody>
+                  <a:tcPr marT="91425" marB="91425" marR="91425" marL="91425"/>
+                </a:tc>
+                <a:tc>
+                  <a:txBody>
+                    <a:bodyPr/>
+                    <a:lstStyle/>
+                    <a:p>
+                      <a:pPr indent="0" lvl="0" marL="0" rtl="0" algn="l">
+                        <a:spcBef>
+                          <a:spcPts val="0"/>
+                        </a:spcBef>
+                        <a:spcAft>
+                          <a:spcPts val="0"/>
+                        </a:spcAft>
+                        <a:buNone/>
+                      </a:pPr>
+                      <a:r>
+                        <a:rPr lang="en"/>
+                        <a:t>4</a:t>
+                      </a:r>
+                      <a:endParaRPr/>
+                    </a:p>
+                  </a:txBody>
+                  <a:tcPr marT="91425" marB="91425" marR="91425" marL="91425"/>
+                </a:tc>
+                <a:tc>
+                  <a:txBody>
+                    <a:bodyPr/>
+                    <a:lstStyle/>
+                    <a:p>
+                      <a:pPr indent="0" lvl="0" marL="0" rtl="0" algn="l">
+                        <a:spcBef>
+                          <a:spcPts val="0"/>
+                        </a:spcBef>
+                        <a:spcAft>
+                          <a:spcPts val="0"/>
+                        </a:spcAft>
+                        <a:buNone/>
+                      </a:pPr>
+                      <a:r>
+                        <a:rPr lang="en"/>
+                        <a:t>5</a:t>
+                      </a:r>
+                      <a:endParaRPr/>
+                    </a:p>
+                  </a:txBody>
+                  <a:tcPr marT="91425" marB="91425" marR="91425" marL="91425"/>
+                </a:tc>
+              </a:tr>
+              <a:tr h="381000">
+                <a:tc>
+                  <a:txBody>
+                    <a:bodyPr/>
+                    <a:lstStyle/>
+                    <a:p>
+                      <a:pPr indent="0" lvl="0" marL="0" rtl="0" algn="l">
+                        <a:spcBef>
+                          <a:spcPts val="0"/>
+                        </a:spcBef>
+                        <a:spcAft>
+                          <a:spcPts val="0"/>
+                        </a:spcAft>
+                        <a:buNone/>
+                      </a:pPr>
+                      <a:r>
+                        <a:rPr lang="en"/>
+                        <a:t>Emotion</a:t>
+                      </a:r>
+                      <a:endParaRPr/>
+                    </a:p>
+                  </a:txBody>
+                  <a:tcPr marT="91425" marB="91425" marR="91425" marL="91425"/>
+                </a:tc>
+                <a:tc>
+                  <a:txBody>
+                    <a:bodyPr/>
+                    <a:lstStyle/>
+                    <a:p>
+                      <a:pPr indent="0" lvl="0" marL="0" rtl="0" algn="l">
+                        <a:spcBef>
+                          <a:spcPts val="0"/>
+                        </a:spcBef>
+                        <a:spcAft>
+                          <a:spcPts val="0"/>
+                        </a:spcAft>
+                        <a:buNone/>
+                      </a:pPr>
+                      <a:r>
+                        <a:rPr lang="en"/>
+                        <a:t>Sadness</a:t>
+                      </a:r>
+                      <a:endParaRPr/>
+                    </a:p>
+                  </a:txBody>
+                  <a:tcPr marT="91425" marB="91425" marR="91425" marL="91425"/>
+                </a:tc>
+                <a:tc>
+                  <a:txBody>
+                    <a:bodyPr/>
+                    <a:lstStyle/>
+                    <a:p>
+                      <a:pPr indent="0" lvl="0" marL="0" rtl="0" algn="l">
+                        <a:spcBef>
+                          <a:spcPts val="0"/>
+                        </a:spcBef>
+                        <a:spcAft>
+                          <a:spcPts val="0"/>
+                        </a:spcAft>
+                        <a:buNone/>
+                      </a:pPr>
+                      <a:r>
+                        <a:rPr lang="en"/>
+                        <a:t>Joy</a:t>
+                      </a:r>
+                      <a:endParaRPr/>
+                    </a:p>
+                  </a:txBody>
+                  <a:tcPr marT="91425" marB="91425" marR="91425" marL="91425"/>
+                </a:tc>
+                <a:tc>
+                  <a:txBody>
+                    <a:bodyPr/>
+                    <a:lstStyle/>
+                    <a:p>
+                      <a:pPr indent="0" lvl="0" marL="0" rtl="0" algn="l">
+                        <a:spcBef>
+                          <a:spcPts val="0"/>
+                        </a:spcBef>
+                        <a:spcAft>
+                          <a:spcPts val="0"/>
+                        </a:spcAft>
+                        <a:buNone/>
+                      </a:pPr>
+                      <a:r>
+                        <a:rPr lang="en"/>
+                        <a:t>Love</a:t>
+                      </a:r>
+                      <a:endParaRPr/>
+                    </a:p>
+                  </a:txBody>
+                  <a:tcPr marT="91425" marB="91425" marR="91425" marL="91425"/>
+                </a:tc>
+                <a:tc>
+                  <a:txBody>
+                    <a:bodyPr/>
+                    <a:lstStyle/>
+                    <a:p>
+                      <a:pPr indent="0" lvl="0" marL="0" rtl="0" algn="l">
+                        <a:spcBef>
+                          <a:spcPts val="0"/>
+                        </a:spcBef>
+                        <a:spcAft>
+                          <a:spcPts val="0"/>
+                        </a:spcAft>
+                        <a:buNone/>
+                      </a:pPr>
+                      <a:r>
+                        <a:rPr lang="en"/>
+                        <a:t>Anger</a:t>
+                      </a:r>
+                      <a:endParaRPr/>
+                    </a:p>
+                  </a:txBody>
+                  <a:tcPr marT="91425" marB="91425" marR="91425" marL="91425"/>
+                </a:tc>
+                <a:tc>
+                  <a:txBody>
+                    <a:bodyPr/>
+                    <a:lstStyle/>
+                    <a:p>
+                      <a:pPr indent="0" lvl="0" marL="0" rtl="0" algn="l">
+                        <a:spcBef>
+                          <a:spcPts val="0"/>
+                        </a:spcBef>
+                        <a:spcAft>
+                          <a:spcPts val="0"/>
+                        </a:spcAft>
+                        <a:buNone/>
+                      </a:pPr>
+                      <a:r>
+                        <a:rPr lang="en"/>
+                        <a:t>Fear</a:t>
+                      </a:r>
+                      <a:endParaRPr/>
+                    </a:p>
+                  </a:txBody>
+                  <a:tcPr marT="91425" marB="91425" marR="91425" marL="91425"/>
+                </a:tc>
+                <a:tc>
+                  <a:txBody>
+                    <a:bodyPr/>
+                    <a:lstStyle/>
+                    <a:p>
+                      <a:pPr indent="0" lvl="0" marL="0" rtl="0" algn="l">
+                        <a:spcBef>
+                          <a:spcPts val="0"/>
+                        </a:spcBef>
+                        <a:spcAft>
+                          <a:spcPts val="0"/>
+                        </a:spcAft>
+                        <a:buNone/>
+                      </a:pPr>
+                      <a:r>
+                        <a:rPr lang="en"/>
+                        <a:t>Surprise</a:t>
+                      </a:r>
+                      <a:endParaRPr/>
+                    </a:p>
+                  </a:txBody>
+                  <a:tcPr marT="91425" marB="91425" marR="91425" marL="91425"/>
+                </a:tc>
+              </a:tr>
+            </a:tbl>
+          </a:graphicData>
+        </a:graphic>
+      </p:graphicFrame>
+    </p:spTree>
+  </p:cSld>
+  <p:clrMapOvr>
+    <a:masterClrMapping/>
+  </p:clrMapOvr>
+</p:sld>
+</file>
+
+<file path=ppt/slides/slide5.xml><?xml version="1.0" encoding="utf-8"?>
+<p:sld xmlns:a="http://schemas.openxmlformats.org/drawingml/2006/main" xmlns:r="http://schemas.openxmlformats.org/officeDocument/2006/relationships" xmlns:mc="http://schemas.openxmlformats.org/markup-compatibility/2006" xmlns:mv="urn:schemas-microsoft-com:mac:vml" xmlns:p="http://schemas.openxmlformats.org/presentationml/2006/main" xmlns:c="http://schemas.openxmlformats.org/drawingml/2006/chart" xmlns:dgm="http://schemas.openxmlformats.org/drawingml/2006/diagram" xmlns:o="urn:schemas-microsoft-com:office:office" xmlns:v="urn:schemas-microsoft-com:vml" xmlns:pvml="urn:schemas-microsoft-com:office:powerpoint" xmlns:com="http://schemas.openxmlformats.org/drawingml/2006/compatibility" xmlns:p14="http://schemas.microsoft.com/office/powerpoint/2010/main" xmlns:p15="http://schemas.microsoft.com/office/powerpoint/2012/main" xmlns:ahyp="http://schemas.microsoft.com/office/drawing/2018/hyperlinkcolor">
+  <p:cSld>
+    <p:spTree>
+      <p:nvGrpSpPr>
+        <p:cNvPr id="332" name="Shape 332"/>
+        <p:cNvGrpSpPr/>
+        <p:nvPr/>
+      </p:nvGrpSpPr>
+      <p:grpSpPr>
+        <a:xfrm>
+          <a:off x="0" y="0"/>
+          <a:ext cx="0" cy="0"/>
+          <a:chOff x="0" y="0"/>
+          <a:chExt cx="0" cy="0"/>
+        </a:xfrm>
+      </p:grpSpPr>
+      <p:sp>
+        <p:nvSpPr>
+          <p:cNvPr id="333" name="Google Shape;333;p44"/>
+          <p:cNvSpPr txBox="1"/>
+          <p:nvPr>
+            <p:ph idx="6" type="subTitle"/>
+          </p:nvPr>
+        </p:nvSpPr>
+        <p:spPr>
+          <a:xfrm>
+            <a:off x="4938713" y="1277907"/>
+            <a:ext cx="3838500" cy="481200"/>
+          </a:xfrm>
+          <a:prstGeom prst="rect">
+            <a:avLst/>
+          </a:prstGeom>
+          <a:ln cap="flat" cmpd="sng" w="9525">
+            <a:solidFill>
+              <a:schemeClr val="dk1"/>
+            </a:solidFill>
+            <a:prstDash val="solid"/>
+            <a:round/>
+            <a:headEnd len="sm" w="sm" type="none"/>
+            <a:tailEnd len="sm" w="sm" type="none"/>
+          </a:ln>
+        </p:spPr>
+        <p:txBody>
+          <a:bodyPr anchorCtr="0" anchor="t" bIns="91425" lIns="91425" spcFirstLastPara="1" rIns="91425" wrap="square" tIns="91425">
+            <a:noAutofit/>
+          </a:bodyPr>
+          <a:lstStyle/>
+          <a:p>
+            <a:pPr indent="0" lvl="0" marL="0" rtl="0" algn="l">
+              <a:spcBef>
+                <a:spcPts val="0"/>
+              </a:spcBef>
+              <a:spcAft>
+                <a:spcPts val="0"/>
+              </a:spcAft>
+              <a:buNone/>
+            </a:pPr>
+            <a:r>
+              <a:rPr lang="en"/>
+              <a:t>Software Used</a:t>
+            </a:r>
+            <a:endParaRPr/>
+          </a:p>
+        </p:txBody>
+      </p:sp>
+      <p:sp>
+        <p:nvSpPr>
+          <p:cNvPr id="334" name="Google Shape;334;p44"/>
+          <p:cNvSpPr txBox="1"/>
+          <p:nvPr>
+            <p:ph idx="8" type="subTitle"/>
+          </p:nvPr>
+        </p:nvSpPr>
+        <p:spPr>
+          <a:xfrm>
+            <a:off x="366750" y="3167363"/>
+            <a:ext cx="3838500" cy="481200"/>
+          </a:xfrm>
+          <a:prstGeom prst="rect">
+            <a:avLst/>
+          </a:prstGeom>
+          <a:ln cap="flat" cmpd="sng" w="9525">
+            <a:solidFill>
+              <a:schemeClr val="dk1"/>
+            </a:solidFill>
+            <a:prstDash val="solid"/>
+            <a:round/>
+            <a:headEnd len="sm" w="sm" type="none"/>
+            <a:tailEnd len="sm" w="sm" type="none"/>
+          </a:ln>
+        </p:spPr>
+        <p:txBody>
+          <a:bodyPr anchorCtr="0" anchor="t" bIns="91425" lIns="91425" spcFirstLastPara="1" rIns="91425" wrap="square" tIns="91425">
+            <a:noAutofit/>
+          </a:bodyPr>
+          <a:lstStyle/>
+          <a:p>
+            <a:pPr indent="0" lvl="0" marL="0" rtl="0" algn="l">
+              <a:spcBef>
+                <a:spcPts val="0"/>
+              </a:spcBef>
+              <a:spcAft>
+                <a:spcPts val="0"/>
+              </a:spcAft>
+              <a:buNone/>
+            </a:pPr>
+            <a:r>
+              <a:rPr lang="en"/>
+              <a:t>K-Fold Cross Validation</a:t>
+            </a:r>
+            <a:endParaRPr/>
+          </a:p>
+        </p:txBody>
+      </p:sp>
+      <p:sp>
+        <p:nvSpPr>
+          <p:cNvPr id="335" name="Google Shape;335;p44"/>
+          <p:cNvSpPr txBox="1"/>
+          <p:nvPr>
+            <p:ph idx="2" type="body"/>
+          </p:nvPr>
+        </p:nvSpPr>
+        <p:spPr>
+          <a:xfrm>
+            <a:off x="4938725" y="1759093"/>
+            <a:ext cx="3838500" cy="1138500"/>
+          </a:xfrm>
+          <a:prstGeom prst="rect">
+            <a:avLst/>
+          </a:prstGeom>
+          <a:ln cap="flat" cmpd="sng" w="9525">
+            <a:solidFill>
+              <a:schemeClr val="dk1"/>
+            </a:solidFill>
+            <a:prstDash val="solid"/>
+            <a:round/>
+            <a:headEnd len="sm" w="sm" type="none"/>
+            <a:tailEnd len="sm" w="sm" type="none"/>
+          </a:ln>
+        </p:spPr>
+        <p:txBody>
+          <a:bodyPr anchorCtr="0" anchor="t" bIns="91425" lIns="91425" spcFirstLastPara="1" rIns="91425" wrap="square" tIns="91425">
+            <a:noAutofit/>
+          </a:bodyPr>
+          <a:lstStyle/>
+          <a:p>
+            <a:pPr indent="-317500" lvl="0" marL="457200" rtl="0" algn="l">
+              <a:spcBef>
+                <a:spcPts val="0"/>
+              </a:spcBef>
+              <a:spcAft>
+                <a:spcPts val="0"/>
+              </a:spcAft>
+              <a:buSzPts val="1400"/>
+              <a:buChar char="●"/>
+            </a:pPr>
+            <a:r>
+              <a:rPr lang="en"/>
+              <a:t>Pandas and numpy for data organization</a:t>
+            </a:r>
+            <a:endParaRPr/>
+          </a:p>
+          <a:p>
+            <a:pPr indent="-317500" lvl="0" marL="457200" rtl="0" algn="l">
+              <a:spcBef>
+                <a:spcPts val="0"/>
+              </a:spcBef>
+              <a:spcAft>
+                <a:spcPts val="0"/>
+              </a:spcAft>
+              <a:buSzPts val="1400"/>
+              <a:buChar char="●"/>
+            </a:pPr>
+            <a:r>
+              <a:rPr lang="en"/>
+              <a:t>Sklearn and imblearn for the model and metrics</a:t>
+            </a:r>
+            <a:endParaRPr/>
+          </a:p>
+        </p:txBody>
+      </p:sp>
+      <p:sp>
+        <p:nvSpPr>
+          <p:cNvPr id="336" name="Google Shape;336;p44"/>
+          <p:cNvSpPr txBox="1"/>
+          <p:nvPr>
+            <p:ph idx="1" type="body"/>
+          </p:nvPr>
+        </p:nvSpPr>
+        <p:spPr>
+          <a:xfrm>
+            <a:off x="366725" y="1759093"/>
+            <a:ext cx="3838500" cy="1138500"/>
+          </a:xfrm>
+          <a:prstGeom prst="rect">
+            <a:avLst/>
+          </a:prstGeom>
+          <a:ln cap="flat" cmpd="sng" w="9525">
+            <a:solidFill>
+              <a:schemeClr val="dk1"/>
+            </a:solidFill>
+            <a:prstDash val="solid"/>
+            <a:round/>
+            <a:headEnd len="sm" w="sm" type="none"/>
+            <a:tailEnd len="sm" w="sm" type="none"/>
+          </a:ln>
+        </p:spPr>
+        <p:txBody>
+          <a:bodyPr anchorCtr="0" anchor="t" bIns="91425" lIns="91425" spcFirstLastPara="1" rIns="91425" wrap="square" tIns="91425">
+            <a:noAutofit/>
+          </a:bodyPr>
+          <a:lstStyle/>
+          <a:p>
+            <a:pPr indent="0" lvl="0" marL="0" rtl="0" algn="l">
+              <a:spcBef>
+                <a:spcPts val="0"/>
+              </a:spcBef>
+              <a:spcAft>
+                <a:spcPts val="0"/>
+              </a:spcAft>
+              <a:buNone/>
+            </a:pPr>
+            <a:r>
+              <a:rPr lang="en"/>
+              <a:t>Minimal preprocessing needed; Removed entries with missing information</a:t>
+            </a:r>
+            <a:endParaRPr/>
+          </a:p>
+        </p:txBody>
+      </p:sp>
+      <p:sp>
+        <p:nvSpPr>
+          <p:cNvPr id="337" name="Google Shape;337;p44"/>
+          <p:cNvSpPr txBox="1"/>
+          <p:nvPr>
+            <p:ph idx="3" type="body"/>
+          </p:nvPr>
+        </p:nvSpPr>
+        <p:spPr>
+          <a:xfrm>
+            <a:off x="366750" y="3648575"/>
+            <a:ext cx="3838500" cy="1138500"/>
+          </a:xfrm>
+          <a:prstGeom prst="rect">
+            <a:avLst/>
+          </a:prstGeom>
+          <a:ln cap="flat" cmpd="sng" w="9525">
+            <a:solidFill>
+              <a:schemeClr val="dk1"/>
+            </a:solidFill>
+            <a:prstDash val="solid"/>
+            <a:round/>
+            <a:headEnd len="sm" w="sm" type="none"/>
+            <a:tailEnd len="sm" w="sm" type="none"/>
+          </a:ln>
+        </p:spPr>
+        <p:txBody>
+          <a:bodyPr anchorCtr="0" anchor="t" bIns="91425" lIns="91425" spcFirstLastPara="1" rIns="91425" wrap="square" tIns="91425">
+            <a:noAutofit/>
+          </a:bodyPr>
+          <a:lstStyle/>
+          <a:p>
+            <a:pPr indent="0" lvl="0" marL="0" rtl="0" algn="l">
+              <a:spcBef>
+                <a:spcPts val="0"/>
+              </a:spcBef>
+              <a:spcAft>
+                <a:spcPts val="0"/>
+              </a:spcAft>
+              <a:buNone/>
+            </a:pPr>
+            <a:r>
+              <a:rPr lang="en"/>
+              <a:t>Data is divided into k=5 equal size folds. The model is trained and tested k times, validating through different portions each time</a:t>
+            </a:r>
+            <a:endParaRPr/>
+          </a:p>
+        </p:txBody>
+      </p:sp>
+      <p:sp>
+        <p:nvSpPr>
+          <p:cNvPr id="338" name="Google Shape;338;p44"/>
+          <p:cNvSpPr txBox="1"/>
+          <p:nvPr>
+            <p:ph idx="4" type="body"/>
+          </p:nvPr>
+        </p:nvSpPr>
+        <p:spPr>
+          <a:xfrm>
+            <a:off x="4938750" y="3648575"/>
+            <a:ext cx="3838500" cy="1138500"/>
+          </a:xfrm>
+          <a:prstGeom prst="rect">
+            <a:avLst/>
+          </a:prstGeom>
+          <a:ln cap="flat" cmpd="sng" w="9525">
+            <a:solidFill>
+              <a:schemeClr val="dk1"/>
+            </a:solidFill>
+            <a:prstDash val="solid"/>
+            <a:round/>
+            <a:headEnd len="sm" w="sm" type="none"/>
+            <a:tailEnd len="sm" w="sm" type="none"/>
+          </a:ln>
+        </p:spPr>
+        <p:txBody>
+          <a:bodyPr anchorCtr="0" anchor="t" bIns="91425" lIns="91425" spcFirstLastPara="1" rIns="91425" wrap="square" tIns="91425">
+            <a:noAutofit/>
+          </a:bodyPr>
+          <a:lstStyle/>
+          <a:p>
+            <a:pPr indent="0" lvl="0" marL="0" rtl="0" algn="l">
+              <a:spcBef>
+                <a:spcPts val="0"/>
+              </a:spcBef>
+              <a:spcAft>
+                <a:spcPts val="0"/>
+              </a:spcAft>
+              <a:buNone/>
+            </a:pPr>
+            <a:r>
+              <a:rPr lang="en"/>
+              <a:t>Some emotions are more frequent than others in the </a:t>
+            </a:r>
+            <a:r>
+              <a:rPr lang="en"/>
+              <a:t>dataset</a:t>
+            </a:r>
+            <a:r>
+              <a:rPr lang="en"/>
+              <a:t>, with </a:t>
+            </a:r>
+            <a:r>
+              <a:rPr lang="en"/>
+              <a:t>surprise</a:t>
+            </a:r>
+            <a:r>
+              <a:rPr lang="en"/>
+              <a:t> trailing behind the next least frequent by over 5,000 </a:t>
+            </a:r>
+            <a:r>
+              <a:rPr lang="en"/>
+              <a:t>occurrences.</a:t>
+            </a:r>
+            <a:endParaRPr/>
+          </a:p>
+        </p:txBody>
+      </p:sp>
+      <p:sp>
+        <p:nvSpPr>
+          <p:cNvPr id="339" name="Google Shape;339;p44"/>
+          <p:cNvSpPr txBox="1"/>
+          <p:nvPr>
+            <p:ph type="title"/>
+          </p:nvPr>
+        </p:nvSpPr>
+        <p:spPr>
+          <a:xfrm>
+            <a:off x="366750" y="450025"/>
+            <a:ext cx="8184600" cy="758100"/>
+          </a:xfrm>
+          <a:prstGeom prst="rect">
+            <a:avLst/>
+          </a:prstGeom>
+        </p:spPr>
+        <p:txBody>
+          <a:bodyPr anchorCtr="0" anchor="ctr" bIns="91425" lIns="91425" spcFirstLastPara="1" rIns="91425" wrap="square" tIns="91425">
+            <a:noAutofit/>
+          </a:bodyPr>
+          <a:lstStyle/>
+          <a:p>
+            <a:pPr indent="0" lvl="0" marL="0" rtl="0" algn="l">
+              <a:spcBef>
+                <a:spcPts val="0"/>
+              </a:spcBef>
+              <a:spcAft>
+                <a:spcPts val="0"/>
+              </a:spcAft>
+              <a:buNone/>
+            </a:pPr>
+            <a:r>
+              <a:rPr lang="en"/>
+              <a:t>Approach Taken</a:t>
+            </a:r>
+            <a:endParaRPr/>
+          </a:p>
+        </p:txBody>
+      </p:sp>
+      <p:sp>
+        <p:nvSpPr>
+          <p:cNvPr id="340" name="Google Shape;340;p44"/>
+          <p:cNvSpPr txBox="1"/>
+          <p:nvPr>
+            <p:ph idx="5" type="subTitle"/>
+          </p:nvPr>
+        </p:nvSpPr>
+        <p:spPr>
+          <a:xfrm>
+            <a:off x="366763" y="1277907"/>
+            <a:ext cx="3838500" cy="481200"/>
+          </a:xfrm>
+          <a:prstGeom prst="rect">
+            <a:avLst/>
+          </a:prstGeom>
+          <a:ln cap="flat" cmpd="sng" w="9525">
+            <a:solidFill>
+              <a:schemeClr val="dk1"/>
+            </a:solidFill>
+            <a:prstDash val="solid"/>
+            <a:round/>
+            <a:headEnd len="sm" w="sm" type="none"/>
+            <a:tailEnd len="sm" w="sm" type="none"/>
+          </a:ln>
+        </p:spPr>
+        <p:txBody>
+          <a:bodyPr anchorCtr="0" anchor="t" bIns="91425" lIns="91425" spcFirstLastPara="1" rIns="91425" wrap="square" tIns="91425">
+            <a:noAutofit/>
+          </a:bodyPr>
+          <a:lstStyle/>
+          <a:p>
+            <a:pPr indent="0" lvl="0" marL="0" rtl="0" algn="l">
+              <a:spcBef>
+                <a:spcPts val="0"/>
+              </a:spcBef>
+              <a:spcAft>
+                <a:spcPts val="0"/>
+              </a:spcAft>
+              <a:buNone/>
+            </a:pPr>
+            <a:r>
+              <a:rPr lang="en"/>
+              <a:t>Data Preprocessing</a:t>
+            </a:r>
+            <a:endParaRPr/>
+          </a:p>
+        </p:txBody>
+      </p:sp>
+      <p:sp>
+        <p:nvSpPr>
+          <p:cNvPr id="341" name="Google Shape;341;p44"/>
+          <p:cNvSpPr txBox="1"/>
+          <p:nvPr>
+            <p:ph idx="7" type="subTitle"/>
+          </p:nvPr>
+        </p:nvSpPr>
+        <p:spPr>
+          <a:xfrm>
+            <a:off x="4938761" y="3167363"/>
+            <a:ext cx="3838500" cy="481200"/>
+          </a:xfrm>
+          <a:prstGeom prst="rect">
+            <a:avLst/>
+          </a:prstGeom>
+          <a:ln cap="flat" cmpd="sng" w="9525">
+            <a:solidFill>
+              <a:schemeClr val="dk1"/>
+            </a:solidFill>
+            <a:prstDash val="solid"/>
+            <a:round/>
+            <a:headEnd len="sm" w="sm" type="none"/>
+            <a:tailEnd len="sm" w="sm" type="none"/>
+          </a:ln>
+        </p:spPr>
+        <p:txBody>
+          <a:bodyPr anchorCtr="0" anchor="t" bIns="91425" lIns="91425" spcFirstLastPara="1" rIns="91425" wrap="square" tIns="91425">
+            <a:noAutofit/>
+          </a:bodyPr>
+          <a:lstStyle/>
+          <a:p>
+            <a:pPr indent="0" lvl="0" marL="0" rtl="0" algn="l">
+              <a:spcBef>
+                <a:spcPts val="0"/>
+              </a:spcBef>
+              <a:spcAft>
+                <a:spcPts val="0"/>
+              </a:spcAft>
+              <a:buNone/>
+            </a:pPr>
+            <a:r>
+              <a:rPr lang="en"/>
+              <a:t>Oversampling</a:t>
+            </a:r>
+            <a:endParaRPr/>
+          </a:p>
+        </p:txBody>
+      </p:sp>
+    </p:spTree>
+  </p:cSld>
+  <p:clrMapOvr>
+    <a:masterClrMapping/>
+  </p:clrMapOvr>
+</p:sld>
+</file>
+
+<file path=ppt/slides/slide6.xml><?xml version="1.0" encoding="utf-8"?>
+<p:sld xmlns:a="http://schemas.openxmlformats.org/drawingml/2006/main" xmlns:r="http://schemas.openxmlformats.org/officeDocument/2006/relationships" xmlns:mc="http://schemas.openxmlformats.org/markup-compatibility/2006" xmlns:mv="urn:schemas-microsoft-com:mac:vml" xmlns:p="http://schemas.openxmlformats.org/presentationml/2006/main" xmlns:c="http://schemas.openxmlformats.org/drawingml/2006/chart" xmlns:dgm="http://schemas.openxmlformats.org/drawingml/2006/diagram" xmlns:o="urn:schemas-microsoft-com:office:office" xmlns:v="urn:schemas-microsoft-com:vml" xmlns:pvml="urn:schemas-microsoft-com:office:powerpoint" xmlns:com="http://schemas.openxmlformats.org/drawingml/2006/compatibility" xmlns:p14="http://schemas.microsoft.com/office/powerpoint/2010/main" xmlns:p15="http://schemas.microsoft.com/office/powerpoint/2012/main" xmlns:ahyp="http://schemas.microsoft.com/office/drawing/2018/hyperlinkcolor">
+  <p:cSld>
+    <p:spTree>
+      <p:nvGrpSpPr>
+        <p:cNvPr id="345" name="Shape 345"/>
+        <p:cNvGrpSpPr/>
+        <p:nvPr/>
+      </p:nvGrpSpPr>
+      <p:grpSpPr>
+        <a:xfrm>
+          <a:off x="0" y="0"/>
+          <a:ext cx="0" cy="0"/>
+          <a:chOff x="0" y="0"/>
+          <a:chExt cx="0" cy="0"/>
+        </a:xfrm>
+      </p:grpSpPr>
+      <p:pic>
+        <p:nvPicPr>
+          <p:cNvPr id="346" name="Google Shape;346;p45"/>
+          <p:cNvPicPr preferRelativeResize="0"/>
+          <p:nvPr/>
+        </p:nvPicPr>
+        <p:blipFill>
+          <a:blip r:embed="rId3">
+            <a:alphaModFix/>
+          </a:blip>
+          <a:stretch>
+            <a:fillRect/>
+          </a:stretch>
+        </p:blipFill>
+        <p:spPr>
+          <a:xfrm>
+            <a:off x="1079138" y="152400"/>
+            <a:ext cx="6985725" cy="4838700"/>
+          </a:xfrm>
+          <a:prstGeom prst="rect">
+            <a:avLst/>
+          </a:prstGeom>
+          <a:noFill/>
+          <a:ln>
+            <a:noFill/>
+          </a:ln>
+        </p:spPr>
+      </p:pic>
+    </p:spTree>
+  </p:cSld>
+  <p:clrMapOvr>
+    <a:masterClrMapping/>
+  </p:clrMapOvr>
+</p:sld>
+</file>
+
+<file path=ppt/slides/slide7.xml><?xml version="1.0" encoding="utf-8"?>
+<p:sld xmlns:a="http://schemas.openxmlformats.org/drawingml/2006/main" xmlns:r="http://schemas.openxmlformats.org/officeDocument/2006/relationships" xmlns:mc="http://schemas.openxmlformats.org/markup-compatibility/2006" xmlns:mv="urn:schemas-microsoft-com:mac:vml" xmlns:p="http://schemas.openxmlformats.org/presentationml/2006/main" xmlns:c="http://schemas.openxmlformats.org/drawingml/2006/chart" xmlns:dgm="http://schemas.openxmlformats.org/drawingml/2006/diagram" xmlns:o="urn:schemas-microsoft-com:office:office" xmlns:v="urn:schemas-microsoft-com:vml" xmlns:pvml="urn:schemas-microsoft-com:office:powerpoint" xmlns:com="http://schemas.openxmlformats.org/drawingml/2006/compatibility" xmlns:p14="http://schemas.microsoft.com/office/powerpoint/2010/main" xmlns:p15="http://schemas.microsoft.com/office/powerpoint/2012/main" xmlns:ahyp="http://schemas.microsoft.com/office/drawing/2018/hyperlinkcolor">
+  <p:cSld>
+    <p:spTree>
+      <p:nvGrpSpPr>
+        <p:cNvPr id="350" name="Shape 350"/>
+        <p:cNvGrpSpPr/>
+        <p:nvPr/>
+      </p:nvGrpSpPr>
+      <p:grpSpPr>
+        <a:xfrm>
+          <a:off x="0" y="0"/>
+          <a:ext cx="0" cy="0"/>
+          <a:chOff x="0" y="0"/>
+          <a:chExt cx="0" cy="0"/>
+        </a:xfrm>
+      </p:grpSpPr>
+      <p:sp>
+        <p:nvSpPr>
+          <p:cNvPr id="351" name="Google Shape;351;p46"/>
+          <p:cNvSpPr txBox="1"/>
+          <p:nvPr>
+            <p:ph idx="3" type="subTitle"/>
+          </p:nvPr>
+        </p:nvSpPr>
+        <p:spPr>
+          <a:xfrm>
+            <a:off x="4406650" y="3425570"/>
+            <a:ext cx="4409700" cy="542700"/>
+          </a:xfrm>
+          <a:prstGeom prst="rect">
+            <a:avLst/>
+          </a:prstGeom>
+        </p:spPr>
+        <p:txBody>
+          <a:bodyPr anchorCtr="0" anchor="t" bIns="91425" lIns="91425" spcFirstLastPara="1" rIns="91425" wrap="square" tIns="91425">
+            <a:noAutofit/>
+          </a:bodyPr>
+          <a:lstStyle/>
+          <a:p>
+            <a:pPr indent="0" lvl="0" marL="0" rtl="0" algn="l">
+              <a:spcBef>
+                <a:spcPts val="0"/>
+              </a:spcBef>
+              <a:spcAft>
+                <a:spcPts val="0"/>
+              </a:spcAft>
+              <a:buNone/>
+            </a:pPr>
+            <a:r>
+              <a:rPr lang="en"/>
+              <a:t>OverSampling (If used)</a:t>
+            </a:r>
+            <a:endParaRPr/>
+          </a:p>
+        </p:txBody>
+      </p:sp>
+      <p:sp>
+        <p:nvSpPr>
+          <p:cNvPr id="352" name="Google Shape;352;p46"/>
+          <p:cNvSpPr txBox="1"/>
+          <p:nvPr>
+            <p:ph idx="1" type="subTitle"/>
+          </p:nvPr>
+        </p:nvSpPr>
+        <p:spPr>
+          <a:xfrm>
+            <a:off x="4406650" y="393750"/>
+            <a:ext cx="4409700" cy="542700"/>
+          </a:xfrm>
+          <a:prstGeom prst="rect">
+            <a:avLst/>
+          </a:prstGeom>
+        </p:spPr>
+        <p:txBody>
+          <a:bodyPr anchorCtr="0" anchor="t" bIns="91425" lIns="91425" spcFirstLastPara="1" rIns="91425" wrap="square" tIns="91425">
+            <a:noAutofit/>
+          </a:bodyPr>
+          <a:lstStyle/>
+          <a:p>
+            <a:pPr indent="0" lvl="0" marL="0" rtl="0" algn="l">
+              <a:spcBef>
+                <a:spcPts val="0"/>
+              </a:spcBef>
+              <a:spcAft>
+                <a:spcPts val="0"/>
+              </a:spcAft>
+              <a:buNone/>
+            </a:pPr>
+            <a:r>
+              <a:rPr lang="en"/>
+              <a:t>Loop through K-Folds (K=5)</a:t>
+            </a:r>
+            <a:endParaRPr/>
+          </a:p>
+        </p:txBody>
+      </p:sp>
+      <p:sp>
+        <p:nvSpPr>
+          <p:cNvPr id="353" name="Google Shape;353;p46"/>
+          <p:cNvSpPr txBox="1"/>
+          <p:nvPr>
+            <p:ph idx="4" type="subTitle"/>
+          </p:nvPr>
+        </p:nvSpPr>
+        <p:spPr>
+          <a:xfrm>
+            <a:off x="4406650" y="1909660"/>
+            <a:ext cx="4409700" cy="542700"/>
+          </a:xfrm>
+          <a:prstGeom prst="rect">
+            <a:avLst/>
+          </a:prstGeom>
+        </p:spPr>
+        <p:txBody>
+          <a:bodyPr anchorCtr="0" anchor="t" bIns="91425" lIns="91425" spcFirstLastPara="1" rIns="91425" wrap="square" tIns="91425">
+            <a:noAutofit/>
+          </a:bodyPr>
+          <a:lstStyle/>
+          <a:p>
+            <a:pPr indent="0" lvl="0" marL="0" rtl="0" algn="l">
+              <a:spcBef>
+                <a:spcPts val="0"/>
+              </a:spcBef>
+              <a:spcAft>
+                <a:spcPts val="0"/>
+              </a:spcAft>
+              <a:buNone/>
+            </a:pPr>
+            <a:r>
+              <a:rPr lang="en"/>
+              <a:t>Perform Stopword Removal</a:t>
+            </a:r>
+            <a:endParaRPr/>
+          </a:p>
+        </p:txBody>
+      </p:sp>
+      <p:sp>
+        <p:nvSpPr>
+          <p:cNvPr id="354" name="Google Shape;354;p46"/>
+          <p:cNvSpPr txBox="1"/>
+          <p:nvPr>
+            <p:ph idx="2" type="subTitle"/>
+          </p:nvPr>
+        </p:nvSpPr>
+        <p:spPr>
+          <a:xfrm>
+            <a:off x="4406650" y="1151705"/>
+            <a:ext cx="4409700" cy="542700"/>
+          </a:xfrm>
+          <a:prstGeom prst="rect">
+            <a:avLst/>
+          </a:prstGeom>
+        </p:spPr>
+        <p:txBody>
+          <a:bodyPr anchorCtr="0" anchor="t" bIns="91425" lIns="91425" spcFirstLastPara="1" rIns="91425" wrap="square" tIns="91425">
+            <a:noAutofit/>
+          </a:bodyPr>
+          <a:lstStyle/>
+          <a:p>
+            <a:pPr indent="0" lvl="0" marL="0" rtl="0" algn="l">
+              <a:spcBef>
+                <a:spcPts val="0"/>
+              </a:spcBef>
+              <a:spcAft>
+                <a:spcPts val="0"/>
+              </a:spcAft>
+              <a:buNone/>
+            </a:pPr>
+            <a:r>
+              <a:rPr lang="en"/>
+              <a:t>Split data</a:t>
+            </a:r>
+            <a:endParaRPr/>
+          </a:p>
+        </p:txBody>
+      </p:sp>
+      <p:sp>
+        <p:nvSpPr>
+          <p:cNvPr id="355" name="Google Shape;355;p46"/>
+          <p:cNvSpPr txBox="1"/>
+          <p:nvPr>
+            <p:ph type="title"/>
+          </p:nvPr>
+        </p:nvSpPr>
+        <p:spPr>
+          <a:xfrm>
+            <a:off x="179025" y="1832775"/>
+            <a:ext cx="4021500" cy="1484100"/>
+          </a:xfrm>
+          <a:prstGeom prst="rect">
+            <a:avLst/>
+          </a:prstGeom>
+        </p:spPr>
+        <p:txBody>
+          <a:bodyPr anchorCtr="0" anchor="ctr" bIns="91425" lIns="91425" spcFirstLastPara="1" rIns="91425" wrap="square" tIns="91425">
+            <a:noAutofit/>
+          </a:bodyPr>
+          <a:lstStyle/>
+          <a:p>
+            <a:pPr indent="0" lvl="0" marL="0" rtl="0" algn="ctr">
+              <a:spcBef>
+                <a:spcPts val="0"/>
+              </a:spcBef>
+              <a:spcAft>
+                <a:spcPts val="0"/>
+              </a:spcAft>
+              <a:buNone/>
+            </a:pPr>
+            <a:r>
+              <a:rPr lang="en"/>
+              <a:t>Implementation and </a:t>
+            </a:r>
+            <a:r>
+              <a:rPr lang="en"/>
+              <a:t>Data Used</a:t>
+            </a:r>
+            <a:endParaRPr/>
+          </a:p>
+        </p:txBody>
+      </p:sp>
+      <p:sp>
+        <p:nvSpPr>
+          <p:cNvPr id="356" name="Google Shape;356;p46"/>
+          <p:cNvSpPr txBox="1"/>
+          <p:nvPr>
+            <p:ph idx="5" type="subTitle"/>
+          </p:nvPr>
+        </p:nvSpPr>
+        <p:spPr>
+          <a:xfrm>
+            <a:off x="4406650" y="4183525"/>
+            <a:ext cx="4409700" cy="542700"/>
+          </a:xfrm>
+          <a:prstGeom prst="rect">
+            <a:avLst/>
+          </a:prstGeom>
+        </p:spPr>
+        <p:txBody>
+          <a:bodyPr anchorCtr="0" anchor="t" bIns="91425" lIns="91425" spcFirstLastPara="1" rIns="91425" wrap="square" tIns="91425">
+            <a:noAutofit/>
+          </a:bodyPr>
+          <a:lstStyle/>
+          <a:p>
+            <a:pPr indent="0" lvl="0" marL="0" rtl="0" algn="l">
+              <a:spcBef>
+                <a:spcPts val="0"/>
+              </a:spcBef>
+              <a:spcAft>
+                <a:spcPts val="0"/>
+              </a:spcAft>
+              <a:buNone/>
+            </a:pPr>
+            <a:r>
+              <a:rPr lang="en"/>
+              <a:t>Fit data to classifier/Predict</a:t>
+            </a:r>
+            <a:endParaRPr/>
+          </a:p>
+        </p:txBody>
+      </p:sp>
+      <p:sp>
+        <p:nvSpPr>
+          <p:cNvPr id="357" name="Google Shape;357;p46"/>
+          <p:cNvSpPr txBox="1"/>
+          <p:nvPr>
+            <p:ph idx="6" type="subTitle"/>
+          </p:nvPr>
+        </p:nvSpPr>
+        <p:spPr>
+          <a:xfrm>
+            <a:off x="4406650" y="2667615"/>
+            <a:ext cx="4409700" cy="542700"/>
+          </a:xfrm>
+          <a:prstGeom prst="rect">
+            <a:avLst/>
+          </a:prstGeom>
+        </p:spPr>
+        <p:txBody>
+          <a:bodyPr anchorCtr="0" anchor="t" bIns="91425" lIns="91425" spcFirstLastPara="1" rIns="91425" wrap="square" tIns="91425">
+            <a:noAutofit/>
+          </a:bodyPr>
+          <a:lstStyle/>
+          <a:p>
+            <a:pPr indent="0" lvl="0" marL="0" rtl="0" algn="l">
+              <a:spcBef>
+                <a:spcPts val="0"/>
+              </a:spcBef>
+              <a:spcAft>
+                <a:spcPts val="0"/>
+              </a:spcAft>
+              <a:buNone/>
+            </a:pPr>
+            <a:r>
+              <a:rPr lang="en"/>
+              <a:t>Tokenization/TF-IDF</a:t>
+            </a:r>
+            <a:endParaRPr/>
+          </a:p>
+        </p:txBody>
+      </p:sp>
+    </p:spTree>
+  </p:cSld>
+  <p:clrMapOvr>
+    <a:masterClrMapping/>
+  </p:clrMapOvr>
+</p:sld>
+</file>
+
+<file path=ppt/slides/slide8.xml><?xml version="1.0" encoding="utf-8"?>
+<p:sld xmlns:a="http://schemas.openxmlformats.org/drawingml/2006/main" xmlns:r="http://schemas.openxmlformats.org/officeDocument/2006/relationships" xmlns:mc="http://schemas.openxmlformats.org/markup-compatibility/2006" xmlns:mv="urn:schemas-microsoft-com:mac:vml" xmlns:p="http://schemas.openxmlformats.org/presentationml/2006/main" xmlns:c="http://schemas.openxmlformats.org/drawingml/2006/chart" xmlns:dgm="http://schemas.openxmlformats.org/drawingml/2006/diagram" xmlns:o="urn:schemas-microsoft-com:office:office" xmlns:v="urn:schemas-microsoft-com:vml" xmlns:pvml="urn:schemas-microsoft-com:office:powerpoint" xmlns:com="http://schemas.openxmlformats.org/drawingml/2006/compatibility" xmlns:p14="http://schemas.microsoft.com/office/powerpoint/2010/main" xmlns:p15="http://schemas.microsoft.com/office/powerpoint/2012/main" xmlns:ahyp="http://schemas.microsoft.com/office/drawing/2018/hyperlinkcolor">
+  <p:cSld>
+    <p:spTree>
+      <p:nvGrpSpPr>
+        <p:cNvPr id="361" name="Shape 361"/>
+        <p:cNvGrpSpPr/>
+        <p:nvPr/>
+      </p:nvGrpSpPr>
+      <p:grpSpPr>
+        <a:xfrm>
+          <a:off x="0" y="0"/>
+          <a:ext cx="0" cy="0"/>
+          <a:chOff x="0" y="0"/>
+          <a:chExt cx="0" cy="0"/>
+        </a:xfrm>
+      </p:grpSpPr>
+      <p:sp>
+        <p:nvSpPr>
+          <p:cNvPr id="362" name="Google Shape;362;p47"/>
+          <p:cNvSpPr txBox="1"/>
+          <p:nvPr>
+            <p:ph type="title"/>
+          </p:nvPr>
+        </p:nvSpPr>
+        <p:spPr>
+          <a:xfrm>
+            <a:off x="311700" y="230700"/>
+            <a:ext cx="8520600" cy="572700"/>
+          </a:xfrm>
+          <a:prstGeom prst="rect">
+            <a:avLst/>
+          </a:prstGeom>
+        </p:spPr>
+        <p:txBody>
+          <a:bodyPr anchorCtr="0" anchor="t" bIns="91425" lIns="91425" spcFirstLastPara="1" rIns="91425" wrap="square" tIns="91425">
+            <a:noAutofit/>
+          </a:bodyPr>
+          <a:lstStyle/>
+          <a:p>
+            <a:pPr indent="0" lvl="0" marL="0" rtl="0" algn="l">
+              <a:spcBef>
+                <a:spcPts val="0"/>
+              </a:spcBef>
+              <a:spcAft>
+                <a:spcPts val="0"/>
+              </a:spcAft>
+              <a:buNone/>
+            </a:pPr>
+            <a:r>
+              <a:rPr lang="en"/>
+              <a:t>Results - (No OS)</a:t>
+            </a:r>
+            <a:endParaRPr/>
+          </a:p>
+        </p:txBody>
+      </p:sp>
+      <p:pic>
+        <p:nvPicPr>
+          <p:cNvPr id="363" name="Google Shape;363;p47"/>
+          <p:cNvPicPr preferRelativeResize="0"/>
+          <p:nvPr/>
+        </p:nvPicPr>
+        <p:blipFill>
+          <a:blip r:embed="rId3">
+            <a:alphaModFix/>
+          </a:blip>
+          <a:stretch>
+            <a:fillRect/>
+          </a:stretch>
+        </p:blipFill>
+        <p:spPr>
+          <a:xfrm>
+            <a:off x="122600" y="1073850"/>
+            <a:ext cx="6042750" cy="3608250"/>
+          </a:xfrm>
+          <a:prstGeom prst="rect">
+            <a:avLst/>
+          </a:prstGeom>
+          <a:noFill/>
+          <a:ln>
+            <a:noFill/>
+          </a:ln>
+        </p:spPr>
+      </p:pic>
+      <p:pic>
+        <p:nvPicPr>
+          <p:cNvPr id="364" name="Google Shape;364;p47"/>
+          <p:cNvPicPr preferRelativeResize="0"/>
+          <p:nvPr/>
+        </p:nvPicPr>
+        <p:blipFill>
+          <a:blip r:embed="rId4">
+            <a:alphaModFix/>
+          </a:blip>
+          <a:stretch>
+            <a:fillRect/>
+          </a:stretch>
+        </p:blipFill>
+        <p:spPr>
+          <a:xfrm>
+            <a:off x="6245025" y="0"/>
+            <a:ext cx="2788193" cy="5143500"/>
+          </a:xfrm>
+          <a:prstGeom prst="rect">
+            <a:avLst/>
+          </a:prstGeom>
+          <a:noFill/>
+          <a:ln>
+            <a:noFill/>
+          </a:ln>
+        </p:spPr>
+      </p:pic>
+    </p:spTree>
+  </p:cSld>
+  <p:clrMapOvr>
+    <a:masterClrMapping/>
+  </p:clrMapOvr>
+</p:sld>
+</file>
+
+<file path=ppt/slides/slide9.xml><?xml version="1.0" encoding="utf-8"?>
+<p:sld xmlns:a="http://schemas.openxmlformats.org/drawingml/2006/main" xmlns:r="http://schemas.openxmlformats.org/officeDocument/2006/relationships" xmlns:mc="http://schemas.openxmlformats.org/markup-compatibility/2006" xmlns:mv="urn:schemas-microsoft-com:mac:vml" xmlns:p="http://schemas.openxmlformats.org/presentationml/2006/main" xmlns:c="http://schemas.openxmlformats.org/drawingml/2006/chart" xmlns:dgm="http://schemas.openxmlformats.org/drawingml/2006/diagram" xmlns:o="urn:schemas-microsoft-com:office:office" xmlns:v="urn:schemas-microsoft-com:vml" xmlns:pvml="urn:schemas-microsoft-com:office:powerpoint" xmlns:com="http://schemas.openxmlformats.org/drawingml/2006/compatibility" xmlns:p14="http://schemas.microsoft.com/office/powerpoint/2010/main" xmlns:p15="http://schemas.microsoft.com/office/powerpoint/2012/main" xmlns:ahyp="http://schemas.microsoft.com/office/drawing/2018/hyperlinkcolor">
+  <p:cSld>
+    <p:spTree>
+      <p:nvGrpSpPr>
+        <p:cNvPr id="368" name="Shape 368"/>
+        <p:cNvGrpSpPr/>
+        <p:nvPr/>
+      </p:nvGrpSpPr>
+      <p:grpSpPr>
+        <a:xfrm>
+          <a:off x="0" y="0"/>
+          <a:ext cx="0" cy="0"/>
+          <a:chOff x="0" y="0"/>
+          <a:chExt cx="0" cy="0"/>
+        </a:xfrm>
+      </p:grpSpPr>
+      <p:sp>
+        <p:nvSpPr>
+          <p:cNvPr id="369" name="Google Shape;369;p48"/>
+          <p:cNvSpPr txBox="1"/>
+          <p:nvPr>
+            <p:ph type="title"/>
+          </p:nvPr>
+        </p:nvSpPr>
+        <p:spPr>
+          <a:xfrm>
+            <a:off x="311700" y="230700"/>
+            <a:ext cx="8520600" cy="572700"/>
+          </a:xfrm>
+          <a:prstGeom prst="rect">
+            <a:avLst/>
+          </a:prstGeom>
+        </p:spPr>
+        <p:txBody>
+          <a:bodyPr anchorCtr="0" anchor="t" bIns="91425" lIns="91425" spcFirstLastPara="1" rIns="91425" wrap="square" tIns="91425">
+            <a:noAutofit/>
+          </a:bodyPr>
+          <a:lstStyle/>
+          <a:p>
+            <a:pPr indent="0" lvl="0" marL="0" rtl="0" algn="l">
+              <a:spcBef>
+                <a:spcPts val="0"/>
+              </a:spcBef>
+              <a:spcAft>
+                <a:spcPts val="0"/>
+              </a:spcAft>
+              <a:buNone/>
+            </a:pPr>
+            <a:r>
+              <a:rPr lang="en"/>
+              <a:t>Results - (OS)</a:t>
+            </a:r>
+            <a:endParaRPr/>
+          </a:p>
+        </p:txBody>
+      </p:sp>
+      <p:pic>
+        <p:nvPicPr>
+          <p:cNvPr id="370" name="Google Shape;370;p48"/>
+          <p:cNvPicPr preferRelativeResize="0"/>
+          <p:nvPr/>
+        </p:nvPicPr>
+        <p:blipFill rotWithShape="1">
+          <a:blip r:embed="rId3">
+            <a:alphaModFix/>
+          </a:blip>
+          <a:srcRect b="12403" l="0" r="0" t="0"/>
+          <a:stretch/>
+        </p:blipFill>
+        <p:spPr>
+          <a:xfrm>
+            <a:off x="6291425" y="0"/>
+            <a:ext cx="2777063" cy="5143501"/>
+          </a:xfrm>
+          <a:prstGeom prst="rect">
+            <a:avLst/>
+          </a:prstGeom>
+          <a:noFill/>
+          <a:ln>
+            <a:noFill/>
+          </a:ln>
+        </p:spPr>
+      </p:pic>
+      <p:pic>
+        <p:nvPicPr>
+          <p:cNvPr id="371" name="Google Shape;371;p48"/>
+          <p:cNvPicPr preferRelativeResize="0"/>
+          <p:nvPr/>
+        </p:nvPicPr>
+        <p:blipFill>
+          <a:blip r:embed="rId4">
+            <a:alphaModFix/>
+          </a:blip>
+          <a:stretch>
+            <a:fillRect/>
+          </a:stretch>
+        </p:blipFill>
+        <p:spPr>
+          <a:xfrm>
+            <a:off x="111125" y="1124850"/>
+            <a:ext cx="6042750" cy="3564788"/>
+          </a:xfrm>
+          <a:prstGeom prst="rect">
+            <a:avLst/>
+          </a:prstGeom>
+          <a:noFill/>
+          <a:ln>
+            <a:noFill/>
+          </a:ln>
+        </p:spPr>
+      </p:pic>
     </p:spTree>
   </p:cSld>
   <p:clrMapOvr>

--- a/hw3/HW 3 Presentation Alex Litchfield.pptx
+++ b/hw3/HW 3 Presentation Alex Litchfield.pptx
@@ -35245,7 +35245,7 @@
             <a:tbl>
               <a:tblPr>
                 <a:noFill/>
-                <a:tableStyleId>{C8A6E4C6-5361-4C3F-AD50-660C7093A980}</a:tableStyleId>
+                <a:tableStyleId>{310D020C-E558-4D8B-8211-8E8DAEBF2D37}</a:tableStyleId>
               </a:tblPr>
               <a:tblGrid>
                 <a:gridCol w="1652400"/>
@@ -36838,7 +36838,7 @@
             <a:tbl>
               <a:tblPr>
                 <a:noFill/>
-                <a:tableStyleId>{C8A6E4C6-5361-4C3F-AD50-660C7093A980}</a:tableStyleId>
+                <a:tableStyleId>{310D020C-E558-4D8B-8211-8E8DAEBF2D37}</a:tableStyleId>
               </a:tblPr>
               <a:tblGrid>
                 <a:gridCol w="6374525"/>
@@ -36860,10 +36860,10 @@
                         <a:buNone/>
                       </a:pPr>
                       <a:r>
-                        <a:rPr lang="en"/>
+                        <a:rPr b="1" lang="en"/>
                         <a:t>Text</a:t>
                       </a:r>
-                      <a:endParaRPr/>
+                      <a:endParaRPr b="1"/>
                     </a:p>
                   </a:txBody>
                   <a:tcPr marT="91425" marB="91425" marR="91425" marL="91425"/>
@@ -36883,10 +36883,10 @@
                         <a:buNone/>
                       </a:pPr>
                       <a:r>
-                        <a:rPr lang="en"/>
+                        <a:rPr b="1" lang="en"/>
                         <a:t>Label</a:t>
                       </a:r>
-                      <a:endParaRPr/>
+                      <a:endParaRPr b="1"/>
                     </a:p>
                   </a:txBody>
                   <a:tcPr marT="91425" marB="91425" marR="91425" marL="91425"/>
@@ -37103,7 +37103,7 @@
             <a:tbl>
               <a:tblPr>
                 <a:noFill/>
-                <a:tableStyleId>{C8A6E4C6-5361-4C3F-AD50-660C7093A980}</a:tableStyleId>
+                <a:tableStyleId>{310D020C-E558-4D8B-8211-8E8DAEBF2D37}</a:tableStyleId>
               </a:tblPr>
               <a:tblGrid>
                 <a:gridCol w="1464725"/>
@@ -37130,10 +37130,10 @@
                         <a:buNone/>
                       </a:pPr>
                       <a:r>
-                        <a:rPr lang="en"/>
+                        <a:rPr b="1" lang="en"/>
                         <a:t>Label In actual Dataset</a:t>
                       </a:r>
-                      <a:endParaRPr/>
+                      <a:endParaRPr b="1"/>
                     </a:p>
                   </a:txBody>
                   <a:tcPr marT="91425" marB="91425" marR="91425" marL="91425"/>
@@ -37293,10 +37293,10 @@
                         <a:buNone/>
                       </a:pPr>
                       <a:r>
-                        <a:rPr lang="en"/>
+                        <a:rPr b="1" lang="en"/>
                         <a:t>Emotion</a:t>
                       </a:r>
-                      <a:endParaRPr/>
+                      <a:endParaRPr b="1"/>
                     </a:p>
                   </a:txBody>
                   <a:tcPr marT="91425" marB="91425" marR="91425" marL="91425"/>
@@ -38410,8 +38410,8 @@
         </p:blipFill>
         <p:spPr>
           <a:xfrm>
-            <a:off x="6245025" y="0"/>
-            <a:ext cx="2788193" cy="5143500"/>
+            <a:off x="6254825" y="0"/>
+            <a:ext cx="2752043" cy="5143501"/>
           </a:xfrm>
           <a:prstGeom prst="rect">
             <a:avLst/>
@@ -38493,17 +38493,18 @@
           <p:cNvPicPr preferRelativeResize="0"/>
           <p:nvPr/>
         </p:nvPicPr>
-        <p:blipFill rotWithShape="1">
+        <p:blipFill>
           <a:blip r:embed="rId3">
             <a:alphaModFix/>
           </a:blip>
-          <a:srcRect b="12403" l="0" r="0" t="0"/>
-          <a:stretch/>
+          <a:stretch>
+            <a:fillRect/>
+          </a:stretch>
         </p:blipFill>
         <p:spPr>
           <a:xfrm>
-            <a:off x="6291425" y="0"/>
-            <a:ext cx="2777063" cy="5143501"/>
+            <a:off x="111125" y="1124850"/>
+            <a:ext cx="6042750" cy="3564788"/>
           </a:xfrm>
           <a:prstGeom prst="rect">
             <a:avLst/>
@@ -38530,8 +38531,8 @@
         </p:blipFill>
         <p:spPr>
           <a:xfrm>
-            <a:off x="111125" y="1124850"/>
-            <a:ext cx="6042750" cy="3564788"/>
+            <a:off x="6250728" y="0"/>
+            <a:ext cx="2812973" cy="5143500"/>
           </a:xfrm>
           <a:prstGeom prst="rect">
             <a:avLst/>
